--- a/docs/content/05-teaching-resources/slides/core/04-engineering-drawings-and-tolerancing.pptx
+++ b/docs/content/05-teaching-resources/slides/core/04-engineering-drawings-and-tolerancing.pptx
@@ -8,13 +8,19 @@
     <p:sldId id="256" r:id="rId7"/>
     <p:sldId id="257" r:id="rId8"/>
     <p:sldId id="258" r:id="rId9"/>
-    <p:sldId id="259" r:id="rId11"/>
+    <p:sldId id="259" r:id="rId10"/>
     <p:sldId id="260" r:id="rId12"/>
     <p:sldId id="261" r:id="rId13"/>
     <p:sldId id="262" r:id="rId14"/>
     <p:sldId id="263" r:id="rId15"/>
     <p:sldId id="264" r:id="rId16"/>
     <p:sldId id="265" r:id="rId17"/>
+    <p:sldId id="266" r:id="rId18"/>
+    <p:sldId id="267" r:id="rId19"/>
+    <p:sldId id="268" r:id="rId20"/>
+    <p:sldId id="269" r:id="rId21"/>
+    <p:sldId id="270" r:id="rId22"/>
+    <p:sldId id="271" r:id="rId23"/>
   </p:sldIdLst>
   <p:sldSz cx="12191695" cy="6858000" type="screen4x3"/>
   <p:notesSz cx="6858000" cy="9144000"/>
@@ -581,7 +587,22 @@
           <a:lstStyle/>
           <a:p>
             <a:r>
-              <a:t>Give students a few minutes to answer on mini whiteboards or paper, then reveal the answers on the next slide.</a:t>
+              <a:t>Answers:</a:t>
+            </a:r>
+          </a:p>
+          <a:p>
+            <a:r>
+              <a:t>1. Orthographic projection.</a:t>
+            </a:r>
+          </a:p>
+          <a:p>
+            <a:r>
+              <a:t>2. How parts assemble.</a:t>
+            </a:r>
+          </a:p>
+          <a:p>
+            <a:r>
+              <a:t>3. BS EN 8888.</a:t>
             </a:r>
           </a:p>
         </p:txBody>
@@ -651,7 +672,22 @@
           <a:lstStyle/>
           <a:p>
             <a:r>
-              <a:t>Talk through any answers the class found difficult.</a:t>
+              <a:t>Answers:</a:t>
+            </a:r>
+          </a:p>
+          <a:p>
+            <a:r>
+              <a:t>1. 49.8 mm and 50.2 mm.</a:t>
+            </a:r>
+          </a:p>
+          <a:p>
+            <a:r>
+              <a:t>2. An interference fit.</a:t>
+            </a:r>
+          </a:p>
+          <a:p>
+            <a:r>
+              <a:t>3. Tighter tolerances cost more to make.</a:t>
             </a:r>
           </a:p>
         </p:txBody>
@@ -677,6 +713,231 @@
 </file>
 
 <file path=ppt/notesSlides/notesSlide4.xml><?xml version="1.0" encoding="utf-8"?>
+<p:notes xmlns:a="http://schemas.openxmlformats.org/drawingml/2006/main" xmlns:p="http://schemas.openxmlformats.org/presentationml/2006/main" xmlns:r="http://schemas.openxmlformats.org/officeDocument/2006/relationships">
+  <p:cSld>
+    <p:spTree>
+      <p:nvGrpSpPr>
+        <p:cNvPr id="1" name=""/>
+        <p:cNvGrpSpPr/>
+        <p:nvPr/>
+      </p:nvGrpSpPr>
+      <p:grpSpPr>
+        <a:xfrm>
+          <a:off x="0" y="0"/>
+          <a:ext cx="0" cy="0"/>
+          <a:chOff x="0" y="0"/>
+          <a:chExt cx="0" cy="0"/>
+        </a:xfrm>
+      </p:grpSpPr>
+      <p:sp>
+        <p:nvSpPr>
+          <p:cNvPr id="2" name="Slide Image Placeholder 1"/>
+          <p:cNvSpPr>
+            <a:spLocks noGrp="1"/>
+          </p:cNvSpPr>
+          <p:nvPr>
+            <p:ph type="sldImg" idx="2"/>
+          </p:nvPr>
+        </p:nvSpPr>
+        <p:spPr/>
+      </p:sp>
+      <p:sp>
+        <p:nvSpPr>
+          <p:cNvPr id="3" name="Notes Placeholder 2"/>
+          <p:cNvSpPr>
+            <a:spLocks noGrp="1"/>
+          </p:cNvSpPr>
+          <p:nvPr>
+            <p:ph type="body" idx="3" sz="quarter"/>
+          </p:nvPr>
+        </p:nvSpPr>
+        <p:spPr/>
+        <p:txBody>
+          <a:bodyPr/>
+          <a:lstStyle/>
+          <a:p>
+            <a:r>
+              <a:t>Answers:</a:t>
+            </a:r>
+          </a:p>
+          <a:p>
+            <a:r>
+              <a:t>1. A reference feature that other features are measured from.</a:t>
+            </a:r>
+          </a:p>
+          <a:p>
+            <a:r>
+              <a:t>2. That circular features share the same centre.</a:t>
+            </a:r>
+          </a:p>
+          <a:p>
+            <a:r>
+              <a:t>3. A feature can be the right size but wrongly positioned or angled.</a:t>
+            </a:r>
+          </a:p>
+        </p:txBody>
+      </p:sp>
+      <p:sp>
+        <p:nvSpPr>
+          <p:cNvPr id="4" name="Slide Number Placeholder 3"/>
+          <p:cNvSpPr>
+            <a:spLocks noGrp="1"/>
+          </p:cNvSpPr>
+          <p:nvPr>
+            <p:ph type="sldNum" idx="5" sz="quarter"/>
+          </p:nvPr>
+        </p:nvSpPr>
+        <p:spPr/>
+      </p:sp>
+    </p:spTree>
+  </p:cSld>
+  <p:clrMapOvr>
+    <a:masterClrMapping/>
+  </p:clrMapOvr>
+</p:notes>
+</file>
+
+<file path=ppt/notesSlides/notesSlide5.xml><?xml version="1.0" encoding="utf-8"?>
+<p:notes xmlns:a="http://schemas.openxmlformats.org/drawingml/2006/main" xmlns:p="http://schemas.openxmlformats.org/presentationml/2006/main" xmlns:r="http://schemas.openxmlformats.org/officeDocument/2006/relationships">
+  <p:cSld>
+    <p:spTree>
+      <p:nvGrpSpPr>
+        <p:cNvPr id="1" name=""/>
+        <p:cNvGrpSpPr/>
+        <p:nvPr/>
+      </p:nvGrpSpPr>
+      <p:grpSpPr>
+        <a:xfrm>
+          <a:off x="0" y="0"/>
+          <a:ext cx="0" cy="0"/>
+          <a:chOff x="0" y="0"/>
+          <a:chExt cx="0" cy="0"/>
+        </a:xfrm>
+      </p:grpSpPr>
+      <p:sp>
+        <p:nvSpPr>
+          <p:cNvPr id="2" name="Slide Image Placeholder 1"/>
+          <p:cNvSpPr>
+            <a:spLocks noGrp="1"/>
+          </p:cNvSpPr>
+          <p:nvPr>
+            <p:ph type="sldImg" idx="2"/>
+          </p:nvPr>
+        </p:nvSpPr>
+        <p:spPr/>
+      </p:sp>
+      <p:sp>
+        <p:nvSpPr>
+          <p:cNvPr id="3" name="Notes Placeholder 2"/>
+          <p:cNvSpPr>
+            <a:spLocks noGrp="1"/>
+          </p:cNvSpPr>
+          <p:nvPr>
+            <p:ph type="body" idx="3" sz="quarter"/>
+          </p:nvPr>
+        </p:nvSpPr>
+        <p:spPr/>
+        <p:txBody>
+          <a:bodyPr/>
+          <a:lstStyle/>
+          <a:p>
+            <a:r>
+              <a:t>Give students a few minutes to answer on mini whiteboards or paper, then reveal the answers on the next slide.</a:t>
+            </a:r>
+          </a:p>
+        </p:txBody>
+      </p:sp>
+      <p:sp>
+        <p:nvSpPr>
+          <p:cNvPr id="4" name="Slide Number Placeholder 3"/>
+          <p:cNvSpPr>
+            <a:spLocks noGrp="1"/>
+          </p:cNvSpPr>
+          <p:nvPr>
+            <p:ph type="sldNum" idx="5" sz="quarter"/>
+          </p:nvPr>
+        </p:nvSpPr>
+        <p:spPr/>
+      </p:sp>
+    </p:spTree>
+  </p:cSld>
+  <p:clrMapOvr>
+    <a:masterClrMapping/>
+  </p:clrMapOvr>
+</p:notes>
+</file>
+
+<file path=ppt/notesSlides/notesSlide6.xml><?xml version="1.0" encoding="utf-8"?>
+<p:notes xmlns:a="http://schemas.openxmlformats.org/drawingml/2006/main" xmlns:p="http://schemas.openxmlformats.org/presentationml/2006/main" xmlns:r="http://schemas.openxmlformats.org/officeDocument/2006/relationships">
+  <p:cSld>
+    <p:spTree>
+      <p:nvGrpSpPr>
+        <p:cNvPr id="1" name=""/>
+        <p:cNvGrpSpPr/>
+        <p:nvPr/>
+      </p:nvGrpSpPr>
+      <p:grpSpPr>
+        <a:xfrm>
+          <a:off x="0" y="0"/>
+          <a:ext cx="0" cy="0"/>
+          <a:chOff x="0" y="0"/>
+          <a:chExt cx="0" cy="0"/>
+        </a:xfrm>
+      </p:grpSpPr>
+      <p:sp>
+        <p:nvSpPr>
+          <p:cNvPr id="2" name="Slide Image Placeholder 1"/>
+          <p:cNvSpPr>
+            <a:spLocks noGrp="1"/>
+          </p:cNvSpPr>
+          <p:nvPr>
+            <p:ph type="sldImg" idx="2"/>
+          </p:nvPr>
+        </p:nvSpPr>
+        <p:spPr/>
+      </p:sp>
+      <p:sp>
+        <p:nvSpPr>
+          <p:cNvPr id="3" name="Notes Placeholder 2"/>
+          <p:cNvSpPr>
+            <a:spLocks noGrp="1"/>
+          </p:cNvSpPr>
+          <p:nvPr>
+            <p:ph type="body" idx="3" sz="quarter"/>
+          </p:nvPr>
+        </p:nvSpPr>
+        <p:spPr/>
+        <p:txBody>
+          <a:bodyPr/>
+          <a:lstStyle/>
+          <a:p>
+            <a:r>
+              <a:t>Talk through any answers the class found difficult.</a:t>
+            </a:r>
+          </a:p>
+        </p:txBody>
+      </p:sp>
+      <p:sp>
+        <p:nvSpPr>
+          <p:cNvPr id="4" name="Slide Number Placeholder 3"/>
+          <p:cNvSpPr>
+            <a:spLocks noGrp="1"/>
+          </p:cNvSpPr>
+          <p:nvPr>
+            <p:ph type="sldNum" idx="5" sz="quarter"/>
+          </p:nvPr>
+        </p:nvSpPr>
+        <p:spPr/>
+      </p:sp>
+    </p:spTree>
+  </p:cSld>
+  <p:clrMapOvr>
+    <a:masterClrMapping/>
+  </p:clrMapOvr>
+</p:notes>
+</file>
+
+<file path=ppt/notesSlides/notesSlide7.xml><?xml version="1.0" encoding="utf-8"?>
 <p:notes xmlns:a="http://schemas.openxmlformats.org/drawingml/2006/main" xmlns:p="http://schemas.openxmlformats.org/presentationml/2006/main" xmlns:r="http://schemas.openxmlformats.org/officeDocument/2006/relationships">
   <p:cSld>
     <p:spTree>
@@ -4052,6 +4313,3652 @@
     <p:bg>
       <p:bgPr>
         <a:solidFill>
+          <a:srgbClr val="FFFFFF"/>
+        </a:solidFill>
+        <a:effectLst/>
+      </p:bgPr>
+    </p:bg>
+    <p:spTree>
+      <p:nvGrpSpPr>
+        <p:cNvPr id="1" name=""/>
+        <p:cNvGrpSpPr/>
+        <p:nvPr/>
+      </p:nvGrpSpPr>
+      <p:grpSpPr/>
+      <p:sp>
+        <p:nvSpPr>
+          <p:cNvPr id="2" name="TextBox 1"/>
+          <p:cNvSpPr txBox="1"/>
+          <p:nvPr/>
+        </p:nvSpPr>
+        <p:spPr>
+          <a:xfrm>
+            <a:off x="548640" y="320040"/>
+            <a:ext cx="11094415" cy="274320"/>
+          </a:xfrm>
+          <a:prstGeom prst="rect">
+            <a:avLst/>
+          </a:prstGeom>
+          <a:noFill/>
+        </p:spPr>
+        <p:txBody>
+          <a:bodyPr wrap="square" anchor="t" lIns="0" rIns="0" tIns="0" bIns="0"/>
+          <a:lstStyle/>
+          <a:p>
+            <a:pPr algn="l"/>
+            <a:r>
+              <a:rPr sz="1100" b="1" i="0">
+                <a:solidFill>
+                  <a:srgbClr val="54595D"/>
+                </a:solidFill>
+                <a:latin typeface="Calibri"/>
+              </a:rPr>
+              <a:t>ENGINEERING CORE  ·  Core topic 3</a:t>
+            </a:r>
+          </a:p>
+        </p:txBody>
+      </p:sp>
+      <p:sp>
+        <p:nvSpPr>
+          <p:cNvPr id="3" name="TextBox 2"/>
+          <p:cNvSpPr txBox="1"/>
+          <p:nvPr/>
+        </p:nvSpPr>
+        <p:spPr>
+          <a:xfrm>
+            <a:off x="548640" y="566928"/>
+            <a:ext cx="11094415" cy="822960"/>
+          </a:xfrm>
+          <a:prstGeom prst="rect">
+            <a:avLst/>
+          </a:prstGeom>
+          <a:noFill/>
+        </p:spPr>
+        <p:txBody>
+          <a:bodyPr wrap="square" anchor="ctr" lIns="0" rIns="0" tIns="0" bIns="0"/>
+          <a:lstStyle/>
+          <a:p>
+            <a:pPr algn="l"/>
+            <a:r>
+              <a:rPr sz="3200" b="1" i="0">
+                <a:solidFill>
+                  <a:srgbClr val="03306E"/>
+                </a:solidFill>
+                <a:latin typeface="Cambria"/>
+              </a:rPr>
+              <a:t>Geometric tolerancing (GD&amp;T)</a:t>
+            </a:r>
+          </a:p>
+        </p:txBody>
+      </p:sp>
+      <p:sp>
+        <p:nvSpPr>
+          <p:cNvPr id="4" name="TextBox 3"/>
+          <p:cNvSpPr txBox="1"/>
+          <p:nvPr/>
+        </p:nvSpPr>
+        <p:spPr>
+          <a:xfrm>
+            <a:off x="548640" y="6446520"/>
+            <a:ext cx="8229600" cy="274320"/>
+          </a:xfrm>
+          <a:prstGeom prst="rect">
+            <a:avLst/>
+          </a:prstGeom>
+          <a:noFill/>
+        </p:spPr>
+        <p:txBody>
+          <a:bodyPr wrap="square" anchor="t" lIns="0" rIns="0" tIns="0" bIns="0"/>
+          <a:lstStyle/>
+          <a:p>
+            <a:pPr algn="l"/>
+            <a:r>
+              <a:rPr sz="1000" b="0" i="0">
+                <a:solidFill>
+                  <a:srgbClr val="54595D"/>
+                </a:solidFill>
+                <a:latin typeface="Calibri"/>
+              </a:rPr>
+              <a:t>Design and Development for Engineering and Manufacturing T Level  ·  Engineering Drawings, Dimensions and Tolerancing</a:t>
+            </a:r>
+          </a:p>
+        </p:txBody>
+      </p:sp>
+      <p:sp>
+        <p:nvSpPr>
+          <p:cNvPr id="5" name="TextBox 4"/>
+          <p:cNvSpPr txBox="1"/>
+          <p:nvPr/>
+        </p:nvSpPr>
+        <p:spPr>
+          <a:xfrm>
+            <a:off x="10728655" y="6446520"/>
+            <a:ext cx="914400" cy="274320"/>
+          </a:xfrm>
+          <a:prstGeom prst="rect">
+            <a:avLst/>
+          </a:prstGeom>
+          <a:noFill/>
+        </p:spPr>
+        <p:txBody>
+          <a:bodyPr wrap="square" anchor="t" lIns="0" rIns="0" tIns="0" bIns="0"/>
+          <a:lstStyle/>
+          <a:p>
+            <a:pPr algn="r"/>
+            <a:r>
+              <a:rPr sz="1000" b="0" i="0">
+                <a:solidFill>
+                  <a:srgbClr val="54595D"/>
+                </a:solidFill>
+                <a:latin typeface="Calibri"/>
+              </a:rPr>
+              <a:t>10</a:t>
+            </a:r>
+          </a:p>
+        </p:txBody>
+      </p:sp>
+      <p:sp>
+        <p:nvSpPr>
+          <p:cNvPr id="6" name="TextBox 5"/>
+          <p:cNvSpPr txBox="1"/>
+          <p:nvPr/>
+        </p:nvSpPr>
+        <p:spPr>
+          <a:xfrm>
+            <a:off x="548640" y="1554480"/>
+            <a:ext cx="6720840" cy="4617720"/>
+          </a:xfrm>
+          <a:prstGeom prst="rect">
+            <a:avLst/>
+          </a:prstGeom>
+          <a:noFill/>
+        </p:spPr>
+        <p:txBody>
+          <a:bodyPr wrap="square" lIns="0" rIns="0" tIns="0" bIns="0">
+            <a:spAutoFit/>
+          </a:bodyPr>
+          <a:lstStyle/>
+          <a:p>
+            <a:pPr>
+              <a:spcAft>
+                <a:spcPts val="1260"/>
+              </a:spcAft>
+            </a:pPr>
+            <a:r>
+              <a:rPr sz="2100" b="1">
+                <a:solidFill>
+                  <a:srgbClr val="202122"/>
+                </a:solidFill>
+                <a:latin typeface="Calibri"/>
+              </a:rPr>
+              <a:t>Size tolerances aren't always enough:</a:t>
+            </a:r>
+            <a:r>
+              <a:rPr sz="2100" b="0">
+                <a:solidFill>
+                  <a:srgbClr val="202122"/>
+                </a:solidFill>
+                <a:latin typeface="Calibri"/>
+              </a:rPr>
+              <a:t> a hole can be the right size but in the wrong place or at the wrong angle. Geometric dimensioning and tolerancing (GD&amp;T) controls form, orientation and position.</a:t>
+            </a:r>
+          </a:p>
+          <a:p>
+            <a:pPr>
+              <a:spcAft>
+                <a:spcPts val="1260"/>
+              </a:spcAft>
+            </a:pPr>
+            <a:r>
+              <a:rPr sz="2100" b="0">
+                <a:solidFill>
+                  <a:srgbClr val="202122"/>
+                </a:solidFill>
+                <a:latin typeface="Calibri"/>
+              </a:rPr>
+              <a:t>A datum is a reference surface or feature everything is measured from. Parallelism keeps a surface parallel to a datum. Perpendicularity keeps it at 90 degrees. Concentricity keeps circular features on the same centre. Straightness keeps a line or edge straight.</a:t>
+            </a:r>
+          </a:p>
+          <a:p>
+            <a:pPr>
+              <a:spcAft>
+                <a:spcPts val="1260"/>
+              </a:spcAft>
+            </a:pPr>
+            <a:r>
+              <a:rPr sz="2100" b="0">
+                <a:solidFill>
+                  <a:srgbClr val="202122"/>
+                </a:solidFill>
+                <a:latin typeface="Calibri"/>
+              </a:rPr>
+              <a:t>Each has a standard symbol in a feature control frame on the drawing.</a:t>
+            </a:r>
+          </a:p>
+        </p:txBody>
+      </p:sp>
+      <p:sp>
+        <p:nvSpPr>
+          <p:cNvPr id="7" name="Rounded Rectangle 6"/>
+          <p:cNvSpPr/>
+          <p:nvPr/>
+        </p:nvSpPr>
+        <p:spPr>
+          <a:xfrm>
+            <a:off x="7772400" y="1554480"/>
+            <a:ext cx="3867912" cy="4526280"/>
+          </a:xfrm>
+          <a:prstGeom prst="roundRect">
+            <a:avLst>
+              <a:gd name="adj" fmla="val 8000"/>
+            </a:avLst>
+          </a:prstGeom>
+          <a:solidFill>
+            <a:srgbClr val="03306E"/>
+          </a:solidFill>
+          <a:ln>
+            <a:noFill/>
+          </a:ln>
+          <a:effectLst/>
+        </p:spPr>
+        <p:style>
+          <a:lnRef idx="1">
+            <a:schemeClr val="accent1"/>
+          </a:lnRef>
+          <a:fillRef idx="3">
+            <a:schemeClr val="accent1"/>
+          </a:fillRef>
+          <a:effectRef idx="2">
+            <a:schemeClr val="accent1"/>
+          </a:effectRef>
+          <a:fontRef idx="minor">
+            <a:schemeClr val="lt1"/>
+          </a:fontRef>
+        </p:style>
+        <p:txBody>
+          <a:bodyPr rtlCol="0" anchor="ctr"/>
+          <a:lstStyle/>
+          <a:p/>
+        </p:txBody>
+      </p:sp>
+      <p:sp>
+        <p:nvSpPr>
+          <p:cNvPr id="8" name="Oval 7"/>
+          <p:cNvSpPr/>
+          <p:nvPr/>
+        </p:nvSpPr>
+        <p:spPr>
+          <a:xfrm>
+            <a:off x="8046720" y="1828800"/>
+            <a:ext cx="548640" cy="548640"/>
+          </a:xfrm>
+          <a:prstGeom prst="ellipse">
+            <a:avLst/>
+          </a:prstGeom>
+          <a:solidFill>
+            <a:srgbClr val="F2B705"/>
+          </a:solidFill>
+          <a:ln>
+            <a:noFill/>
+          </a:ln>
+          <a:effectLst/>
+        </p:spPr>
+        <p:style>
+          <a:lnRef idx="1">
+            <a:schemeClr val="accent1"/>
+          </a:lnRef>
+          <a:fillRef idx="3">
+            <a:schemeClr val="accent1"/>
+          </a:fillRef>
+          <a:effectRef idx="2">
+            <a:schemeClr val="accent1"/>
+          </a:effectRef>
+          <a:fontRef idx="minor">
+            <a:schemeClr val="lt1"/>
+          </a:fontRef>
+        </p:style>
+        <p:txBody>
+          <a:bodyPr rtlCol="0" anchor="ctr" lIns="0" rIns="0" tIns="0" bIns="0"/>
+          <a:lstStyle/>
+          <a:p>
+            <a:pPr algn="ctr"/>
+            <a:r>
+              <a:rPr sz="1300" b="1">
+                <a:solidFill>
+                  <a:srgbClr val="202122"/>
+                </a:solidFill>
+                <a:latin typeface="Calibri"/>
+              </a:rPr>
+              <a:t>e.g.</a:t>
+            </a:r>
+          </a:p>
+        </p:txBody>
+      </p:sp>
+      <p:sp>
+        <p:nvSpPr>
+          <p:cNvPr id="9" name="TextBox 8"/>
+          <p:cNvSpPr txBox="1"/>
+          <p:nvPr/>
+        </p:nvSpPr>
+        <p:spPr>
+          <a:xfrm>
+            <a:off x="8046720" y="2560320"/>
+            <a:ext cx="3291840" cy="365760"/>
+          </a:xfrm>
+          <a:prstGeom prst="rect">
+            <a:avLst/>
+          </a:prstGeom>
+          <a:noFill/>
+        </p:spPr>
+        <p:txBody>
+          <a:bodyPr wrap="square" anchor="t" lIns="0" rIns="0" tIns="0" bIns="0"/>
+          <a:lstStyle/>
+          <a:p>
+            <a:pPr algn="l"/>
+            <a:r>
+              <a:rPr sz="1300" b="1" i="0">
+                <a:solidFill>
+                  <a:srgbClr val="A9C8F0"/>
+                </a:solidFill>
+                <a:latin typeface="Calibri"/>
+              </a:rPr>
+              <a:t>EXAMPLE</a:t>
+            </a:r>
+          </a:p>
+        </p:txBody>
+      </p:sp>
+      <p:sp>
+        <p:nvSpPr>
+          <p:cNvPr id="10" name="TextBox 9"/>
+          <p:cNvSpPr txBox="1"/>
+          <p:nvPr/>
+        </p:nvSpPr>
+        <p:spPr>
+          <a:xfrm>
+            <a:off x="8046720" y="2971800"/>
+            <a:ext cx="3291840" cy="2971800"/>
+          </a:xfrm>
+          <a:prstGeom prst="rect">
+            <a:avLst/>
+          </a:prstGeom>
+          <a:noFill/>
+        </p:spPr>
+        <p:txBody>
+          <a:bodyPr wrap="square" anchor="t" lIns="0" rIns="0" tIns="0" bIns="0"/>
+          <a:lstStyle/>
+          <a:p>
+            <a:pPr algn="l"/>
+            <a:r>
+              <a:rPr sz="1900" b="0" i="0">
+                <a:solidFill>
+                  <a:srgbClr val="FFFFFF"/>
+                </a:solidFill>
+                <a:latin typeface="Cambria"/>
+              </a:rPr>
+              <a:t>A bearing bore must be concentric with the shaft centre line within 0.02 mm, or the shaft will wobble and wear the bearing.</a:t>
+            </a:r>
+          </a:p>
+        </p:txBody>
+      </p:sp>
+    </p:spTree>
+  </p:cSld>
+  <p:clrMapOvr>
+    <a:masterClrMapping/>
+  </p:clrMapOvr>
+</p:sld>
+</file>
+
+<file path=ppt/slides/slide11.xml><?xml version="1.0" encoding="utf-8"?>
+<p:sld xmlns:a="http://schemas.openxmlformats.org/drawingml/2006/main" xmlns:p="http://schemas.openxmlformats.org/presentationml/2006/main" xmlns:r="http://schemas.openxmlformats.org/officeDocument/2006/relationships">
+  <p:cSld>
+    <p:bg>
+      <p:bgPr>
+        <a:solidFill>
+          <a:srgbClr val="FFFFFF"/>
+        </a:solidFill>
+        <a:effectLst/>
+      </p:bgPr>
+    </p:bg>
+    <p:spTree>
+      <p:nvGrpSpPr>
+        <p:cNvPr id="1" name=""/>
+        <p:cNvGrpSpPr/>
+        <p:nvPr/>
+      </p:nvGrpSpPr>
+      <p:grpSpPr/>
+      <p:sp>
+        <p:nvSpPr>
+          <p:cNvPr id="2" name="TextBox 1"/>
+          <p:cNvSpPr txBox="1"/>
+          <p:nvPr/>
+        </p:nvSpPr>
+        <p:spPr>
+          <a:xfrm>
+            <a:off x="548640" y="320040"/>
+            <a:ext cx="11094415" cy="274320"/>
+          </a:xfrm>
+          <a:prstGeom prst="rect">
+            <a:avLst/>
+          </a:prstGeom>
+          <a:noFill/>
+        </p:spPr>
+        <p:txBody>
+          <a:bodyPr wrap="square" anchor="t" lIns="0" rIns="0" tIns="0" bIns="0"/>
+          <a:lstStyle/>
+          <a:p>
+            <a:pPr algn="l"/>
+            <a:r>
+              <a:rPr sz="1100" b="1" i="0">
+                <a:solidFill>
+                  <a:srgbClr val="54595D"/>
+                </a:solidFill>
+                <a:latin typeface="Calibri"/>
+              </a:rPr>
+              <a:t>ENGINEERING CORE  ·  Core topic 3</a:t>
+            </a:r>
+          </a:p>
+        </p:txBody>
+      </p:sp>
+      <p:sp>
+        <p:nvSpPr>
+          <p:cNvPr id="3" name="TextBox 2"/>
+          <p:cNvSpPr txBox="1"/>
+          <p:nvPr/>
+        </p:nvSpPr>
+        <p:spPr>
+          <a:xfrm>
+            <a:off x="548640" y="566928"/>
+            <a:ext cx="11094415" cy="822960"/>
+          </a:xfrm>
+          <a:prstGeom prst="rect">
+            <a:avLst/>
+          </a:prstGeom>
+          <a:noFill/>
+        </p:spPr>
+        <p:txBody>
+          <a:bodyPr wrap="square" anchor="ctr" lIns="0" rIns="0" tIns="0" bIns="0"/>
+          <a:lstStyle/>
+          <a:p>
+            <a:pPr algn="l"/>
+            <a:r>
+              <a:rPr sz="3200" b="1" i="0">
+                <a:solidFill>
+                  <a:srgbClr val="03306E"/>
+                </a:solidFill>
+                <a:latin typeface="Cambria"/>
+              </a:rPr>
+              <a:t>Geometric tolerancing (GD&amp;T)</a:t>
+            </a:r>
+          </a:p>
+        </p:txBody>
+      </p:sp>
+      <p:sp>
+        <p:nvSpPr>
+          <p:cNvPr id="4" name="TextBox 3"/>
+          <p:cNvSpPr txBox="1"/>
+          <p:nvPr/>
+        </p:nvSpPr>
+        <p:spPr>
+          <a:xfrm>
+            <a:off x="548640" y="6446520"/>
+            <a:ext cx="8229600" cy="274320"/>
+          </a:xfrm>
+          <a:prstGeom prst="rect">
+            <a:avLst/>
+          </a:prstGeom>
+          <a:noFill/>
+        </p:spPr>
+        <p:txBody>
+          <a:bodyPr wrap="square" anchor="t" lIns="0" rIns="0" tIns="0" bIns="0"/>
+          <a:lstStyle/>
+          <a:p>
+            <a:pPr algn="l"/>
+            <a:r>
+              <a:rPr sz="1000" b="0" i="0">
+                <a:solidFill>
+                  <a:srgbClr val="54595D"/>
+                </a:solidFill>
+                <a:latin typeface="Calibri"/>
+              </a:rPr>
+              <a:t>Design and Development for Engineering and Manufacturing T Level  ·  Engineering Drawings, Dimensions and Tolerancing</a:t>
+            </a:r>
+          </a:p>
+        </p:txBody>
+      </p:sp>
+      <p:sp>
+        <p:nvSpPr>
+          <p:cNvPr id="5" name="TextBox 4"/>
+          <p:cNvSpPr txBox="1"/>
+          <p:nvPr/>
+        </p:nvSpPr>
+        <p:spPr>
+          <a:xfrm>
+            <a:off x="10728655" y="6446520"/>
+            <a:ext cx="914400" cy="274320"/>
+          </a:xfrm>
+          <a:prstGeom prst="rect">
+            <a:avLst/>
+          </a:prstGeom>
+          <a:noFill/>
+        </p:spPr>
+        <p:txBody>
+          <a:bodyPr wrap="square" anchor="t" lIns="0" rIns="0" tIns="0" bIns="0"/>
+          <a:lstStyle/>
+          <a:p>
+            <a:pPr algn="r"/>
+            <a:r>
+              <a:rPr sz="1000" b="0" i="0">
+                <a:solidFill>
+                  <a:srgbClr val="54595D"/>
+                </a:solidFill>
+                <a:latin typeface="Calibri"/>
+              </a:rPr>
+              <a:t>11</a:t>
+            </a:r>
+          </a:p>
+        </p:txBody>
+      </p:sp>
+      <p:sp>
+        <p:nvSpPr>
+          <p:cNvPr id="6" name="Rounded Rectangle 5"/>
+          <p:cNvSpPr/>
+          <p:nvPr/>
+        </p:nvSpPr>
+        <p:spPr>
+          <a:xfrm>
+            <a:off x="548640" y="1600200"/>
+            <a:ext cx="3515258" cy="2148840"/>
+          </a:xfrm>
+          <a:prstGeom prst="roundRect">
+            <a:avLst>
+              <a:gd name="adj" fmla="val 6000"/>
+            </a:avLst>
+          </a:prstGeom>
+          <a:solidFill>
+            <a:srgbClr val="EAF3FF"/>
+          </a:solidFill>
+          <a:ln>
+            <a:noFill/>
+          </a:ln>
+          <a:effectLst/>
+        </p:spPr>
+        <p:style>
+          <a:lnRef idx="1">
+            <a:schemeClr val="accent1"/>
+          </a:lnRef>
+          <a:fillRef idx="3">
+            <a:schemeClr val="accent1"/>
+          </a:fillRef>
+          <a:effectRef idx="2">
+            <a:schemeClr val="accent1"/>
+          </a:effectRef>
+          <a:fontRef idx="minor">
+            <a:schemeClr val="lt1"/>
+          </a:fontRef>
+        </p:style>
+        <p:txBody>
+          <a:bodyPr rtlCol="0" anchor="ctr"/>
+          <a:lstStyle/>
+          <a:p/>
+        </p:txBody>
+      </p:sp>
+      <p:sp>
+        <p:nvSpPr>
+          <p:cNvPr id="7" name="Oval 6"/>
+          <p:cNvSpPr/>
+          <p:nvPr/>
+        </p:nvSpPr>
+        <p:spPr>
+          <a:xfrm>
+            <a:off x="777240" y="1828800"/>
+            <a:ext cx="457200" cy="457200"/>
+          </a:xfrm>
+          <a:prstGeom prst="ellipse">
+            <a:avLst/>
+          </a:prstGeom>
+          <a:solidFill>
+            <a:srgbClr val="F2B705"/>
+          </a:solidFill>
+          <a:ln>
+            <a:noFill/>
+          </a:ln>
+          <a:effectLst/>
+        </p:spPr>
+        <p:style>
+          <a:lnRef idx="1">
+            <a:schemeClr val="accent1"/>
+          </a:lnRef>
+          <a:fillRef idx="3">
+            <a:schemeClr val="accent1"/>
+          </a:fillRef>
+          <a:effectRef idx="2">
+            <a:schemeClr val="accent1"/>
+          </a:effectRef>
+          <a:fontRef idx="minor">
+            <a:schemeClr val="lt1"/>
+          </a:fontRef>
+        </p:style>
+        <p:txBody>
+          <a:bodyPr rtlCol="0" anchor="ctr" lIns="0" rIns="0" tIns="0" bIns="0"/>
+          <a:lstStyle/>
+          <a:p>
+            <a:pPr algn="ctr"/>
+            <a:r>
+              <a:rPr sz="1500" b="1">
+                <a:solidFill>
+                  <a:srgbClr val="202122"/>
+                </a:solidFill>
+                <a:latin typeface="Calibri"/>
+              </a:rPr>
+              <a:t>1</a:t>
+            </a:r>
+          </a:p>
+        </p:txBody>
+      </p:sp>
+      <p:sp>
+        <p:nvSpPr>
+          <p:cNvPr id="8" name="TextBox 7"/>
+          <p:cNvSpPr txBox="1"/>
+          <p:nvPr/>
+        </p:nvSpPr>
+        <p:spPr>
+          <a:xfrm>
+            <a:off x="1371600" y="1801368"/>
+            <a:ext cx="2509418" cy="512064"/>
+          </a:xfrm>
+          <a:prstGeom prst="rect">
+            <a:avLst/>
+          </a:prstGeom>
+          <a:noFill/>
+        </p:spPr>
+        <p:txBody>
+          <a:bodyPr wrap="square" anchor="ctr" lIns="0" rIns="0" tIns="0" bIns="0"/>
+          <a:lstStyle/>
+          <a:p>
+            <a:pPr algn="l"/>
+            <a:r>
+              <a:rPr sz="1900" b="1" i="0">
+                <a:solidFill>
+                  <a:srgbClr val="03306E"/>
+                </a:solidFill>
+                <a:latin typeface="Calibri"/>
+              </a:rPr>
+              <a:t>Datum</a:t>
+            </a:r>
+          </a:p>
+        </p:txBody>
+      </p:sp>
+      <p:sp>
+        <p:nvSpPr>
+          <p:cNvPr id="9" name="TextBox 8"/>
+          <p:cNvSpPr txBox="1"/>
+          <p:nvPr/>
+        </p:nvSpPr>
+        <p:spPr>
+          <a:xfrm>
+            <a:off x="777240" y="2468880"/>
+            <a:ext cx="3058058" cy="1143000"/>
+          </a:xfrm>
+          <a:prstGeom prst="rect">
+            <a:avLst/>
+          </a:prstGeom>
+          <a:noFill/>
+        </p:spPr>
+        <p:txBody>
+          <a:bodyPr wrap="square" anchor="t" lIns="0" rIns="0" tIns="0" bIns="0"/>
+          <a:lstStyle/>
+          <a:p>
+            <a:pPr algn="l"/>
+            <a:r>
+              <a:rPr sz="2000" b="0" i="0">
+                <a:solidFill>
+                  <a:srgbClr val="202122"/>
+                </a:solidFill>
+                <a:latin typeface="Calibri"/>
+              </a:rPr>
+              <a:t>A reference surface or feature to measure from.</a:t>
+            </a:r>
+          </a:p>
+        </p:txBody>
+      </p:sp>
+      <p:sp>
+        <p:nvSpPr>
+          <p:cNvPr id="10" name="Rounded Rectangle 9"/>
+          <p:cNvSpPr/>
+          <p:nvPr/>
+        </p:nvSpPr>
+        <p:spPr>
+          <a:xfrm>
+            <a:off x="4338218" y="1600200"/>
+            <a:ext cx="3515258" cy="2148840"/>
+          </a:xfrm>
+          <a:prstGeom prst="roundRect">
+            <a:avLst>
+              <a:gd name="adj" fmla="val 6000"/>
+            </a:avLst>
+          </a:prstGeom>
+          <a:solidFill>
+            <a:srgbClr val="EAF3FF"/>
+          </a:solidFill>
+          <a:ln>
+            <a:noFill/>
+          </a:ln>
+          <a:effectLst/>
+        </p:spPr>
+        <p:style>
+          <a:lnRef idx="1">
+            <a:schemeClr val="accent1"/>
+          </a:lnRef>
+          <a:fillRef idx="3">
+            <a:schemeClr val="accent1"/>
+          </a:fillRef>
+          <a:effectRef idx="2">
+            <a:schemeClr val="accent1"/>
+          </a:effectRef>
+          <a:fontRef idx="minor">
+            <a:schemeClr val="lt1"/>
+          </a:fontRef>
+        </p:style>
+        <p:txBody>
+          <a:bodyPr rtlCol="0" anchor="ctr"/>
+          <a:lstStyle/>
+          <a:p/>
+        </p:txBody>
+      </p:sp>
+      <p:sp>
+        <p:nvSpPr>
+          <p:cNvPr id="11" name="Oval 10"/>
+          <p:cNvSpPr/>
+          <p:nvPr/>
+        </p:nvSpPr>
+        <p:spPr>
+          <a:xfrm>
+            <a:off x="4566818" y="1828800"/>
+            <a:ext cx="457200" cy="457200"/>
+          </a:xfrm>
+          <a:prstGeom prst="ellipse">
+            <a:avLst/>
+          </a:prstGeom>
+          <a:solidFill>
+            <a:srgbClr val="F2B705"/>
+          </a:solidFill>
+          <a:ln>
+            <a:noFill/>
+          </a:ln>
+          <a:effectLst/>
+        </p:spPr>
+        <p:style>
+          <a:lnRef idx="1">
+            <a:schemeClr val="accent1"/>
+          </a:lnRef>
+          <a:fillRef idx="3">
+            <a:schemeClr val="accent1"/>
+          </a:fillRef>
+          <a:effectRef idx="2">
+            <a:schemeClr val="accent1"/>
+          </a:effectRef>
+          <a:fontRef idx="minor">
+            <a:schemeClr val="lt1"/>
+          </a:fontRef>
+        </p:style>
+        <p:txBody>
+          <a:bodyPr rtlCol="0" anchor="ctr" lIns="0" rIns="0" tIns="0" bIns="0"/>
+          <a:lstStyle/>
+          <a:p>
+            <a:pPr algn="ctr"/>
+            <a:r>
+              <a:rPr sz="1500" b="1">
+                <a:solidFill>
+                  <a:srgbClr val="202122"/>
+                </a:solidFill>
+                <a:latin typeface="Calibri"/>
+              </a:rPr>
+              <a:t>2</a:t>
+            </a:r>
+          </a:p>
+        </p:txBody>
+      </p:sp>
+      <p:sp>
+        <p:nvSpPr>
+          <p:cNvPr id="12" name="TextBox 11"/>
+          <p:cNvSpPr txBox="1"/>
+          <p:nvPr/>
+        </p:nvSpPr>
+        <p:spPr>
+          <a:xfrm>
+            <a:off x="5161178" y="1801368"/>
+            <a:ext cx="2509418" cy="512064"/>
+          </a:xfrm>
+          <a:prstGeom prst="rect">
+            <a:avLst/>
+          </a:prstGeom>
+          <a:noFill/>
+        </p:spPr>
+        <p:txBody>
+          <a:bodyPr wrap="square" anchor="ctr" lIns="0" rIns="0" tIns="0" bIns="0"/>
+          <a:lstStyle/>
+          <a:p>
+            <a:pPr algn="l"/>
+            <a:r>
+              <a:rPr sz="1900" b="1" i="0">
+                <a:solidFill>
+                  <a:srgbClr val="03306E"/>
+                </a:solidFill>
+                <a:latin typeface="Calibri"/>
+              </a:rPr>
+              <a:t>Parallelism</a:t>
+            </a:r>
+          </a:p>
+        </p:txBody>
+      </p:sp>
+      <p:sp>
+        <p:nvSpPr>
+          <p:cNvPr id="13" name="TextBox 12"/>
+          <p:cNvSpPr txBox="1"/>
+          <p:nvPr/>
+        </p:nvSpPr>
+        <p:spPr>
+          <a:xfrm>
+            <a:off x="4566818" y="2468880"/>
+            <a:ext cx="3058058" cy="1143000"/>
+          </a:xfrm>
+          <a:prstGeom prst="rect">
+            <a:avLst/>
+          </a:prstGeom>
+          <a:noFill/>
+        </p:spPr>
+        <p:txBody>
+          <a:bodyPr wrap="square" anchor="t" lIns="0" rIns="0" tIns="0" bIns="0"/>
+          <a:lstStyle/>
+          <a:p>
+            <a:pPr algn="l"/>
+            <a:r>
+              <a:rPr sz="2000" b="0" i="0">
+                <a:solidFill>
+                  <a:srgbClr val="202122"/>
+                </a:solidFill>
+                <a:latin typeface="Calibri"/>
+              </a:rPr>
+              <a:t>A surface stays parallel to a datum.</a:t>
+            </a:r>
+          </a:p>
+        </p:txBody>
+      </p:sp>
+      <p:sp>
+        <p:nvSpPr>
+          <p:cNvPr id="14" name="Rounded Rectangle 13"/>
+          <p:cNvSpPr/>
+          <p:nvPr/>
+        </p:nvSpPr>
+        <p:spPr>
+          <a:xfrm>
+            <a:off x="8127796" y="1600200"/>
+            <a:ext cx="3515258" cy="2148840"/>
+          </a:xfrm>
+          <a:prstGeom prst="roundRect">
+            <a:avLst>
+              <a:gd name="adj" fmla="val 6000"/>
+            </a:avLst>
+          </a:prstGeom>
+          <a:solidFill>
+            <a:srgbClr val="EAF3FF"/>
+          </a:solidFill>
+          <a:ln>
+            <a:noFill/>
+          </a:ln>
+          <a:effectLst/>
+        </p:spPr>
+        <p:style>
+          <a:lnRef idx="1">
+            <a:schemeClr val="accent1"/>
+          </a:lnRef>
+          <a:fillRef idx="3">
+            <a:schemeClr val="accent1"/>
+          </a:fillRef>
+          <a:effectRef idx="2">
+            <a:schemeClr val="accent1"/>
+          </a:effectRef>
+          <a:fontRef idx="minor">
+            <a:schemeClr val="lt1"/>
+          </a:fontRef>
+        </p:style>
+        <p:txBody>
+          <a:bodyPr rtlCol="0" anchor="ctr"/>
+          <a:lstStyle/>
+          <a:p/>
+        </p:txBody>
+      </p:sp>
+      <p:sp>
+        <p:nvSpPr>
+          <p:cNvPr id="15" name="Oval 14"/>
+          <p:cNvSpPr/>
+          <p:nvPr/>
+        </p:nvSpPr>
+        <p:spPr>
+          <a:xfrm>
+            <a:off x="8356396" y="1828800"/>
+            <a:ext cx="457200" cy="457200"/>
+          </a:xfrm>
+          <a:prstGeom prst="ellipse">
+            <a:avLst/>
+          </a:prstGeom>
+          <a:solidFill>
+            <a:srgbClr val="F2B705"/>
+          </a:solidFill>
+          <a:ln>
+            <a:noFill/>
+          </a:ln>
+          <a:effectLst/>
+        </p:spPr>
+        <p:style>
+          <a:lnRef idx="1">
+            <a:schemeClr val="accent1"/>
+          </a:lnRef>
+          <a:fillRef idx="3">
+            <a:schemeClr val="accent1"/>
+          </a:fillRef>
+          <a:effectRef idx="2">
+            <a:schemeClr val="accent1"/>
+          </a:effectRef>
+          <a:fontRef idx="minor">
+            <a:schemeClr val="lt1"/>
+          </a:fontRef>
+        </p:style>
+        <p:txBody>
+          <a:bodyPr rtlCol="0" anchor="ctr" lIns="0" rIns="0" tIns="0" bIns="0"/>
+          <a:lstStyle/>
+          <a:p>
+            <a:pPr algn="ctr"/>
+            <a:r>
+              <a:rPr sz="1500" b="1">
+                <a:solidFill>
+                  <a:srgbClr val="202122"/>
+                </a:solidFill>
+                <a:latin typeface="Calibri"/>
+              </a:rPr>
+              <a:t>3</a:t>
+            </a:r>
+          </a:p>
+        </p:txBody>
+      </p:sp>
+      <p:sp>
+        <p:nvSpPr>
+          <p:cNvPr id="16" name="TextBox 15"/>
+          <p:cNvSpPr txBox="1"/>
+          <p:nvPr/>
+        </p:nvSpPr>
+        <p:spPr>
+          <a:xfrm>
+            <a:off x="8950756" y="1801368"/>
+            <a:ext cx="2509418" cy="512064"/>
+          </a:xfrm>
+          <a:prstGeom prst="rect">
+            <a:avLst/>
+          </a:prstGeom>
+          <a:noFill/>
+        </p:spPr>
+        <p:txBody>
+          <a:bodyPr wrap="square" anchor="ctr" lIns="0" rIns="0" tIns="0" bIns="0"/>
+          <a:lstStyle/>
+          <a:p>
+            <a:pPr algn="l"/>
+            <a:r>
+              <a:rPr sz="1900" b="1" i="0">
+                <a:solidFill>
+                  <a:srgbClr val="03306E"/>
+                </a:solidFill>
+                <a:latin typeface="Calibri"/>
+              </a:rPr>
+              <a:t>Perpendicularity</a:t>
+            </a:r>
+          </a:p>
+        </p:txBody>
+      </p:sp>
+      <p:sp>
+        <p:nvSpPr>
+          <p:cNvPr id="17" name="TextBox 16"/>
+          <p:cNvSpPr txBox="1"/>
+          <p:nvPr/>
+        </p:nvSpPr>
+        <p:spPr>
+          <a:xfrm>
+            <a:off x="8356396" y="2468880"/>
+            <a:ext cx="3058058" cy="1143000"/>
+          </a:xfrm>
+          <a:prstGeom prst="rect">
+            <a:avLst/>
+          </a:prstGeom>
+          <a:noFill/>
+        </p:spPr>
+        <p:txBody>
+          <a:bodyPr wrap="square" anchor="t" lIns="0" rIns="0" tIns="0" bIns="0"/>
+          <a:lstStyle/>
+          <a:p>
+            <a:pPr algn="l"/>
+            <a:r>
+              <a:rPr sz="2000" b="0" i="0">
+                <a:solidFill>
+                  <a:srgbClr val="202122"/>
+                </a:solidFill>
+                <a:latin typeface="Calibri"/>
+              </a:rPr>
+              <a:t>A surface stays at 90 degrees to a datum.</a:t>
+            </a:r>
+          </a:p>
+        </p:txBody>
+      </p:sp>
+      <p:sp>
+        <p:nvSpPr>
+          <p:cNvPr id="18" name="Rounded Rectangle 17"/>
+          <p:cNvSpPr/>
+          <p:nvPr/>
+        </p:nvSpPr>
+        <p:spPr>
+          <a:xfrm>
+            <a:off x="548640" y="4023360"/>
+            <a:ext cx="3515258" cy="2148840"/>
+          </a:xfrm>
+          <a:prstGeom prst="roundRect">
+            <a:avLst>
+              <a:gd name="adj" fmla="val 6000"/>
+            </a:avLst>
+          </a:prstGeom>
+          <a:solidFill>
+            <a:srgbClr val="EAF3FF"/>
+          </a:solidFill>
+          <a:ln>
+            <a:noFill/>
+          </a:ln>
+          <a:effectLst/>
+        </p:spPr>
+        <p:style>
+          <a:lnRef idx="1">
+            <a:schemeClr val="accent1"/>
+          </a:lnRef>
+          <a:fillRef idx="3">
+            <a:schemeClr val="accent1"/>
+          </a:fillRef>
+          <a:effectRef idx="2">
+            <a:schemeClr val="accent1"/>
+          </a:effectRef>
+          <a:fontRef idx="minor">
+            <a:schemeClr val="lt1"/>
+          </a:fontRef>
+        </p:style>
+        <p:txBody>
+          <a:bodyPr rtlCol="0" anchor="ctr"/>
+          <a:lstStyle/>
+          <a:p/>
+        </p:txBody>
+      </p:sp>
+      <p:sp>
+        <p:nvSpPr>
+          <p:cNvPr id="19" name="Oval 18"/>
+          <p:cNvSpPr/>
+          <p:nvPr/>
+        </p:nvSpPr>
+        <p:spPr>
+          <a:xfrm>
+            <a:off x="777240" y="4251960"/>
+            <a:ext cx="457200" cy="457200"/>
+          </a:xfrm>
+          <a:prstGeom prst="ellipse">
+            <a:avLst/>
+          </a:prstGeom>
+          <a:solidFill>
+            <a:srgbClr val="F2B705"/>
+          </a:solidFill>
+          <a:ln>
+            <a:noFill/>
+          </a:ln>
+          <a:effectLst/>
+        </p:spPr>
+        <p:style>
+          <a:lnRef idx="1">
+            <a:schemeClr val="accent1"/>
+          </a:lnRef>
+          <a:fillRef idx="3">
+            <a:schemeClr val="accent1"/>
+          </a:fillRef>
+          <a:effectRef idx="2">
+            <a:schemeClr val="accent1"/>
+          </a:effectRef>
+          <a:fontRef idx="minor">
+            <a:schemeClr val="lt1"/>
+          </a:fontRef>
+        </p:style>
+        <p:txBody>
+          <a:bodyPr rtlCol="0" anchor="ctr" lIns="0" rIns="0" tIns="0" bIns="0"/>
+          <a:lstStyle/>
+          <a:p>
+            <a:pPr algn="ctr"/>
+            <a:r>
+              <a:rPr sz="1500" b="1">
+                <a:solidFill>
+                  <a:srgbClr val="202122"/>
+                </a:solidFill>
+                <a:latin typeface="Calibri"/>
+              </a:rPr>
+              <a:t>4</a:t>
+            </a:r>
+          </a:p>
+        </p:txBody>
+      </p:sp>
+      <p:sp>
+        <p:nvSpPr>
+          <p:cNvPr id="20" name="TextBox 19"/>
+          <p:cNvSpPr txBox="1"/>
+          <p:nvPr/>
+        </p:nvSpPr>
+        <p:spPr>
+          <a:xfrm>
+            <a:off x="1371600" y="4224528"/>
+            <a:ext cx="2509418" cy="512064"/>
+          </a:xfrm>
+          <a:prstGeom prst="rect">
+            <a:avLst/>
+          </a:prstGeom>
+          <a:noFill/>
+        </p:spPr>
+        <p:txBody>
+          <a:bodyPr wrap="square" anchor="ctr" lIns="0" rIns="0" tIns="0" bIns="0"/>
+          <a:lstStyle/>
+          <a:p>
+            <a:pPr algn="l"/>
+            <a:r>
+              <a:rPr sz="1900" b="1" i="0">
+                <a:solidFill>
+                  <a:srgbClr val="03306E"/>
+                </a:solidFill>
+                <a:latin typeface="Calibri"/>
+              </a:rPr>
+              <a:t>Concentricity</a:t>
+            </a:r>
+          </a:p>
+        </p:txBody>
+      </p:sp>
+      <p:sp>
+        <p:nvSpPr>
+          <p:cNvPr id="21" name="TextBox 20"/>
+          <p:cNvSpPr txBox="1"/>
+          <p:nvPr/>
+        </p:nvSpPr>
+        <p:spPr>
+          <a:xfrm>
+            <a:off x="777240" y="4892040"/>
+            <a:ext cx="3058058" cy="1143000"/>
+          </a:xfrm>
+          <a:prstGeom prst="rect">
+            <a:avLst/>
+          </a:prstGeom>
+          <a:noFill/>
+        </p:spPr>
+        <p:txBody>
+          <a:bodyPr wrap="square" anchor="t" lIns="0" rIns="0" tIns="0" bIns="0"/>
+          <a:lstStyle/>
+          <a:p>
+            <a:pPr algn="l"/>
+            <a:r>
+              <a:rPr sz="2000" b="0" i="0">
+                <a:solidFill>
+                  <a:srgbClr val="202122"/>
+                </a:solidFill>
+                <a:latin typeface="Calibri"/>
+              </a:rPr>
+              <a:t>Circular features share a centre.</a:t>
+            </a:r>
+          </a:p>
+        </p:txBody>
+      </p:sp>
+      <p:sp>
+        <p:nvSpPr>
+          <p:cNvPr id="22" name="Rounded Rectangle 21"/>
+          <p:cNvSpPr/>
+          <p:nvPr/>
+        </p:nvSpPr>
+        <p:spPr>
+          <a:xfrm>
+            <a:off x="4338218" y="4023360"/>
+            <a:ext cx="3515258" cy="2148840"/>
+          </a:xfrm>
+          <a:prstGeom prst="roundRect">
+            <a:avLst>
+              <a:gd name="adj" fmla="val 6000"/>
+            </a:avLst>
+          </a:prstGeom>
+          <a:solidFill>
+            <a:srgbClr val="EAF3FF"/>
+          </a:solidFill>
+          <a:ln>
+            <a:noFill/>
+          </a:ln>
+          <a:effectLst/>
+        </p:spPr>
+        <p:style>
+          <a:lnRef idx="1">
+            <a:schemeClr val="accent1"/>
+          </a:lnRef>
+          <a:fillRef idx="3">
+            <a:schemeClr val="accent1"/>
+          </a:fillRef>
+          <a:effectRef idx="2">
+            <a:schemeClr val="accent1"/>
+          </a:effectRef>
+          <a:fontRef idx="minor">
+            <a:schemeClr val="lt1"/>
+          </a:fontRef>
+        </p:style>
+        <p:txBody>
+          <a:bodyPr rtlCol="0" anchor="ctr"/>
+          <a:lstStyle/>
+          <a:p/>
+        </p:txBody>
+      </p:sp>
+      <p:sp>
+        <p:nvSpPr>
+          <p:cNvPr id="23" name="Oval 22"/>
+          <p:cNvSpPr/>
+          <p:nvPr/>
+        </p:nvSpPr>
+        <p:spPr>
+          <a:xfrm>
+            <a:off x="4566818" y="4251960"/>
+            <a:ext cx="457200" cy="457200"/>
+          </a:xfrm>
+          <a:prstGeom prst="ellipse">
+            <a:avLst/>
+          </a:prstGeom>
+          <a:solidFill>
+            <a:srgbClr val="F2B705"/>
+          </a:solidFill>
+          <a:ln>
+            <a:noFill/>
+          </a:ln>
+          <a:effectLst/>
+        </p:spPr>
+        <p:style>
+          <a:lnRef idx="1">
+            <a:schemeClr val="accent1"/>
+          </a:lnRef>
+          <a:fillRef idx="3">
+            <a:schemeClr val="accent1"/>
+          </a:fillRef>
+          <a:effectRef idx="2">
+            <a:schemeClr val="accent1"/>
+          </a:effectRef>
+          <a:fontRef idx="minor">
+            <a:schemeClr val="lt1"/>
+          </a:fontRef>
+        </p:style>
+        <p:txBody>
+          <a:bodyPr rtlCol="0" anchor="ctr" lIns="0" rIns="0" tIns="0" bIns="0"/>
+          <a:lstStyle/>
+          <a:p>
+            <a:pPr algn="ctr"/>
+            <a:r>
+              <a:rPr sz="1500" b="1">
+                <a:solidFill>
+                  <a:srgbClr val="202122"/>
+                </a:solidFill>
+                <a:latin typeface="Calibri"/>
+              </a:rPr>
+              <a:t>5</a:t>
+            </a:r>
+          </a:p>
+        </p:txBody>
+      </p:sp>
+      <p:sp>
+        <p:nvSpPr>
+          <p:cNvPr id="24" name="TextBox 23"/>
+          <p:cNvSpPr txBox="1"/>
+          <p:nvPr/>
+        </p:nvSpPr>
+        <p:spPr>
+          <a:xfrm>
+            <a:off x="5161178" y="4224528"/>
+            <a:ext cx="2509418" cy="512064"/>
+          </a:xfrm>
+          <a:prstGeom prst="rect">
+            <a:avLst/>
+          </a:prstGeom>
+          <a:noFill/>
+        </p:spPr>
+        <p:txBody>
+          <a:bodyPr wrap="square" anchor="ctr" lIns="0" rIns="0" tIns="0" bIns="0"/>
+          <a:lstStyle/>
+          <a:p>
+            <a:pPr algn="l"/>
+            <a:r>
+              <a:rPr sz="1900" b="1" i="0">
+                <a:solidFill>
+                  <a:srgbClr val="03306E"/>
+                </a:solidFill>
+                <a:latin typeface="Calibri"/>
+              </a:rPr>
+              <a:t>Straightness</a:t>
+            </a:r>
+          </a:p>
+        </p:txBody>
+      </p:sp>
+      <p:sp>
+        <p:nvSpPr>
+          <p:cNvPr id="25" name="TextBox 24"/>
+          <p:cNvSpPr txBox="1"/>
+          <p:nvPr/>
+        </p:nvSpPr>
+        <p:spPr>
+          <a:xfrm>
+            <a:off x="4566818" y="4892040"/>
+            <a:ext cx="3058058" cy="1143000"/>
+          </a:xfrm>
+          <a:prstGeom prst="rect">
+            <a:avLst/>
+          </a:prstGeom>
+          <a:noFill/>
+        </p:spPr>
+        <p:txBody>
+          <a:bodyPr wrap="square" anchor="t" lIns="0" rIns="0" tIns="0" bIns="0"/>
+          <a:lstStyle/>
+          <a:p>
+            <a:pPr algn="l"/>
+            <a:r>
+              <a:rPr sz="2000" b="0" i="0">
+                <a:solidFill>
+                  <a:srgbClr val="202122"/>
+                </a:solidFill>
+                <a:latin typeface="Calibri"/>
+              </a:rPr>
+              <a:t>A line or edge stays straight.</a:t>
+            </a:r>
+          </a:p>
+        </p:txBody>
+      </p:sp>
+    </p:spTree>
+  </p:cSld>
+  <p:clrMapOvr>
+    <a:masterClrMapping/>
+  </p:clrMapOvr>
+</p:sld>
+</file>
+
+<file path=ppt/slides/slide12.xml><?xml version="1.0" encoding="utf-8"?>
+<p:sld xmlns:a="http://schemas.openxmlformats.org/drawingml/2006/main" xmlns:p="http://schemas.openxmlformats.org/presentationml/2006/main" xmlns:r="http://schemas.openxmlformats.org/officeDocument/2006/relationships">
+  <p:cSld>
+    <p:bg>
+      <p:bgPr>
+        <a:solidFill>
+          <a:srgbClr val="FFFFFF"/>
+        </a:solidFill>
+        <a:effectLst/>
+      </p:bgPr>
+    </p:bg>
+    <p:spTree>
+      <p:nvGrpSpPr>
+        <p:cNvPr id="1" name=""/>
+        <p:cNvGrpSpPr/>
+        <p:nvPr/>
+      </p:nvGrpSpPr>
+      <p:grpSpPr/>
+      <p:sp>
+        <p:nvSpPr>
+          <p:cNvPr id="2" name="TextBox 1"/>
+          <p:cNvSpPr txBox="1"/>
+          <p:nvPr/>
+        </p:nvSpPr>
+        <p:spPr>
+          <a:xfrm>
+            <a:off x="548640" y="320040"/>
+            <a:ext cx="11094415" cy="274320"/>
+          </a:xfrm>
+          <a:prstGeom prst="rect">
+            <a:avLst/>
+          </a:prstGeom>
+          <a:noFill/>
+        </p:spPr>
+        <p:txBody>
+          <a:bodyPr wrap="square" anchor="t" lIns="0" rIns="0" tIns="0" bIns="0"/>
+          <a:lstStyle/>
+          <a:p>
+            <a:pPr algn="l"/>
+            <a:r>
+              <a:rPr sz="1100" b="1" i="0">
+                <a:solidFill>
+                  <a:srgbClr val="54595D"/>
+                </a:solidFill>
+                <a:latin typeface="Calibri"/>
+              </a:rPr>
+              <a:t>ENGINEERING CORE  ·  Core topic 3</a:t>
+            </a:r>
+          </a:p>
+        </p:txBody>
+      </p:sp>
+      <p:sp>
+        <p:nvSpPr>
+          <p:cNvPr id="3" name="TextBox 2"/>
+          <p:cNvSpPr txBox="1"/>
+          <p:nvPr/>
+        </p:nvSpPr>
+        <p:spPr>
+          <a:xfrm>
+            <a:off x="548640" y="566928"/>
+            <a:ext cx="11094415" cy="822960"/>
+          </a:xfrm>
+          <a:prstGeom prst="rect">
+            <a:avLst/>
+          </a:prstGeom>
+          <a:noFill/>
+        </p:spPr>
+        <p:txBody>
+          <a:bodyPr wrap="square" anchor="ctr" lIns="0" rIns="0" tIns="0" bIns="0"/>
+          <a:lstStyle/>
+          <a:p>
+            <a:pPr algn="l"/>
+            <a:r>
+              <a:rPr sz="3200" b="1" i="0">
+                <a:solidFill>
+                  <a:srgbClr val="03306E"/>
+                </a:solidFill>
+                <a:latin typeface="Cambria"/>
+              </a:rPr>
+              <a:t>Quick check: Geometric tolerancing (GD&amp;T)</a:t>
+            </a:r>
+          </a:p>
+        </p:txBody>
+      </p:sp>
+      <p:sp>
+        <p:nvSpPr>
+          <p:cNvPr id="4" name="TextBox 3"/>
+          <p:cNvSpPr txBox="1"/>
+          <p:nvPr/>
+        </p:nvSpPr>
+        <p:spPr>
+          <a:xfrm>
+            <a:off x="548640" y="6446520"/>
+            <a:ext cx="8229600" cy="274320"/>
+          </a:xfrm>
+          <a:prstGeom prst="rect">
+            <a:avLst/>
+          </a:prstGeom>
+          <a:noFill/>
+        </p:spPr>
+        <p:txBody>
+          <a:bodyPr wrap="square" anchor="t" lIns="0" rIns="0" tIns="0" bIns="0"/>
+          <a:lstStyle/>
+          <a:p>
+            <a:pPr algn="l"/>
+            <a:r>
+              <a:rPr sz="1000" b="0" i="0">
+                <a:solidFill>
+                  <a:srgbClr val="54595D"/>
+                </a:solidFill>
+                <a:latin typeface="Calibri"/>
+              </a:rPr>
+              <a:t>Design and Development for Engineering and Manufacturing T Level  ·  Engineering Drawings, Dimensions and Tolerancing</a:t>
+            </a:r>
+          </a:p>
+        </p:txBody>
+      </p:sp>
+      <p:sp>
+        <p:nvSpPr>
+          <p:cNvPr id="5" name="TextBox 4"/>
+          <p:cNvSpPr txBox="1"/>
+          <p:nvPr/>
+        </p:nvSpPr>
+        <p:spPr>
+          <a:xfrm>
+            <a:off x="10728655" y="6446520"/>
+            <a:ext cx="914400" cy="274320"/>
+          </a:xfrm>
+          <a:prstGeom prst="rect">
+            <a:avLst/>
+          </a:prstGeom>
+          <a:noFill/>
+        </p:spPr>
+        <p:txBody>
+          <a:bodyPr wrap="square" anchor="t" lIns="0" rIns="0" tIns="0" bIns="0"/>
+          <a:lstStyle/>
+          <a:p>
+            <a:pPr algn="r"/>
+            <a:r>
+              <a:rPr sz="1000" b="0" i="0">
+                <a:solidFill>
+                  <a:srgbClr val="54595D"/>
+                </a:solidFill>
+                <a:latin typeface="Calibri"/>
+              </a:rPr>
+              <a:t>12</a:t>
+            </a:r>
+          </a:p>
+        </p:txBody>
+      </p:sp>
+      <p:sp>
+        <p:nvSpPr>
+          <p:cNvPr id="6" name="Oval 5"/>
+          <p:cNvSpPr/>
+          <p:nvPr/>
+        </p:nvSpPr>
+        <p:spPr>
+          <a:xfrm>
+            <a:off x="548640" y="1691640"/>
+            <a:ext cx="502920" cy="502920"/>
+          </a:xfrm>
+          <a:prstGeom prst="ellipse">
+            <a:avLst/>
+          </a:prstGeom>
+          <a:solidFill>
+            <a:srgbClr val="F2B705"/>
+          </a:solidFill>
+          <a:ln>
+            <a:noFill/>
+          </a:ln>
+          <a:effectLst/>
+        </p:spPr>
+        <p:style>
+          <a:lnRef idx="1">
+            <a:schemeClr val="accent1"/>
+          </a:lnRef>
+          <a:fillRef idx="3">
+            <a:schemeClr val="accent1"/>
+          </a:fillRef>
+          <a:effectRef idx="2">
+            <a:schemeClr val="accent1"/>
+          </a:effectRef>
+          <a:fontRef idx="minor">
+            <a:schemeClr val="lt1"/>
+          </a:fontRef>
+        </p:style>
+        <p:txBody>
+          <a:bodyPr rtlCol="0" anchor="ctr" lIns="0" rIns="0" tIns="0" bIns="0"/>
+          <a:lstStyle/>
+          <a:p>
+            <a:pPr algn="ctr"/>
+            <a:r>
+              <a:rPr sz="1600" b="1">
+                <a:solidFill>
+                  <a:srgbClr val="202122"/>
+                </a:solidFill>
+                <a:latin typeface="Calibri"/>
+              </a:rPr>
+              <a:t>1</a:t>
+            </a:r>
+          </a:p>
+        </p:txBody>
+      </p:sp>
+      <p:sp>
+        <p:nvSpPr>
+          <p:cNvPr id="7" name="TextBox 6"/>
+          <p:cNvSpPr txBox="1"/>
+          <p:nvPr/>
+        </p:nvSpPr>
+        <p:spPr>
+          <a:xfrm>
+            <a:off x="1371600" y="1645920"/>
+            <a:ext cx="10271455" cy="1188720"/>
+          </a:xfrm>
+          <a:prstGeom prst="rect">
+            <a:avLst/>
+          </a:prstGeom>
+          <a:noFill/>
+        </p:spPr>
+        <p:txBody>
+          <a:bodyPr wrap="square" anchor="t" lIns="0" rIns="0" tIns="0" bIns="0"/>
+          <a:lstStyle/>
+          <a:p>
+            <a:pPr algn="l"/>
+            <a:r>
+              <a:rPr sz="2400" b="0" i="0">
+                <a:solidFill>
+                  <a:srgbClr val="202122"/>
+                </a:solidFill>
+                <a:latin typeface="Calibri"/>
+              </a:rPr>
+              <a:t>What is a datum?</a:t>
+            </a:r>
+          </a:p>
+        </p:txBody>
+      </p:sp>
+      <p:sp>
+        <p:nvSpPr>
+          <p:cNvPr id="8" name="Oval 7"/>
+          <p:cNvSpPr/>
+          <p:nvPr/>
+        </p:nvSpPr>
+        <p:spPr>
+          <a:xfrm>
+            <a:off x="548640" y="3108960"/>
+            <a:ext cx="502920" cy="502920"/>
+          </a:xfrm>
+          <a:prstGeom prst="ellipse">
+            <a:avLst/>
+          </a:prstGeom>
+          <a:solidFill>
+            <a:srgbClr val="F2B705"/>
+          </a:solidFill>
+          <a:ln>
+            <a:noFill/>
+          </a:ln>
+          <a:effectLst/>
+        </p:spPr>
+        <p:style>
+          <a:lnRef idx="1">
+            <a:schemeClr val="accent1"/>
+          </a:lnRef>
+          <a:fillRef idx="3">
+            <a:schemeClr val="accent1"/>
+          </a:fillRef>
+          <a:effectRef idx="2">
+            <a:schemeClr val="accent1"/>
+          </a:effectRef>
+          <a:fontRef idx="minor">
+            <a:schemeClr val="lt1"/>
+          </a:fontRef>
+        </p:style>
+        <p:txBody>
+          <a:bodyPr rtlCol="0" anchor="ctr" lIns="0" rIns="0" tIns="0" bIns="0"/>
+          <a:lstStyle/>
+          <a:p>
+            <a:pPr algn="ctr"/>
+            <a:r>
+              <a:rPr sz="1600" b="1">
+                <a:solidFill>
+                  <a:srgbClr val="202122"/>
+                </a:solidFill>
+                <a:latin typeface="Calibri"/>
+              </a:rPr>
+              <a:t>2</a:t>
+            </a:r>
+          </a:p>
+        </p:txBody>
+      </p:sp>
+      <p:sp>
+        <p:nvSpPr>
+          <p:cNvPr id="9" name="TextBox 8"/>
+          <p:cNvSpPr txBox="1"/>
+          <p:nvPr/>
+        </p:nvSpPr>
+        <p:spPr>
+          <a:xfrm>
+            <a:off x="1371600" y="3063240"/>
+            <a:ext cx="10271455" cy="1188720"/>
+          </a:xfrm>
+          <a:prstGeom prst="rect">
+            <a:avLst/>
+          </a:prstGeom>
+          <a:noFill/>
+        </p:spPr>
+        <p:txBody>
+          <a:bodyPr wrap="square" anchor="t" lIns="0" rIns="0" tIns="0" bIns="0"/>
+          <a:lstStyle/>
+          <a:p>
+            <a:pPr algn="l"/>
+            <a:r>
+              <a:rPr sz="2400" b="0" i="0">
+                <a:solidFill>
+                  <a:srgbClr val="202122"/>
+                </a:solidFill>
+                <a:latin typeface="Calibri"/>
+              </a:rPr>
+              <a:t>What does concentricity control?</a:t>
+            </a:r>
+          </a:p>
+        </p:txBody>
+      </p:sp>
+      <p:sp>
+        <p:nvSpPr>
+          <p:cNvPr id="10" name="Oval 9"/>
+          <p:cNvSpPr/>
+          <p:nvPr/>
+        </p:nvSpPr>
+        <p:spPr>
+          <a:xfrm>
+            <a:off x="548640" y="4526280"/>
+            <a:ext cx="502920" cy="502920"/>
+          </a:xfrm>
+          <a:prstGeom prst="ellipse">
+            <a:avLst/>
+          </a:prstGeom>
+          <a:solidFill>
+            <a:srgbClr val="F2B705"/>
+          </a:solidFill>
+          <a:ln>
+            <a:noFill/>
+          </a:ln>
+          <a:effectLst/>
+        </p:spPr>
+        <p:style>
+          <a:lnRef idx="1">
+            <a:schemeClr val="accent1"/>
+          </a:lnRef>
+          <a:fillRef idx="3">
+            <a:schemeClr val="accent1"/>
+          </a:fillRef>
+          <a:effectRef idx="2">
+            <a:schemeClr val="accent1"/>
+          </a:effectRef>
+          <a:fontRef idx="minor">
+            <a:schemeClr val="lt1"/>
+          </a:fontRef>
+        </p:style>
+        <p:txBody>
+          <a:bodyPr rtlCol="0" anchor="ctr" lIns="0" rIns="0" tIns="0" bIns="0"/>
+          <a:lstStyle/>
+          <a:p>
+            <a:pPr algn="ctr"/>
+            <a:r>
+              <a:rPr sz="1600" b="1">
+                <a:solidFill>
+                  <a:srgbClr val="202122"/>
+                </a:solidFill>
+                <a:latin typeface="Calibri"/>
+              </a:rPr>
+              <a:t>3</a:t>
+            </a:r>
+          </a:p>
+        </p:txBody>
+      </p:sp>
+      <p:sp>
+        <p:nvSpPr>
+          <p:cNvPr id="11" name="TextBox 10"/>
+          <p:cNvSpPr txBox="1"/>
+          <p:nvPr/>
+        </p:nvSpPr>
+        <p:spPr>
+          <a:xfrm>
+            <a:off x="1371600" y="4480560"/>
+            <a:ext cx="10271455" cy="1188720"/>
+          </a:xfrm>
+          <a:prstGeom prst="rect">
+            <a:avLst/>
+          </a:prstGeom>
+          <a:noFill/>
+        </p:spPr>
+        <p:txBody>
+          <a:bodyPr wrap="square" anchor="t" lIns="0" rIns="0" tIns="0" bIns="0"/>
+          <a:lstStyle/>
+          <a:p>
+            <a:pPr algn="l"/>
+            <a:r>
+              <a:rPr sz="2400" b="0" i="0">
+                <a:solidFill>
+                  <a:srgbClr val="202122"/>
+                </a:solidFill>
+                <a:latin typeface="Calibri"/>
+              </a:rPr>
+              <a:t>Why isn't size tolerance always enough?</a:t>
+            </a:r>
+          </a:p>
+        </p:txBody>
+      </p:sp>
+      <p:sp>
+        <p:nvSpPr>
+          <p:cNvPr id="12" name="TextBox 11"/>
+          <p:cNvSpPr txBox="1"/>
+          <p:nvPr/>
+        </p:nvSpPr>
+        <p:spPr>
+          <a:xfrm>
+            <a:off x="548640" y="5852160"/>
+            <a:ext cx="11094415" cy="365760"/>
+          </a:xfrm>
+          <a:prstGeom prst="rect">
+            <a:avLst/>
+          </a:prstGeom>
+          <a:noFill/>
+        </p:spPr>
+        <p:txBody>
+          <a:bodyPr wrap="square" anchor="t" lIns="0" rIns="0" tIns="0" bIns="0"/>
+          <a:lstStyle/>
+          <a:p>
+            <a:pPr algn="l"/>
+            <a:r>
+              <a:rPr sz="1300" b="0" i="1">
+                <a:solidFill>
+                  <a:srgbClr val="54595D"/>
+                </a:solidFill>
+                <a:latin typeface="Calibri"/>
+              </a:rPr>
+              <a:t>Answer on mini whiteboards or in your book. Answers are in the speaker notes.</a:t>
+            </a:r>
+          </a:p>
+        </p:txBody>
+      </p:sp>
+    </p:spTree>
+  </p:cSld>
+  <p:clrMapOvr>
+    <a:masterClrMapping/>
+  </p:clrMapOvr>
+</p:sld>
+</file>
+
+<file path=ppt/slides/slide13.xml><?xml version="1.0" encoding="utf-8"?>
+<p:sld xmlns:a="http://schemas.openxmlformats.org/drawingml/2006/main" xmlns:p="http://schemas.openxmlformats.org/presentationml/2006/main" xmlns:r="http://schemas.openxmlformats.org/officeDocument/2006/relationships">
+  <p:cSld>
+    <p:bg>
+      <p:bgPr>
+        <a:solidFill>
+          <a:srgbClr val="FFFFFF"/>
+        </a:solidFill>
+        <a:effectLst/>
+      </p:bgPr>
+    </p:bg>
+    <p:spTree>
+      <p:nvGrpSpPr>
+        <p:cNvPr id="1" name=""/>
+        <p:cNvGrpSpPr/>
+        <p:nvPr/>
+      </p:nvGrpSpPr>
+      <p:grpSpPr/>
+      <p:sp>
+        <p:nvSpPr>
+          <p:cNvPr id="2" name="TextBox 1"/>
+          <p:cNvSpPr txBox="1"/>
+          <p:nvPr/>
+        </p:nvSpPr>
+        <p:spPr>
+          <a:xfrm>
+            <a:off x="548640" y="320040"/>
+            <a:ext cx="11094415" cy="274320"/>
+          </a:xfrm>
+          <a:prstGeom prst="rect">
+            <a:avLst/>
+          </a:prstGeom>
+          <a:noFill/>
+        </p:spPr>
+        <p:txBody>
+          <a:bodyPr wrap="square" anchor="t" lIns="0" rIns="0" tIns="0" bIns="0"/>
+          <a:lstStyle/>
+          <a:p>
+            <a:pPr algn="l"/>
+            <a:r>
+              <a:rPr sz="1100" b="1" i="0">
+                <a:solidFill>
+                  <a:srgbClr val="54595D"/>
+                </a:solidFill>
+                <a:latin typeface="Calibri"/>
+              </a:rPr>
+              <a:t>ENGINEERING CORE  ·  Core topic 3</a:t>
+            </a:r>
+          </a:p>
+        </p:txBody>
+      </p:sp>
+      <p:sp>
+        <p:nvSpPr>
+          <p:cNvPr id="3" name="TextBox 2"/>
+          <p:cNvSpPr txBox="1"/>
+          <p:nvPr/>
+        </p:nvSpPr>
+        <p:spPr>
+          <a:xfrm>
+            <a:off x="548640" y="566928"/>
+            <a:ext cx="11094415" cy="822960"/>
+          </a:xfrm>
+          <a:prstGeom prst="rect">
+            <a:avLst/>
+          </a:prstGeom>
+          <a:noFill/>
+        </p:spPr>
+        <p:txBody>
+          <a:bodyPr wrap="square" anchor="ctr" lIns="0" rIns="0" tIns="0" bIns="0"/>
+          <a:lstStyle/>
+          <a:p>
+            <a:pPr algn="l"/>
+            <a:r>
+              <a:rPr sz="3200" b="1" i="0">
+                <a:solidFill>
+                  <a:srgbClr val="03306E"/>
+                </a:solidFill>
+                <a:latin typeface="Cambria"/>
+              </a:rPr>
+              <a:t>Check your understanding</a:t>
+            </a:r>
+          </a:p>
+        </p:txBody>
+      </p:sp>
+      <p:sp>
+        <p:nvSpPr>
+          <p:cNvPr id="4" name="TextBox 3"/>
+          <p:cNvSpPr txBox="1"/>
+          <p:nvPr/>
+        </p:nvSpPr>
+        <p:spPr>
+          <a:xfrm>
+            <a:off x="548640" y="6446520"/>
+            <a:ext cx="8229600" cy="274320"/>
+          </a:xfrm>
+          <a:prstGeom prst="rect">
+            <a:avLst/>
+          </a:prstGeom>
+          <a:noFill/>
+        </p:spPr>
+        <p:txBody>
+          <a:bodyPr wrap="square" anchor="t" lIns="0" rIns="0" tIns="0" bIns="0"/>
+          <a:lstStyle/>
+          <a:p>
+            <a:pPr algn="l"/>
+            <a:r>
+              <a:rPr sz="1000" b="0" i="0">
+                <a:solidFill>
+                  <a:srgbClr val="54595D"/>
+                </a:solidFill>
+                <a:latin typeface="Calibri"/>
+              </a:rPr>
+              <a:t>Design and Development for Engineering and Manufacturing T Level  ·  Engineering Drawings, Dimensions and Tolerancing</a:t>
+            </a:r>
+          </a:p>
+        </p:txBody>
+      </p:sp>
+      <p:sp>
+        <p:nvSpPr>
+          <p:cNvPr id="5" name="TextBox 4"/>
+          <p:cNvSpPr txBox="1"/>
+          <p:nvPr/>
+        </p:nvSpPr>
+        <p:spPr>
+          <a:xfrm>
+            <a:off x="10728655" y="6446520"/>
+            <a:ext cx="914400" cy="274320"/>
+          </a:xfrm>
+          <a:prstGeom prst="rect">
+            <a:avLst/>
+          </a:prstGeom>
+          <a:noFill/>
+        </p:spPr>
+        <p:txBody>
+          <a:bodyPr wrap="square" anchor="t" lIns="0" rIns="0" tIns="0" bIns="0"/>
+          <a:lstStyle/>
+          <a:p>
+            <a:pPr algn="r"/>
+            <a:r>
+              <a:rPr sz="1000" b="0" i="0">
+                <a:solidFill>
+                  <a:srgbClr val="54595D"/>
+                </a:solidFill>
+                <a:latin typeface="Calibri"/>
+              </a:rPr>
+              <a:t>13</a:t>
+            </a:r>
+          </a:p>
+        </p:txBody>
+      </p:sp>
+      <p:sp>
+        <p:nvSpPr>
+          <p:cNvPr id="6" name="Oval 5"/>
+          <p:cNvSpPr/>
+          <p:nvPr/>
+        </p:nvSpPr>
+        <p:spPr>
+          <a:xfrm>
+            <a:off x="548640" y="1618488"/>
+            <a:ext cx="411480" cy="411480"/>
+          </a:xfrm>
+          <a:prstGeom prst="ellipse">
+            <a:avLst/>
+          </a:prstGeom>
+          <a:solidFill>
+            <a:srgbClr val="F2B705"/>
+          </a:solidFill>
+          <a:ln>
+            <a:noFill/>
+          </a:ln>
+          <a:effectLst/>
+        </p:spPr>
+        <p:style>
+          <a:lnRef idx="1">
+            <a:schemeClr val="accent1"/>
+          </a:lnRef>
+          <a:fillRef idx="3">
+            <a:schemeClr val="accent1"/>
+          </a:fillRef>
+          <a:effectRef idx="2">
+            <a:schemeClr val="accent1"/>
+          </a:effectRef>
+          <a:fontRef idx="minor">
+            <a:schemeClr val="lt1"/>
+          </a:fontRef>
+        </p:style>
+        <p:txBody>
+          <a:bodyPr rtlCol="0" anchor="ctr" lIns="0" rIns="0" tIns="0" bIns="0"/>
+          <a:lstStyle/>
+          <a:p>
+            <a:pPr algn="ctr"/>
+            <a:r>
+              <a:rPr sz="1400" b="1">
+                <a:solidFill>
+                  <a:srgbClr val="202122"/>
+                </a:solidFill>
+                <a:latin typeface="Calibri"/>
+              </a:rPr>
+              <a:t>1</a:t>
+            </a:r>
+          </a:p>
+        </p:txBody>
+      </p:sp>
+      <p:sp>
+        <p:nvSpPr>
+          <p:cNvPr id="7" name="TextBox 6"/>
+          <p:cNvSpPr txBox="1"/>
+          <p:nvPr/>
+        </p:nvSpPr>
+        <p:spPr>
+          <a:xfrm>
+            <a:off x="1234440" y="1600200"/>
+            <a:ext cx="10408615" cy="1030986"/>
+          </a:xfrm>
+          <a:prstGeom prst="rect">
+            <a:avLst/>
+          </a:prstGeom>
+          <a:noFill/>
+        </p:spPr>
+        <p:txBody>
+          <a:bodyPr wrap="square" anchor="t" lIns="0" rIns="0" tIns="0" bIns="0"/>
+          <a:lstStyle/>
+          <a:p>
+            <a:pPr algn="l"/>
+            <a:r>
+              <a:rPr sz="2200" b="0" i="0">
+                <a:solidFill>
+                  <a:srgbClr val="202122"/>
+                </a:solidFill>
+                <a:latin typeface="Calibri"/>
+              </a:rPr>
+              <a:t>What does PCD stand for?</a:t>
+            </a:r>
+          </a:p>
+        </p:txBody>
+      </p:sp>
+      <p:sp>
+        <p:nvSpPr>
+          <p:cNvPr id="8" name="Oval 7"/>
+          <p:cNvSpPr/>
+          <p:nvPr/>
+        </p:nvSpPr>
+        <p:spPr>
+          <a:xfrm>
+            <a:off x="548640" y="2814066"/>
+            <a:ext cx="411480" cy="411480"/>
+          </a:xfrm>
+          <a:prstGeom prst="ellipse">
+            <a:avLst/>
+          </a:prstGeom>
+          <a:solidFill>
+            <a:srgbClr val="F2B705"/>
+          </a:solidFill>
+          <a:ln>
+            <a:noFill/>
+          </a:ln>
+          <a:effectLst/>
+        </p:spPr>
+        <p:style>
+          <a:lnRef idx="1">
+            <a:schemeClr val="accent1"/>
+          </a:lnRef>
+          <a:fillRef idx="3">
+            <a:schemeClr val="accent1"/>
+          </a:fillRef>
+          <a:effectRef idx="2">
+            <a:schemeClr val="accent1"/>
+          </a:effectRef>
+          <a:fontRef idx="minor">
+            <a:schemeClr val="lt1"/>
+          </a:fontRef>
+        </p:style>
+        <p:txBody>
+          <a:bodyPr rtlCol="0" anchor="ctr" lIns="0" rIns="0" tIns="0" bIns="0"/>
+          <a:lstStyle/>
+          <a:p>
+            <a:pPr algn="ctr"/>
+            <a:r>
+              <a:rPr sz="1400" b="1">
+                <a:solidFill>
+                  <a:srgbClr val="202122"/>
+                </a:solidFill>
+                <a:latin typeface="Calibri"/>
+              </a:rPr>
+              <a:t>2</a:t>
+            </a:r>
+          </a:p>
+        </p:txBody>
+      </p:sp>
+      <p:sp>
+        <p:nvSpPr>
+          <p:cNvPr id="9" name="TextBox 8"/>
+          <p:cNvSpPr txBox="1"/>
+          <p:nvPr/>
+        </p:nvSpPr>
+        <p:spPr>
+          <a:xfrm>
+            <a:off x="1234440" y="2795778"/>
+            <a:ext cx="10408615" cy="1030986"/>
+          </a:xfrm>
+          <a:prstGeom prst="rect">
+            <a:avLst/>
+          </a:prstGeom>
+          <a:noFill/>
+        </p:spPr>
+        <p:txBody>
+          <a:bodyPr wrap="square" anchor="t" lIns="0" rIns="0" tIns="0" bIns="0"/>
+          <a:lstStyle/>
+          <a:p>
+            <a:pPr algn="l"/>
+            <a:r>
+              <a:rPr sz="2200" b="0" i="0">
+                <a:solidFill>
+                  <a:srgbClr val="202122"/>
+                </a:solidFill>
+                <a:latin typeface="Calibri"/>
+              </a:rPr>
+              <a:t>A hole is 12 mm plus or minus 0.05 mm. What are its limits?</a:t>
+            </a:r>
+          </a:p>
+        </p:txBody>
+      </p:sp>
+      <p:sp>
+        <p:nvSpPr>
+          <p:cNvPr id="10" name="Oval 9"/>
+          <p:cNvSpPr/>
+          <p:nvPr/>
+        </p:nvSpPr>
+        <p:spPr>
+          <a:xfrm>
+            <a:off x="548640" y="4009644"/>
+            <a:ext cx="411480" cy="411480"/>
+          </a:xfrm>
+          <a:prstGeom prst="ellipse">
+            <a:avLst/>
+          </a:prstGeom>
+          <a:solidFill>
+            <a:srgbClr val="F2B705"/>
+          </a:solidFill>
+          <a:ln>
+            <a:noFill/>
+          </a:ln>
+          <a:effectLst/>
+        </p:spPr>
+        <p:style>
+          <a:lnRef idx="1">
+            <a:schemeClr val="accent1"/>
+          </a:lnRef>
+          <a:fillRef idx="3">
+            <a:schemeClr val="accent1"/>
+          </a:fillRef>
+          <a:effectRef idx="2">
+            <a:schemeClr val="accent1"/>
+          </a:effectRef>
+          <a:fontRef idx="minor">
+            <a:schemeClr val="lt1"/>
+          </a:fontRef>
+        </p:style>
+        <p:txBody>
+          <a:bodyPr rtlCol="0" anchor="ctr" lIns="0" rIns="0" tIns="0" bIns="0"/>
+          <a:lstStyle/>
+          <a:p>
+            <a:pPr algn="ctr"/>
+            <a:r>
+              <a:rPr sz="1400" b="1">
+                <a:solidFill>
+                  <a:srgbClr val="202122"/>
+                </a:solidFill>
+                <a:latin typeface="Calibri"/>
+              </a:rPr>
+              <a:t>3</a:t>
+            </a:r>
+          </a:p>
+        </p:txBody>
+      </p:sp>
+      <p:sp>
+        <p:nvSpPr>
+          <p:cNvPr id="11" name="TextBox 10"/>
+          <p:cNvSpPr txBox="1"/>
+          <p:nvPr/>
+        </p:nvSpPr>
+        <p:spPr>
+          <a:xfrm>
+            <a:off x="1234440" y="3991356"/>
+            <a:ext cx="10408615" cy="1030986"/>
+          </a:xfrm>
+          <a:prstGeom prst="rect">
+            <a:avLst/>
+          </a:prstGeom>
+          <a:noFill/>
+        </p:spPr>
+        <p:txBody>
+          <a:bodyPr wrap="square" anchor="t" lIns="0" rIns="0" tIns="0" bIns="0"/>
+          <a:lstStyle/>
+          <a:p>
+            <a:pPr algn="l"/>
+            <a:r>
+              <a:rPr sz="2200" b="0" i="0">
+                <a:solidFill>
+                  <a:srgbClr val="202122"/>
+                </a:solidFill>
+                <a:latin typeface="Calibri"/>
+              </a:rPr>
+              <a:t>Which fit always has a gap?</a:t>
+            </a:r>
+          </a:p>
+        </p:txBody>
+      </p:sp>
+      <p:sp>
+        <p:nvSpPr>
+          <p:cNvPr id="12" name="Oval 11"/>
+          <p:cNvSpPr/>
+          <p:nvPr/>
+        </p:nvSpPr>
+        <p:spPr>
+          <a:xfrm>
+            <a:off x="548640" y="5205221"/>
+            <a:ext cx="411480" cy="411480"/>
+          </a:xfrm>
+          <a:prstGeom prst="ellipse">
+            <a:avLst/>
+          </a:prstGeom>
+          <a:solidFill>
+            <a:srgbClr val="F2B705"/>
+          </a:solidFill>
+          <a:ln>
+            <a:noFill/>
+          </a:ln>
+          <a:effectLst/>
+        </p:spPr>
+        <p:style>
+          <a:lnRef idx="1">
+            <a:schemeClr val="accent1"/>
+          </a:lnRef>
+          <a:fillRef idx="3">
+            <a:schemeClr val="accent1"/>
+          </a:fillRef>
+          <a:effectRef idx="2">
+            <a:schemeClr val="accent1"/>
+          </a:effectRef>
+          <a:fontRef idx="minor">
+            <a:schemeClr val="lt1"/>
+          </a:fontRef>
+        </p:style>
+        <p:txBody>
+          <a:bodyPr rtlCol="0" anchor="ctr" lIns="0" rIns="0" tIns="0" bIns="0"/>
+          <a:lstStyle/>
+          <a:p>
+            <a:pPr algn="ctr"/>
+            <a:r>
+              <a:rPr sz="1400" b="1">
+                <a:solidFill>
+                  <a:srgbClr val="202122"/>
+                </a:solidFill>
+                <a:latin typeface="Calibri"/>
+              </a:rPr>
+              <a:t>4</a:t>
+            </a:r>
+          </a:p>
+        </p:txBody>
+      </p:sp>
+      <p:sp>
+        <p:nvSpPr>
+          <p:cNvPr id="13" name="TextBox 12"/>
+          <p:cNvSpPr txBox="1"/>
+          <p:nvPr/>
+        </p:nvSpPr>
+        <p:spPr>
+          <a:xfrm>
+            <a:off x="1234440" y="5186933"/>
+            <a:ext cx="10408615" cy="1030986"/>
+          </a:xfrm>
+          <a:prstGeom prst="rect">
+            <a:avLst/>
+          </a:prstGeom>
+          <a:noFill/>
+        </p:spPr>
+        <p:txBody>
+          <a:bodyPr wrap="square" anchor="t" lIns="0" rIns="0" tIns="0" bIns="0"/>
+          <a:lstStyle/>
+          <a:p>
+            <a:pPr algn="l"/>
+            <a:r>
+              <a:rPr sz="2200" b="0" i="0">
+                <a:solidFill>
+                  <a:srgbClr val="202122"/>
+                </a:solidFill>
+                <a:latin typeface="Calibri"/>
+              </a:rPr>
+              <a:t>Which drawing type is best for showing assembly?</a:t>
+            </a:r>
+          </a:p>
+        </p:txBody>
+      </p:sp>
+    </p:spTree>
+  </p:cSld>
+  <p:clrMapOvr>
+    <a:masterClrMapping/>
+  </p:clrMapOvr>
+</p:sld>
+</file>
+
+<file path=ppt/slides/slide14.xml><?xml version="1.0" encoding="utf-8"?>
+<p:sld xmlns:a="http://schemas.openxmlformats.org/drawingml/2006/main" xmlns:p="http://schemas.openxmlformats.org/presentationml/2006/main" xmlns:r="http://schemas.openxmlformats.org/officeDocument/2006/relationships">
+  <p:cSld>
+    <p:bg>
+      <p:bgPr>
+        <a:solidFill>
+          <a:srgbClr val="FFFFFF"/>
+        </a:solidFill>
+        <a:effectLst/>
+      </p:bgPr>
+    </p:bg>
+    <p:spTree>
+      <p:nvGrpSpPr>
+        <p:cNvPr id="1" name=""/>
+        <p:cNvGrpSpPr/>
+        <p:nvPr/>
+      </p:nvGrpSpPr>
+      <p:grpSpPr/>
+      <p:sp>
+        <p:nvSpPr>
+          <p:cNvPr id="2" name="TextBox 1"/>
+          <p:cNvSpPr txBox="1"/>
+          <p:nvPr/>
+        </p:nvSpPr>
+        <p:spPr>
+          <a:xfrm>
+            <a:off x="548640" y="320040"/>
+            <a:ext cx="11094415" cy="274320"/>
+          </a:xfrm>
+          <a:prstGeom prst="rect">
+            <a:avLst/>
+          </a:prstGeom>
+          <a:noFill/>
+        </p:spPr>
+        <p:txBody>
+          <a:bodyPr wrap="square" anchor="t" lIns="0" rIns="0" tIns="0" bIns="0"/>
+          <a:lstStyle/>
+          <a:p>
+            <a:pPr algn="l"/>
+            <a:r>
+              <a:rPr sz="1100" b="1" i="0">
+                <a:solidFill>
+                  <a:srgbClr val="54595D"/>
+                </a:solidFill>
+                <a:latin typeface="Calibri"/>
+              </a:rPr>
+              <a:t>ENGINEERING CORE  ·  Core topic 3</a:t>
+            </a:r>
+          </a:p>
+        </p:txBody>
+      </p:sp>
+      <p:sp>
+        <p:nvSpPr>
+          <p:cNvPr id="3" name="TextBox 2"/>
+          <p:cNvSpPr txBox="1"/>
+          <p:nvPr/>
+        </p:nvSpPr>
+        <p:spPr>
+          <a:xfrm>
+            <a:off x="548640" y="566928"/>
+            <a:ext cx="11094415" cy="822960"/>
+          </a:xfrm>
+          <a:prstGeom prst="rect">
+            <a:avLst/>
+          </a:prstGeom>
+          <a:noFill/>
+        </p:spPr>
+        <p:txBody>
+          <a:bodyPr wrap="square" anchor="ctr" lIns="0" rIns="0" tIns="0" bIns="0"/>
+          <a:lstStyle/>
+          <a:p>
+            <a:pPr algn="l"/>
+            <a:r>
+              <a:rPr sz="3200" b="1" i="0">
+                <a:solidFill>
+                  <a:srgbClr val="03306E"/>
+                </a:solidFill>
+                <a:latin typeface="Cambria"/>
+              </a:rPr>
+              <a:t>Answers</a:t>
+            </a:r>
+          </a:p>
+        </p:txBody>
+      </p:sp>
+      <p:sp>
+        <p:nvSpPr>
+          <p:cNvPr id="4" name="TextBox 3"/>
+          <p:cNvSpPr txBox="1"/>
+          <p:nvPr/>
+        </p:nvSpPr>
+        <p:spPr>
+          <a:xfrm>
+            <a:off x="548640" y="6446520"/>
+            <a:ext cx="8229600" cy="274320"/>
+          </a:xfrm>
+          <a:prstGeom prst="rect">
+            <a:avLst/>
+          </a:prstGeom>
+          <a:noFill/>
+        </p:spPr>
+        <p:txBody>
+          <a:bodyPr wrap="square" anchor="t" lIns="0" rIns="0" tIns="0" bIns="0"/>
+          <a:lstStyle/>
+          <a:p>
+            <a:pPr algn="l"/>
+            <a:r>
+              <a:rPr sz="1000" b="0" i="0">
+                <a:solidFill>
+                  <a:srgbClr val="54595D"/>
+                </a:solidFill>
+                <a:latin typeface="Calibri"/>
+              </a:rPr>
+              <a:t>Design and Development for Engineering and Manufacturing T Level  ·  Engineering Drawings, Dimensions and Tolerancing</a:t>
+            </a:r>
+          </a:p>
+        </p:txBody>
+      </p:sp>
+      <p:sp>
+        <p:nvSpPr>
+          <p:cNvPr id="5" name="TextBox 4"/>
+          <p:cNvSpPr txBox="1"/>
+          <p:nvPr/>
+        </p:nvSpPr>
+        <p:spPr>
+          <a:xfrm>
+            <a:off x="10728655" y="6446520"/>
+            <a:ext cx="914400" cy="274320"/>
+          </a:xfrm>
+          <a:prstGeom prst="rect">
+            <a:avLst/>
+          </a:prstGeom>
+          <a:noFill/>
+        </p:spPr>
+        <p:txBody>
+          <a:bodyPr wrap="square" anchor="t" lIns="0" rIns="0" tIns="0" bIns="0"/>
+          <a:lstStyle/>
+          <a:p>
+            <a:pPr algn="r"/>
+            <a:r>
+              <a:rPr sz="1000" b="0" i="0">
+                <a:solidFill>
+                  <a:srgbClr val="54595D"/>
+                </a:solidFill>
+                <a:latin typeface="Calibri"/>
+              </a:rPr>
+              <a:t>14</a:t>
+            </a:r>
+          </a:p>
+        </p:txBody>
+      </p:sp>
+      <p:sp>
+        <p:nvSpPr>
+          <p:cNvPr id="6" name="Oval 5"/>
+          <p:cNvSpPr/>
+          <p:nvPr/>
+        </p:nvSpPr>
+        <p:spPr>
+          <a:xfrm>
+            <a:off x="548640" y="1618488"/>
+            <a:ext cx="411480" cy="411480"/>
+          </a:xfrm>
+          <a:prstGeom prst="ellipse">
+            <a:avLst/>
+          </a:prstGeom>
+          <a:solidFill>
+            <a:srgbClr val="F2B705"/>
+          </a:solidFill>
+          <a:ln>
+            <a:noFill/>
+          </a:ln>
+          <a:effectLst/>
+        </p:spPr>
+        <p:style>
+          <a:lnRef idx="1">
+            <a:schemeClr val="accent1"/>
+          </a:lnRef>
+          <a:fillRef idx="3">
+            <a:schemeClr val="accent1"/>
+          </a:fillRef>
+          <a:effectRef idx="2">
+            <a:schemeClr val="accent1"/>
+          </a:effectRef>
+          <a:fontRef idx="minor">
+            <a:schemeClr val="lt1"/>
+          </a:fontRef>
+        </p:style>
+        <p:txBody>
+          <a:bodyPr rtlCol="0" anchor="ctr" lIns="0" rIns="0" tIns="0" bIns="0"/>
+          <a:lstStyle/>
+          <a:p>
+            <a:pPr algn="ctr"/>
+            <a:r>
+              <a:rPr sz="1400" b="1">
+                <a:solidFill>
+                  <a:srgbClr val="202122"/>
+                </a:solidFill>
+                <a:latin typeface="Calibri"/>
+              </a:rPr>
+              <a:t>1</a:t>
+            </a:r>
+          </a:p>
+        </p:txBody>
+      </p:sp>
+      <p:sp>
+        <p:nvSpPr>
+          <p:cNvPr id="7" name="TextBox 6"/>
+          <p:cNvSpPr txBox="1"/>
+          <p:nvPr/>
+        </p:nvSpPr>
+        <p:spPr>
+          <a:xfrm>
+            <a:off x="1234440" y="1600200"/>
+            <a:ext cx="10408615" cy="1030986"/>
+          </a:xfrm>
+          <a:prstGeom prst="rect">
+            <a:avLst/>
+          </a:prstGeom>
+          <a:noFill/>
+        </p:spPr>
+        <p:txBody>
+          <a:bodyPr wrap="square" anchor="t" lIns="0" rIns="0" tIns="0" bIns="0"/>
+          <a:lstStyle/>
+          <a:p>
+            <a:pPr algn="l"/>
+            <a:r>
+              <a:rPr sz="1800" b="0" i="0">
+                <a:solidFill>
+                  <a:srgbClr val="54595D"/>
+                </a:solidFill>
+                <a:latin typeface="Calibri"/>
+              </a:rPr>
+              <a:t>What does PCD stand for?</a:t>
+            </a:r>
+          </a:p>
+          <a:p>
+            <a:r>
+              <a:rPr sz="1800" b="1">
+                <a:solidFill>
+                  <a:srgbClr val="03306E"/>
+                </a:solidFill>
+                <a:latin typeface="Calibri"/>
+              </a:rPr>
+              <a:t>Pitch circle diameter.</a:t>
+            </a:r>
+          </a:p>
+        </p:txBody>
+      </p:sp>
+      <p:sp>
+        <p:nvSpPr>
+          <p:cNvPr id="8" name="Oval 7"/>
+          <p:cNvSpPr/>
+          <p:nvPr/>
+        </p:nvSpPr>
+        <p:spPr>
+          <a:xfrm>
+            <a:off x="548640" y="2814066"/>
+            <a:ext cx="411480" cy="411480"/>
+          </a:xfrm>
+          <a:prstGeom prst="ellipse">
+            <a:avLst/>
+          </a:prstGeom>
+          <a:solidFill>
+            <a:srgbClr val="F2B705"/>
+          </a:solidFill>
+          <a:ln>
+            <a:noFill/>
+          </a:ln>
+          <a:effectLst/>
+        </p:spPr>
+        <p:style>
+          <a:lnRef idx="1">
+            <a:schemeClr val="accent1"/>
+          </a:lnRef>
+          <a:fillRef idx="3">
+            <a:schemeClr val="accent1"/>
+          </a:fillRef>
+          <a:effectRef idx="2">
+            <a:schemeClr val="accent1"/>
+          </a:effectRef>
+          <a:fontRef idx="minor">
+            <a:schemeClr val="lt1"/>
+          </a:fontRef>
+        </p:style>
+        <p:txBody>
+          <a:bodyPr rtlCol="0" anchor="ctr" lIns="0" rIns="0" tIns="0" bIns="0"/>
+          <a:lstStyle/>
+          <a:p>
+            <a:pPr algn="ctr"/>
+            <a:r>
+              <a:rPr sz="1400" b="1">
+                <a:solidFill>
+                  <a:srgbClr val="202122"/>
+                </a:solidFill>
+                <a:latin typeface="Calibri"/>
+              </a:rPr>
+              <a:t>2</a:t>
+            </a:r>
+          </a:p>
+        </p:txBody>
+      </p:sp>
+      <p:sp>
+        <p:nvSpPr>
+          <p:cNvPr id="9" name="TextBox 8"/>
+          <p:cNvSpPr txBox="1"/>
+          <p:nvPr/>
+        </p:nvSpPr>
+        <p:spPr>
+          <a:xfrm>
+            <a:off x="1234440" y="2795778"/>
+            <a:ext cx="10408615" cy="1030986"/>
+          </a:xfrm>
+          <a:prstGeom prst="rect">
+            <a:avLst/>
+          </a:prstGeom>
+          <a:noFill/>
+        </p:spPr>
+        <p:txBody>
+          <a:bodyPr wrap="square" anchor="t" lIns="0" rIns="0" tIns="0" bIns="0"/>
+          <a:lstStyle/>
+          <a:p>
+            <a:pPr algn="l"/>
+            <a:r>
+              <a:rPr sz="1800" b="0" i="0">
+                <a:solidFill>
+                  <a:srgbClr val="54595D"/>
+                </a:solidFill>
+                <a:latin typeface="Calibri"/>
+              </a:rPr>
+              <a:t>A hole is 12 mm plus or minus 0.05 mm. What are its limits?</a:t>
+            </a:r>
+          </a:p>
+          <a:p>
+            <a:r>
+              <a:rPr sz="1800" b="1">
+                <a:solidFill>
+                  <a:srgbClr val="03306E"/>
+                </a:solidFill>
+                <a:latin typeface="Calibri"/>
+              </a:rPr>
+              <a:t>11.95 mm and 12.05 mm.</a:t>
+            </a:r>
+          </a:p>
+        </p:txBody>
+      </p:sp>
+      <p:sp>
+        <p:nvSpPr>
+          <p:cNvPr id="10" name="Oval 9"/>
+          <p:cNvSpPr/>
+          <p:nvPr/>
+        </p:nvSpPr>
+        <p:spPr>
+          <a:xfrm>
+            <a:off x="548640" y="4009644"/>
+            <a:ext cx="411480" cy="411480"/>
+          </a:xfrm>
+          <a:prstGeom prst="ellipse">
+            <a:avLst/>
+          </a:prstGeom>
+          <a:solidFill>
+            <a:srgbClr val="F2B705"/>
+          </a:solidFill>
+          <a:ln>
+            <a:noFill/>
+          </a:ln>
+          <a:effectLst/>
+        </p:spPr>
+        <p:style>
+          <a:lnRef idx="1">
+            <a:schemeClr val="accent1"/>
+          </a:lnRef>
+          <a:fillRef idx="3">
+            <a:schemeClr val="accent1"/>
+          </a:fillRef>
+          <a:effectRef idx="2">
+            <a:schemeClr val="accent1"/>
+          </a:effectRef>
+          <a:fontRef idx="minor">
+            <a:schemeClr val="lt1"/>
+          </a:fontRef>
+        </p:style>
+        <p:txBody>
+          <a:bodyPr rtlCol="0" anchor="ctr" lIns="0" rIns="0" tIns="0" bIns="0"/>
+          <a:lstStyle/>
+          <a:p>
+            <a:pPr algn="ctr"/>
+            <a:r>
+              <a:rPr sz="1400" b="1">
+                <a:solidFill>
+                  <a:srgbClr val="202122"/>
+                </a:solidFill>
+                <a:latin typeface="Calibri"/>
+              </a:rPr>
+              <a:t>3</a:t>
+            </a:r>
+          </a:p>
+        </p:txBody>
+      </p:sp>
+      <p:sp>
+        <p:nvSpPr>
+          <p:cNvPr id="11" name="TextBox 10"/>
+          <p:cNvSpPr txBox="1"/>
+          <p:nvPr/>
+        </p:nvSpPr>
+        <p:spPr>
+          <a:xfrm>
+            <a:off x="1234440" y="3991356"/>
+            <a:ext cx="10408615" cy="1030986"/>
+          </a:xfrm>
+          <a:prstGeom prst="rect">
+            <a:avLst/>
+          </a:prstGeom>
+          <a:noFill/>
+        </p:spPr>
+        <p:txBody>
+          <a:bodyPr wrap="square" anchor="t" lIns="0" rIns="0" tIns="0" bIns="0"/>
+          <a:lstStyle/>
+          <a:p>
+            <a:pPr algn="l"/>
+            <a:r>
+              <a:rPr sz="1800" b="0" i="0">
+                <a:solidFill>
+                  <a:srgbClr val="54595D"/>
+                </a:solidFill>
+                <a:latin typeface="Calibri"/>
+              </a:rPr>
+              <a:t>Which fit always has a gap?</a:t>
+            </a:r>
+          </a:p>
+          <a:p>
+            <a:r>
+              <a:rPr sz="1800" b="1">
+                <a:solidFill>
+                  <a:srgbClr val="03306E"/>
+                </a:solidFill>
+                <a:latin typeface="Calibri"/>
+              </a:rPr>
+              <a:t>A clearance fit.</a:t>
+            </a:r>
+          </a:p>
+        </p:txBody>
+      </p:sp>
+      <p:sp>
+        <p:nvSpPr>
+          <p:cNvPr id="12" name="Oval 11"/>
+          <p:cNvSpPr/>
+          <p:nvPr/>
+        </p:nvSpPr>
+        <p:spPr>
+          <a:xfrm>
+            <a:off x="548640" y="5205221"/>
+            <a:ext cx="411480" cy="411480"/>
+          </a:xfrm>
+          <a:prstGeom prst="ellipse">
+            <a:avLst/>
+          </a:prstGeom>
+          <a:solidFill>
+            <a:srgbClr val="F2B705"/>
+          </a:solidFill>
+          <a:ln>
+            <a:noFill/>
+          </a:ln>
+          <a:effectLst/>
+        </p:spPr>
+        <p:style>
+          <a:lnRef idx="1">
+            <a:schemeClr val="accent1"/>
+          </a:lnRef>
+          <a:fillRef idx="3">
+            <a:schemeClr val="accent1"/>
+          </a:fillRef>
+          <a:effectRef idx="2">
+            <a:schemeClr val="accent1"/>
+          </a:effectRef>
+          <a:fontRef idx="minor">
+            <a:schemeClr val="lt1"/>
+          </a:fontRef>
+        </p:style>
+        <p:txBody>
+          <a:bodyPr rtlCol="0" anchor="ctr" lIns="0" rIns="0" tIns="0" bIns="0"/>
+          <a:lstStyle/>
+          <a:p>
+            <a:pPr algn="ctr"/>
+            <a:r>
+              <a:rPr sz="1400" b="1">
+                <a:solidFill>
+                  <a:srgbClr val="202122"/>
+                </a:solidFill>
+                <a:latin typeface="Calibri"/>
+              </a:rPr>
+              <a:t>4</a:t>
+            </a:r>
+          </a:p>
+        </p:txBody>
+      </p:sp>
+      <p:sp>
+        <p:nvSpPr>
+          <p:cNvPr id="13" name="TextBox 12"/>
+          <p:cNvSpPr txBox="1"/>
+          <p:nvPr/>
+        </p:nvSpPr>
+        <p:spPr>
+          <a:xfrm>
+            <a:off x="1234440" y="5186933"/>
+            <a:ext cx="10408615" cy="1030986"/>
+          </a:xfrm>
+          <a:prstGeom prst="rect">
+            <a:avLst/>
+          </a:prstGeom>
+          <a:noFill/>
+        </p:spPr>
+        <p:txBody>
+          <a:bodyPr wrap="square" anchor="t" lIns="0" rIns="0" tIns="0" bIns="0"/>
+          <a:lstStyle/>
+          <a:p>
+            <a:pPr algn="l"/>
+            <a:r>
+              <a:rPr sz="1800" b="0" i="0">
+                <a:solidFill>
+                  <a:srgbClr val="54595D"/>
+                </a:solidFill>
+                <a:latin typeface="Calibri"/>
+              </a:rPr>
+              <a:t>Which drawing type is best for showing assembly?</a:t>
+            </a:r>
+          </a:p>
+          <a:p>
+            <a:r>
+              <a:rPr sz="1800" b="1">
+                <a:solidFill>
+                  <a:srgbClr val="03306E"/>
+                </a:solidFill>
+                <a:latin typeface="Calibri"/>
+              </a:rPr>
+              <a:t>An exploded view.</a:t>
+            </a:r>
+          </a:p>
+        </p:txBody>
+      </p:sp>
+    </p:spTree>
+  </p:cSld>
+  <p:clrMapOvr>
+    <a:masterClrMapping/>
+  </p:clrMapOvr>
+</p:sld>
+</file>
+
+<file path=ppt/slides/slide15.xml><?xml version="1.0" encoding="utf-8"?>
+<p:sld xmlns:a="http://schemas.openxmlformats.org/drawingml/2006/main" xmlns:p="http://schemas.openxmlformats.org/presentationml/2006/main" xmlns:r="http://schemas.openxmlformats.org/officeDocument/2006/relationships">
+  <p:cSld>
+    <p:bg>
+      <p:bgPr>
+        <a:solidFill>
+          <a:srgbClr val="FFFFFF"/>
+        </a:solidFill>
+        <a:effectLst/>
+      </p:bgPr>
+    </p:bg>
+    <p:spTree>
+      <p:nvGrpSpPr>
+        <p:cNvPr id="1" name=""/>
+        <p:cNvGrpSpPr/>
+        <p:nvPr/>
+      </p:nvGrpSpPr>
+      <p:grpSpPr/>
+      <p:sp>
+        <p:nvSpPr>
+          <p:cNvPr id="2" name="TextBox 1"/>
+          <p:cNvSpPr txBox="1"/>
+          <p:nvPr/>
+        </p:nvSpPr>
+        <p:spPr>
+          <a:xfrm>
+            <a:off x="548640" y="320040"/>
+            <a:ext cx="11094415" cy="274320"/>
+          </a:xfrm>
+          <a:prstGeom prst="rect">
+            <a:avLst/>
+          </a:prstGeom>
+          <a:noFill/>
+        </p:spPr>
+        <p:txBody>
+          <a:bodyPr wrap="square" anchor="t" lIns="0" rIns="0" tIns="0" bIns="0"/>
+          <a:lstStyle/>
+          <a:p>
+            <a:pPr algn="l"/>
+            <a:r>
+              <a:rPr sz="1100" b="1" i="0">
+                <a:solidFill>
+                  <a:srgbClr val="54595D"/>
+                </a:solidFill>
+                <a:latin typeface="Calibri"/>
+              </a:rPr>
+              <a:t>ENGINEERING CORE  ·  Core topic 3</a:t>
+            </a:r>
+          </a:p>
+        </p:txBody>
+      </p:sp>
+      <p:sp>
+        <p:nvSpPr>
+          <p:cNvPr id="3" name="TextBox 2"/>
+          <p:cNvSpPr txBox="1"/>
+          <p:nvPr/>
+        </p:nvSpPr>
+        <p:spPr>
+          <a:xfrm>
+            <a:off x="548640" y="566928"/>
+            <a:ext cx="11094415" cy="822960"/>
+          </a:xfrm>
+          <a:prstGeom prst="rect">
+            <a:avLst/>
+          </a:prstGeom>
+          <a:noFill/>
+        </p:spPr>
+        <p:txBody>
+          <a:bodyPr wrap="square" anchor="ctr" lIns="0" rIns="0" tIns="0" bIns="0"/>
+          <a:lstStyle/>
+          <a:p>
+            <a:pPr algn="l"/>
+            <a:r>
+              <a:rPr sz="3200" b="1" i="0">
+                <a:solidFill>
+                  <a:srgbClr val="03306E"/>
+                </a:solidFill>
+                <a:latin typeface="Cambria"/>
+              </a:rPr>
+              <a:t>Activity: Read the drawing</a:t>
+            </a:r>
+          </a:p>
+        </p:txBody>
+      </p:sp>
+      <p:sp>
+        <p:nvSpPr>
+          <p:cNvPr id="4" name="TextBox 3"/>
+          <p:cNvSpPr txBox="1"/>
+          <p:nvPr/>
+        </p:nvSpPr>
+        <p:spPr>
+          <a:xfrm>
+            <a:off x="548640" y="6446520"/>
+            <a:ext cx="8229600" cy="274320"/>
+          </a:xfrm>
+          <a:prstGeom prst="rect">
+            <a:avLst/>
+          </a:prstGeom>
+          <a:noFill/>
+        </p:spPr>
+        <p:txBody>
+          <a:bodyPr wrap="square" anchor="t" lIns="0" rIns="0" tIns="0" bIns="0"/>
+          <a:lstStyle/>
+          <a:p>
+            <a:pPr algn="l"/>
+            <a:r>
+              <a:rPr sz="1000" b="0" i="0">
+                <a:solidFill>
+                  <a:srgbClr val="54595D"/>
+                </a:solidFill>
+                <a:latin typeface="Calibri"/>
+              </a:rPr>
+              <a:t>Design and Development for Engineering and Manufacturing T Level  ·  Engineering Drawings, Dimensions and Tolerancing</a:t>
+            </a:r>
+          </a:p>
+        </p:txBody>
+      </p:sp>
+      <p:sp>
+        <p:nvSpPr>
+          <p:cNvPr id="5" name="TextBox 4"/>
+          <p:cNvSpPr txBox="1"/>
+          <p:nvPr/>
+        </p:nvSpPr>
+        <p:spPr>
+          <a:xfrm>
+            <a:off x="10728655" y="6446520"/>
+            <a:ext cx="914400" cy="274320"/>
+          </a:xfrm>
+          <a:prstGeom prst="rect">
+            <a:avLst/>
+          </a:prstGeom>
+          <a:noFill/>
+        </p:spPr>
+        <p:txBody>
+          <a:bodyPr wrap="square" anchor="t" lIns="0" rIns="0" tIns="0" bIns="0"/>
+          <a:lstStyle/>
+          <a:p>
+            <a:pPr algn="r"/>
+            <a:r>
+              <a:rPr sz="1000" b="0" i="0">
+                <a:solidFill>
+                  <a:srgbClr val="54595D"/>
+                </a:solidFill>
+                <a:latin typeface="Calibri"/>
+              </a:rPr>
+              <a:t>15</a:t>
+            </a:r>
+          </a:p>
+        </p:txBody>
+      </p:sp>
+      <p:sp>
+        <p:nvSpPr>
+          <p:cNvPr id="6" name="Rounded Rectangle 5"/>
+          <p:cNvSpPr/>
+          <p:nvPr/>
+        </p:nvSpPr>
+        <p:spPr>
+          <a:xfrm>
+            <a:off x="548640" y="1508760"/>
+            <a:ext cx="2011680" cy="457200"/>
+          </a:xfrm>
+          <a:prstGeom prst="roundRect">
+            <a:avLst>
+              <a:gd name="adj" fmla="val 50000"/>
+            </a:avLst>
+          </a:prstGeom>
+          <a:solidFill>
+            <a:srgbClr val="F2B705"/>
+          </a:solidFill>
+          <a:ln>
+            <a:noFill/>
+          </a:ln>
+          <a:effectLst/>
+        </p:spPr>
+        <p:style>
+          <a:lnRef idx="1">
+            <a:schemeClr val="accent1"/>
+          </a:lnRef>
+          <a:fillRef idx="3">
+            <a:schemeClr val="accent1"/>
+          </a:fillRef>
+          <a:effectRef idx="2">
+            <a:schemeClr val="accent1"/>
+          </a:effectRef>
+          <a:fontRef idx="minor">
+            <a:schemeClr val="lt1"/>
+          </a:fontRef>
+        </p:style>
+        <p:txBody>
+          <a:bodyPr rtlCol="0" anchor="ctr"/>
+          <a:lstStyle/>
+          <a:p/>
+        </p:txBody>
+      </p:sp>
+      <p:sp>
+        <p:nvSpPr>
+          <p:cNvPr id="7" name="TextBox 6"/>
+          <p:cNvSpPr txBox="1"/>
+          <p:nvPr/>
+        </p:nvSpPr>
+        <p:spPr>
+          <a:xfrm>
+            <a:off x="548640" y="1508760"/>
+            <a:ext cx="2011680" cy="457200"/>
+          </a:xfrm>
+          <a:prstGeom prst="rect">
+            <a:avLst/>
+          </a:prstGeom>
+          <a:noFill/>
+        </p:spPr>
+        <p:txBody>
+          <a:bodyPr wrap="square" anchor="ctr" lIns="0" rIns="0" tIns="0" bIns="0"/>
+          <a:lstStyle/>
+          <a:p>
+            <a:pPr algn="ctr"/>
+            <a:r>
+              <a:rPr sz="1400" b="1" i="0">
+                <a:solidFill>
+                  <a:srgbClr val="202122"/>
+                </a:solidFill>
+                <a:latin typeface="Calibri"/>
+              </a:rPr>
+              <a:t>25 minutes</a:t>
+            </a:r>
+          </a:p>
+        </p:txBody>
+      </p:sp>
+      <p:sp>
+        <p:nvSpPr>
+          <p:cNvPr id="8" name="TextBox 7"/>
+          <p:cNvSpPr txBox="1"/>
+          <p:nvPr/>
+        </p:nvSpPr>
+        <p:spPr>
+          <a:xfrm>
+            <a:off x="2743200" y="1508760"/>
+            <a:ext cx="4754880" cy="457200"/>
+          </a:xfrm>
+          <a:prstGeom prst="rect">
+            <a:avLst/>
+          </a:prstGeom>
+          <a:noFill/>
+        </p:spPr>
+        <p:txBody>
+          <a:bodyPr wrap="square" anchor="ctr" lIns="0" rIns="0" tIns="0" bIns="0"/>
+          <a:lstStyle/>
+          <a:p>
+            <a:pPr algn="l"/>
+            <a:r>
+              <a:rPr sz="1400" b="0" i="1">
+                <a:solidFill>
+                  <a:srgbClr val="54595D"/>
+                </a:solidFill>
+                <a:latin typeface="Calibri"/>
+              </a:rPr>
+              <a:t>Pairs</a:t>
+            </a:r>
+          </a:p>
+        </p:txBody>
+      </p:sp>
+      <p:sp>
+        <p:nvSpPr>
+          <p:cNvPr id="9" name="Oval 8"/>
+          <p:cNvSpPr/>
+          <p:nvPr/>
+        </p:nvSpPr>
+        <p:spPr>
+          <a:xfrm>
+            <a:off x="548640" y="2482596"/>
+            <a:ext cx="384048" cy="384048"/>
+          </a:xfrm>
+          <a:prstGeom prst="ellipse">
+            <a:avLst/>
+          </a:prstGeom>
+          <a:solidFill>
+            <a:srgbClr val="0645AD"/>
+          </a:solidFill>
+          <a:ln>
+            <a:noFill/>
+          </a:ln>
+          <a:effectLst/>
+        </p:spPr>
+        <p:style>
+          <a:lnRef idx="1">
+            <a:schemeClr val="accent1"/>
+          </a:lnRef>
+          <a:fillRef idx="3">
+            <a:schemeClr val="accent1"/>
+          </a:fillRef>
+          <a:effectRef idx="2">
+            <a:schemeClr val="accent1"/>
+          </a:effectRef>
+          <a:fontRef idx="minor">
+            <a:schemeClr val="lt1"/>
+          </a:fontRef>
+        </p:style>
+        <p:txBody>
+          <a:bodyPr rtlCol="0" anchor="ctr" lIns="0" rIns="0" tIns="0" bIns="0"/>
+          <a:lstStyle/>
+          <a:p>
+            <a:pPr algn="ctr"/>
+            <a:r>
+              <a:rPr sz="1300" b="1">
+                <a:solidFill>
+                  <a:srgbClr val="FFFFFF"/>
+                </a:solidFill>
+                <a:latin typeface="Calibri"/>
+              </a:rPr>
+              <a:t>1</a:t>
+            </a:r>
+          </a:p>
+        </p:txBody>
+      </p:sp>
+      <p:sp>
+        <p:nvSpPr>
+          <p:cNvPr id="10" name="TextBox 9"/>
+          <p:cNvSpPr txBox="1"/>
+          <p:nvPr/>
+        </p:nvSpPr>
+        <p:spPr>
+          <a:xfrm>
+            <a:off x="1143000" y="2240280"/>
+            <a:ext cx="5943600" cy="868680"/>
+          </a:xfrm>
+          <a:prstGeom prst="rect">
+            <a:avLst/>
+          </a:prstGeom>
+          <a:noFill/>
+        </p:spPr>
+        <p:txBody>
+          <a:bodyPr wrap="square" anchor="ctr" lIns="0" rIns="0" tIns="0" bIns="0"/>
+          <a:lstStyle/>
+          <a:p>
+            <a:pPr algn="l"/>
+            <a:r>
+              <a:rPr sz="1700" b="0" i="0">
+                <a:solidFill>
+                  <a:srgbClr val="202122"/>
+                </a:solidFill>
+                <a:latin typeface="Calibri"/>
+              </a:rPr>
+              <a:t>Study the orthographic drawing from your teacher.</a:t>
+            </a:r>
+          </a:p>
+        </p:txBody>
+      </p:sp>
+      <p:sp>
+        <p:nvSpPr>
+          <p:cNvPr id="11" name="Oval 10"/>
+          <p:cNvSpPr/>
+          <p:nvPr/>
+        </p:nvSpPr>
+        <p:spPr>
+          <a:xfrm>
+            <a:off x="548640" y="3461004"/>
+            <a:ext cx="384048" cy="384048"/>
+          </a:xfrm>
+          <a:prstGeom prst="ellipse">
+            <a:avLst/>
+          </a:prstGeom>
+          <a:solidFill>
+            <a:srgbClr val="0645AD"/>
+          </a:solidFill>
+          <a:ln>
+            <a:noFill/>
+          </a:ln>
+          <a:effectLst/>
+        </p:spPr>
+        <p:style>
+          <a:lnRef idx="1">
+            <a:schemeClr val="accent1"/>
+          </a:lnRef>
+          <a:fillRef idx="3">
+            <a:schemeClr val="accent1"/>
+          </a:fillRef>
+          <a:effectRef idx="2">
+            <a:schemeClr val="accent1"/>
+          </a:effectRef>
+          <a:fontRef idx="minor">
+            <a:schemeClr val="lt1"/>
+          </a:fontRef>
+        </p:style>
+        <p:txBody>
+          <a:bodyPr rtlCol="0" anchor="ctr" lIns="0" rIns="0" tIns="0" bIns="0"/>
+          <a:lstStyle/>
+          <a:p>
+            <a:pPr algn="ctr"/>
+            <a:r>
+              <a:rPr sz="1300" b="1">
+                <a:solidFill>
+                  <a:srgbClr val="FFFFFF"/>
+                </a:solidFill>
+                <a:latin typeface="Calibri"/>
+              </a:rPr>
+              <a:t>2</a:t>
+            </a:r>
+          </a:p>
+        </p:txBody>
+      </p:sp>
+      <p:sp>
+        <p:nvSpPr>
+          <p:cNvPr id="12" name="TextBox 11"/>
+          <p:cNvSpPr txBox="1"/>
+          <p:nvPr/>
+        </p:nvSpPr>
+        <p:spPr>
+          <a:xfrm>
+            <a:off x="1143000" y="3218688"/>
+            <a:ext cx="5943600" cy="868680"/>
+          </a:xfrm>
+          <a:prstGeom prst="rect">
+            <a:avLst/>
+          </a:prstGeom>
+          <a:noFill/>
+        </p:spPr>
+        <p:txBody>
+          <a:bodyPr wrap="square" anchor="ctr" lIns="0" rIns="0" tIns="0" bIns="0"/>
+          <a:lstStyle/>
+          <a:p>
+            <a:pPr algn="l"/>
+            <a:r>
+              <a:rPr sz="1700" b="0" i="0">
+                <a:solidFill>
+                  <a:srgbClr val="202122"/>
+                </a:solidFill>
+                <a:latin typeface="Calibri"/>
+              </a:rPr>
+              <a:t>List every abbreviation and symbol and what it means.</a:t>
+            </a:r>
+          </a:p>
+        </p:txBody>
+      </p:sp>
+      <p:sp>
+        <p:nvSpPr>
+          <p:cNvPr id="13" name="Oval 12"/>
+          <p:cNvSpPr/>
+          <p:nvPr/>
+        </p:nvSpPr>
+        <p:spPr>
+          <a:xfrm>
+            <a:off x="548640" y="4439412"/>
+            <a:ext cx="384048" cy="384048"/>
+          </a:xfrm>
+          <a:prstGeom prst="ellipse">
+            <a:avLst/>
+          </a:prstGeom>
+          <a:solidFill>
+            <a:srgbClr val="0645AD"/>
+          </a:solidFill>
+          <a:ln>
+            <a:noFill/>
+          </a:ln>
+          <a:effectLst/>
+        </p:spPr>
+        <p:style>
+          <a:lnRef idx="1">
+            <a:schemeClr val="accent1"/>
+          </a:lnRef>
+          <a:fillRef idx="3">
+            <a:schemeClr val="accent1"/>
+          </a:fillRef>
+          <a:effectRef idx="2">
+            <a:schemeClr val="accent1"/>
+          </a:effectRef>
+          <a:fontRef idx="minor">
+            <a:schemeClr val="lt1"/>
+          </a:fontRef>
+        </p:style>
+        <p:txBody>
+          <a:bodyPr rtlCol="0" anchor="ctr" lIns="0" rIns="0" tIns="0" bIns="0"/>
+          <a:lstStyle/>
+          <a:p>
+            <a:pPr algn="ctr"/>
+            <a:r>
+              <a:rPr sz="1300" b="1">
+                <a:solidFill>
+                  <a:srgbClr val="FFFFFF"/>
+                </a:solidFill>
+                <a:latin typeface="Calibri"/>
+              </a:rPr>
+              <a:t>3</a:t>
+            </a:r>
+          </a:p>
+        </p:txBody>
+      </p:sp>
+      <p:sp>
+        <p:nvSpPr>
+          <p:cNvPr id="14" name="TextBox 13"/>
+          <p:cNvSpPr txBox="1"/>
+          <p:nvPr/>
+        </p:nvSpPr>
+        <p:spPr>
+          <a:xfrm>
+            <a:off x="1143000" y="4197096"/>
+            <a:ext cx="5943600" cy="868680"/>
+          </a:xfrm>
+          <a:prstGeom prst="rect">
+            <a:avLst/>
+          </a:prstGeom>
+          <a:noFill/>
+        </p:spPr>
+        <p:txBody>
+          <a:bodyPr wrap="square" anchor="ctr" lIns="0" rIns="0" tIns="0" bIns="0"/>
+          <a:lstStyle/>
+          <a:p>
+            <a:pPr algn="l"/>
+            <a:r>
+              <a:rPr sz="1700" b="0" i="0">
+                <a:solidFill>
+                  <a:srgbClr val="202122"/>
+                </a:solidFill>
+                <a:latin typeface="Calibri"/>
+              </a:rPr>
+              <a:t>Calculate the limits for three toleranced dimensions.</a:t>
+            </a:r>
+          </a:p>
+        </p:txBody>
+      </p:sp>
+      <p:sp>
+        <p:nvSpPr>
+          <p:cNvPr id="15" name="Oval 14"/>
+          <p:cNvSpPr/>
+          <p:nvPr/>
+        </p:nvSpPr>
+        <p:spPr>
+          <a:xfrm>
+            <a:off x="548640" y="5417820"/>
+            <a:ext cx="384048" cy="384048"/>
+          </a:xfrm>
+          <a:prstGeom prst="ellipse">
+            <a:avLst/>
+          </a:prstGeom>
+          <a:solidFill>
+            <a:srgbClr val="0645AD"/>
+          </a:solidFill>
+          <a:ln>
+            <a:noFill/>
+          </a:ln>
+          <a:effectLst/>
+        </p:spPr>
+        <p:style>
+          <a:lnRef idx="1">
+            <a:schemeClr val="accent1"/>
+          </a:lnRef>
+          <a:fillRef idx="3">
+            <a:schemeClr val="accent1"/>
+          </a:fillRef>
+          <a:effectRef idx="2">
+            <a:schemeClr val="accent1"/>
+          </a:effectRef>
+          <a:fontRef idx="minor">
+            <a:schemeClr val="lt1"/>
+          </a:fontRef>
+        </p:style>
+        <p:txBody>
+          <a:bodyPr rtlCol="0" anchor="ctr" lIns="0" rIns="0" tIns="0" bIns="0"/>
+          <a:lstStyle/>
+          <a:p>
+            <a:pPr algn="ctr"/>
+            <a:r>
+              <a:rPr sz="1300" b="1">
+                <a:solidFill>
+                  <a:srgbClr val="FFFFFF"/>
+                </a:solidFill>
+                <a:latin typeface="Calibri"/>
+              </a:rPr>
+              <a:t>4</a:t>
+            </a:r>
+          </a:p>
+        </p:txBody>
+      </p:sp>
+      <p:sp>
+        <p:nvSpPr>
+          <p:cNvPr id="16" name="TextBox 15"/>
+          <p:cNvSpPr txBox="1"/>
+          <p:nvPr/>
+        </p:nvSpPr>
+        <p:spPr>
+          <a:xfrm>
+            <a:off x="1143000" y="5175504"/>
+            <a:ext cx="5943600" cy="868680"/>
+          </a:xfrm>
+          <a:prstGeom prst="rect">
+            <a:avLst/>
+          </a:prstGeom>
+          <a:noFill/>
+        </p:spPr>
+        <p:txBody>
+          <a:bodyPr wrap="square" anchor="ctr" lIns="0" rIns="0" tIns="0" bIns="0"/>
+          <a:lstStyle/>
+          <a:p>
+            <a:pPr algn="l"/>
+            <a:r>
+              <a:rPr sz="1700" b="0" i="0">
+                <a:solidFill>
+                  <a:srgbClr val="202122"/>
+                </a:solidFill>
+                <a:latin typeface="Calibri"/>
+              </a:rPr>
+              <a:t>Identify the fit between the shaft and the hole.</a:t>
+            </a:r>
+          </a:p>
+        </p:txBody>
+      </p:sp>
+      <p:sp>
+        <p:nvSpPr>
+          <p:cNvPr id="17" name="Rounded Rectangle 16"/>
+          <p:cNvSpPr/>
+          <p:nvPr/>
+        </p:nvSpPr>
+        <p:spPr>
+          <a:xfrm>
+            <a:off x="7772400" y="1508760"/>
+            <a:ext cx="3867912" cy="4572000"/>
+          </a:xfrm>
+          <a:prstGeom prst="roundRect">
+            <a:avLst>
+              <a:gd name="adj" fmla="val 8000"/>
+            </a:avLst>
+          </a:prstGeom>
+          <a:solidFill>
+            <a:srgbClr val="EAF3FF"/>
+          </a:solidFill>
+          <a:ln>
+            <a:noFill/>
+          </a:ln>
+          <a:effectLst/>
+        </p:spPr>
+        <p:style>
+          <a:lnRef idx="1">
+            <a:schemeClr val="accent1"/>
+          </a:lnRef>
+          <a:fillRef idx="3">
+            <a:schemeClr val="accent1"/>
+          </a:fillRef>
+          <a:effectRef idx="2">
+            <a:schemeClr val="accent1"/>
+          </a:effectRef>
+          <a:fontRef idx="minor">
+            <a:schemeClr val="lt1"/>
+          </a:fontRef>
+        </p:style>
+        <p:txBody>
+          <a:bodyPr rtlCol="0" anchor="ctr"/>
+          <a:lstStyle/>
+          <a:p/>
+        </p:txBody>
+      </p:sp>
+      <p:sp>
+        <p:nvSpPr>
+          <p:cNvPr id="18" name="TextBox 17"/>
+          <p:cNvSpPr txBox="1"/>
+          <p:nvPr/>
+        </p:nvSpPr>
+        <p:spPr>
+          <a:xfrm>
+            <a:off x="8046720" y="1737360"/>
+            <a:ext cx="3291840" cy="365760"/>
+          </a:xfrm>
+          <a:prstGeom prst="rect">
+            <a:avLst/>
+          </a:prstGeom>
+          <a:noFill/>
+        </p:spPr>
+        <p:txBody>
+          <a:bodyPr wrap="square" anchor="t" lIns="0" rIns="0" tIns="0" bIns="0"/>
+          <a:lstStyle/>
+          <a:p>
+            <a:pPr algn="l"/>
+            <a:r>
+              <a:rPr sz="1300" b="1" i="0">
+                <a:solidFill>
+                  <a:srgbClr val="0645AD"/>
+                </a:solidFill>
+                <a:latin typeface="Calibri"/>
+              </a:rPr>
+              <a:t>SUCCESS CRITERIA</a:t>
+            </a:r>
+          </a:p>
+        </p:txBody>
+      </p:sp>
+      <p:sp>
+        <p:nvSpPr>
+          <p:cNvPr id="19" name="TextBox 18"/>
+          <p:cNvSpPr txBox="1"/>
+          <p:nvPr/>
+        </p:nvSpPr>
+        <p:spPr>
+          <a:xfrm>
+            <a:off x="8046720" y="2240280"/>
+            <a:ext cx="3337560" cy="3657600"/>
+          </a:xfrm>
+          <a:prstGeom prst="rect">
+            <a:avLst/>
+          </a:prstGeom>
+          <a:noFill/>
+        </p:spPr>
+        <p:txBody>
+          <a:bodyPr wrap="square" lIns="0" rIns="0" tIns="0" bIns="0">
+            <a:spAutoFit/>
+          </a:bodyPr>
+          <a:lstStyle/>
+          <a:p>
+            <a:pPr marL="274320" indent="-274320">
+              <a:spcAft>
+                <a:spcPts val="810"/>
+              </a:spcAft>
+              <a:buClr>
+                <a:srgbClr val="0645AD"/>
+              </a:buClr>
+              <a:buFont typeface="Arial"/>
+              <a:buChar char="•"/>
+            </a:pPr>
+            <a:r>
+              <a:rPr sz="1800" b="0">
+                <a:solidFill>
+                  <a:srgbClr val="202122"/>
+                </a:solidFill>
+                <a:latin typeface="Calibri"/>
+              </a:rPr>
+              <a:t>All symbols correctly explained</a:t>
+            </a:r>
+          </a:p>
+          <a:p>
+            <a:pPr marL="274320" indent="-274320">
+              <a:spcAft>
+                <a:spcPts val="810"/>
+              </a:spcAft>
+              <a:buClr>
+                <a:srgbClr val="0645AD"/>
+              </a:buClr>
+              <a:buFont typeface="Arial"/>
+              <a:buChar char="•"/>
+            </a:pPr>
+            <a:r>
+              <a:rPr sz="1800" b="0">
+                <a:solidFill>
+                  <a:srgbClr val="202122"/>
+                </a:solidFill>
+                <a:latin typeface="Calibri"/>
+              </a:rPr>
+              <a:t>Limits calculated accurately</a:t>
+            </a:r>
+          </a:p>
+          <a:p>
+            <a:pPr marL="274320" indent="-274320">
+              <a:spcAft>
+                <a:spcPts val="810"/>
+              </a:spcAft>
+              <a:buClr>
+                <a:srgbClr val="0645AD"/>
+              </a:buClr>
+              <a:buFont typeface="Arial"/>
+              <a:buChar char="•"/>
+            </a:pPr>
+            <a:r>
+              <a:rPr sz="1800" b="0">
+                <a:solidFill>
+                  <a:srgbClr val="202122"/>
+                </a:solidFill>
+                <a:latin typeface="Calibri"/>
+              </a:rPr>
+              <a:t>Fit type justified</a:t>
+            </a:r>
+          </a:p>
+        </p:txBody>
+      </p:sp>
+    </p:spTree>
+  </p:cSld>
+  <p:clrMapOvr>
+    <a:masterClrMapping/>
+  </p:clrMapOvr>
+</p:sld>
+</file>
+
+<file path=ppt/slides/slide16.xml><?xml version="1.0" encoding="utf-8"?>
+<p:sld xmlns:a="http://schemas.openxmlformats.org/drawingml/2006/main" xmlns:p="http://schemas.openxmlformats.org/presentationml/2006/main" xmlns:r="http://schemas.openxmlformats.org/officeDocument/2006/relationships">
+  <p:cSld>
+    <p:bg>
+      <p:bgPr>
+        <a:solidFill>
           <a:srgbClr val="03306E"/>
         </a:solidFill>
         <a:effectLst/>
@@ -5369,22 +9276,93 @@
       </p:sp>
       <p:sp>
         <p:nvSpPr>
-          <p:cNvPr id="6" name="Rounded Rectangle 5"/>
+          <p:cNvPr id="6" name="TextBox 5"/>
+          <p:cNvSpPr txBox="1"/>
+          <p:nvPr/>
+        </p:nvSpPr>
+        <p:spPr>
+          <a:xfrm>
+            <a:off x="548640" y="1554480"/>
+            <a:ext cx="6720840" cy="4617720"/>
+          </a:xfrm>
+          <a:prstGeom prst="rect">
+            <a:avLst/>
+          </a:prstGeom>
+          <a:noFill/>
+        </p:spPr>
+        <p:txBody>
+          <a:bodyPr wrap="square" lIns="0" rIns="0" tIns="0" bIns="0">
+            <a:spAutoFit/>
+          </a:bodyPr>
+          <a:lstStyle/>
+          <a:p>
+            <a:pPr>
+              <a:spcAft>
+                <a:spcPts val="1200"/>
+              </a:spcAft>
+            </a:pPr>
+            <a:r>
+              <a:rPr sz="2000" b="0">
+                <a:solidFill>
+                  <a:srgbClr val="202122"/>
+                </a:solidFill>
+                <a:latin typeface="Calibri"/>
+              </a:rPr>
+              <a:t>Engineers choose a drawing type to suit its purpose and audience.</a:t>
+            </a:r>
+          </a:p>
+          <a:p>
+            <a:pPr>
+              <a:spcAft>
+                <a:spcPts val="1200"/>
+              </a:spcAft>
+            </a:pPr>
+            <a:r>
+              <a:rPr sz="2000" b="0">
+                <a:solidFill>
+                  <a:srgbClr val="202122"/>
+                </a:solidFill>
+                <a:latin typeface="Calibri"/>
+              </a:rPr>
+              <a:t>Freehand sketches capture ideas quickly. Isometric drawings show an object in 3D at a fixed angle, easy for anyone to understand. Orthographic projection shows accurate 2D views (front, side and plan) with dimensions, used for manufacture. Exploded views show how parts fit together. CAD models are accurate 3D models that can be tested virtually. Block diagrams, flowcharts, circuit diagrams and schematics show systems.</a:t>
+            </a:r>
+          </a:p>
+          <a:p>
+            <a:pPr>
+              <a:spcAft>
+                <a:spcPts val="1200"/>
+              </a:spcAft>
+            </a:pPr>
+            <a:r>
+              <a:rPr sz="2000" b="0">
+                <a:solidFill>
+                  <a:srgbClr val="202122"/>
+                </a:solidFill>
+                <a:latin typeface="Calibri"/>
+              </a:rPr>
+              <a:t>Drawings follow standards such as BS EN 8888 for technical drawings and BS 3939 for graphical symbols.</a:t>
+            </a:r>
+          </a:p>
+        </p:txBody>
+      </p:sp>
+      <p:sp>
+        <p:nvSpPr>
+          <p:cNvPr id="7" name="Rounded Rectangle 6"/>
           <p:cNvSpPr/>
           <p:nvPr/>
         </p:nvSpPr>
         <p:spPr>
           <a:xfrm>
-            <a:off x="548640" y="1600200"/>
-            <a:ext cx="3515258" cy="2148840"/>
+            <a:off x="7772400" y="1554480"/>
+            <a:ext cx="3867912" cy="4526280"/>
           </a:xfrm>
           <a:prstGeom prst="roundRect">
             <a:avLst>
-              <a:gd name="adj" fmla="val 6000"/>
+              <a:gd name="adj" fmla="val 8000"/>
             </a:avLst>
           </a:prstGeom>
           <a:solidFill>
-            <a:srgbClr val="EAF3FF"/>
+            <a:srgbClr val="03306E"/>
           </a:solidFill>
           <a:ln>
             <a:noFill/>
@@ -5413,14 +9391,14 @@
       </p:sp>
       <p:sp>
         <p:nvSpPr>
-          <p:cNvPr id="7" name="Oval 6"/>
+          <p:cNvPr id="8" name="Oval 7"/>
           <p:cNvSpPr/>
           <p:nvPr/>
         </p:nvSpPr>
         <p:spPr>
           <a:xfrm>
-            <a:off x="777240" y="1828800"/>
-            <a:ext cx="457200" cy="457200"/>
+            <a:off x="8046720" y="1828800"/>
+            <a:ext cx="548640" cy="548640"/>
           </a:xfrm>
           <a:prstGeom prst="ellipse">
             <a:avLst/>
@@ -5453,46 +9431,13 @@
           <a:p>
             <a:pPr algn="ctr"/>
             <a:r>
-              <a:rPr sz="1500" b="1">
+              <a:rPr sz="1300" b="1">
                 <a:solidFill>
                   <a:srgbClr val="202122"/>
                 </a:solidFill>
                 <a:latin typeface="Calibri"/>
               </a:rPr>
-              <a:t>1</a:t>
-            </a:r>
-          </a:p>
-        </p:txBody>
-      </p:sp>
-      <p:sp>
-        <p:nvSpPr>
-          <p:cNvPr id="8" name="TextBox 7"/>
-          <p:cNvSpPr txBox="1"/>
-          <p:nvPr/>
-        </p:nvSpPr>
-        <p:spPr>
-          <a:xfrm>
-            <a:off x="1371600" y="1801368"/>
-            <a:ext cx="2509418" cy="512064"/>
-          </a:xfrm>
-          <a:prstGeom prst="rect">
-            <a:avLst/>
-          </a:prstGeom>
-          <a:noFill/>
-        </p:spPr>
-        <p:txBody>
-          <a:bodyPr wrap="square" anchor="ctr" lIns="0" rIns="0" tIns="0" bIns="0"/>
-          <a:lstStyle/>
-          <a:p>
-            <a:pPr algn="l"/>
-            <a:r>
-              <a:rPr sz="1600" b="1" i="0">
-                <a:solidFill>
-                  <a:srgbClr val="03306E"/>
-                </a:solidFill>
-                <a:latin typeface="Calibri"/>
-              </a:rPr>
-              <a:t>Sketches and isometric</a:t>
+              <a:t>e.g.</a:t>
             </a:r>
           </a:p>
         </p:txBody>
@@ -5505,8 +9450,8 @@
         </p:nvSpPr>
         <p:spPr>
           <a:xfrm>
-            <a:off x="777240" y="2468880"/>
-            <a:ext cx="3058058" cy="1143000"/>
+            <a:off x="8046720" y="2560320"/>
+            <a:ext cx="3291840" cy="365760"/>
           </a:xfrm>
           <a:prstGeom prst="rect">
             <a:avLst/>
@@ -5519,124 +9464,27 @@
           <a:p>
             <a:pPr algn="l"/>
             <a:r>
-              <a:rPr sz="2000" b="0" i="0">
-                <a:solidFill>
-                  <a:srgbClr val="202122"/>
-                </a:solidFill>
-                <a:latin typeface="Calibri"/>
-              </a:rPr>
-              <a:t>Quick ideas and 3D views for discussion.</a:t>
-            </a:r>
-          </a:p>
-        </p:txBody>
-      </p:sp>
-      <p:sp>
-        <p:nvSpPr>
-          <p:cNvPr id="10" name="Rounded Rectangle 9"/>
-          <p:cNvSpPr/>
-          <p:nvPr/>
-        </p:nvSpPr>
-        <p:spPr>
-          <a:xfrm>
-            <a:off x="4338218" y="1600200"/>
-            <a:ext cx="3515258" cy="2148840"/>
-          </a:xfrm>
-          <a:prstGeom prst="roundRect">
-            <a:avLst>
-              <a:gd name="adj" fmla="val 6000"/>
-            </a:avLst>
-          </a:prstGeom>
-          <a:solidFill>
-            <a:srgbClr val="EAF3FF"/>
-          </a:solidFill>
-          <a:ln>
-            <a:noFill/>
-          </a:ln>
-          <a:effectLst/>
-        </p:spPr>
-        <p:style>
-          <a:lnRef idx="1">
-            <a:schemeClr val="accent1"/>
-          </a:lnRef>
-          <a:fillRef idx="3">
-            <a:schemeClr val="accent1"/>
-          </a:fillRef>
-          <a:effectRef idx="2">
-            <a:schemeClr val="accent1"/>
-          </a:effectRef>
-          <a:fontRef idx="minor">
-            <a:schemeClr val="lt1"/>
-          </a:fontRef>
-        </p:style>
-        <p:txBody>
-          <a:bodyPr rtlCol="0" anchor="ctr"/>
-          <a:lstStyle/>
-          <a:p/>
-        </p:txBody>
-      </p:sp>
-      <p:sp>
-        <p:nvSpPr>
-          <p:cNvPr id="11" name="Oval 10"/>
-          <p:cNvSpPr/>
-          <p:nvPr/>
-        </p:nvSpPr>
-        <p:spPr>
-          <a:xfrm>
-            <a:off x="4566818" y="1828800"/>
-            <a:ext cx="457200" cy="457200"/>
-          </a:xfrm>
-          <a:prstGeom prst="ellipse">
-            <a:avLst/>
-          </a:prstGeom>
-          <a:solidFill>
-            <a:srgbClr val="F2B705"/>
-          </a:solidFill>
-          <a:ln>
-            <a:noFill/>
-          </a:ln>
-          <a:effectLst/>
-        </p:spPr>
-        <p:style>
-          <a:lnRef idx="1">
-            <a:schemeClr val="accent1"/>
-          </a:lnRef>
-          <a:fillRef idx="3">
-            <a:schemeClr val="accent1"/>
-          </a:fillRef>
-          <a:effectRef idx="2">
-            <a:schemeClr val="accent1"/>
-          </a:effectRef>
-          <a:fontRef idx="minor">
-            <a:schemeClr val="lt1"/>
-          </a:fontRef>
-        </p:style>
-        <p:txBody>
-          <a:bodyPr rtlCol="0" anchor="ctr" lIns="0" rIns="0" tIns="0" bIns="0"/>
-          <a:lstStyle/>
-          <a:p>
-            <a:pPr algn="ctr"/>
-            <a:r>
-              <a:rPr sz="1500" b="1">
-                <a:solidFill>
-                  <a:srgbClr val="202122"/>
-                </a:solidFill>
-                <a:latin typeface="Calibri"/>
-              </a:rPr>
-              <a:t>2</a:t>
-            </a:r>
-          </a:p>
-        </p:txBody>
-      </p:sp>
-      <p:sp>
-        <p:nvSpPr>
-          <p:cNvPr id="12" name="TextBox 11"/>
+              <a:rPr sz="1300" b="1" i="0">
+                <a:solidFill>
+                  <a:srgbClr val="A9C8F0"/>
+                </a:solidFill>
+                <a:latin typeface="Calibri"/>
+              </a:rPr>
+              <a:t>EXAMPLE</a:t>
+            </a:r>
+          </a:p>
+        </p:txBody>
+      </p:sp>
+      <p:sp>
+        <p:nvSpPr>
+          <p:cNvPr id="10" name="TextBox 9"/>
           <p:cNvSpPr txBox="1"/>
           <p:nvPr/>
         </p:nvSpPr>
         <p:spPr>
           <a:xfrm>
-            <a:off x="5161178" y="1801368"/>
-            <a:ext cx="2509418" cy="512064"/>
+            <a:off x="8046720" y="2971800"/>
+            <a:ext cx="3291840" cy="2971800"/>
           </a:xfrm>
           <a:prstGeom prst="rect">
             <a:avLst/>
@@ -5644,540 +9492,18 @@
           <a:noFill/>
         </p:spPr>
         <p:txBody>
-          <a:bodyPr wrap="square" anchor="ctr" lIns="0" rIns="0" tIns="0" bIns="0"/>
+          <a:bodyPr wrap="square" anchor="t" lIns="0" rIns="0" tIns="0" bIns="0"/>
           <a:lstStyle/>
           <a:p>
             <a:pPr algn="l"/>
             <a:r>
-              <a:rPr sz="1600" b="1" i="0">
-                <a:solidFill>
-                  <a:srgbClr val="03306E"/>
-                </a:solidFill>
-                <a:latin typeface="Calibri"/>
-              </a:rPr>
-              <a:t>Orthographic projection</a:t>
-            </a:r>
-          </a:p>
-        </p:txBody>
-      </p:sp>
-      <p:sp>
-        <p:nvSpPr>
-          <p:cNvPr id="13" name="TextBox 12"/>
-          <p:cNvSpPr txBox="1"/>
-          <p:nvPr/>
-        </p:nvSpPr>
-        <p:spPr>
-          <a:xfrm>
-            <a:off x="4566818" y="2468880"/>
-            <a:ext cx="3058058" cy="1143000"/>
-          </a:xfrm>
-          <a:prstGeom prst="rect">
-            <a:avLst/>
-          </a:prstGeom>
-          <a:noFill/>
-        </p:spPr>
-        <p:txBody>
-          <a:bodyPr wrap="square" anchor="t" lIns="0" rIns="0" tIns="0" bIns="0"/>
-          <a:lstStyle/>
-          <a:p>
-            <a:pPr algn="l"/>
-            <a:r>
-              <a:rPr sz="2000" b="0" i="0">
-                <a:solidFill>
-                  <a:srgbClr val="202122"/>
-                </a:solidFill>
-                <a:latin typeface="Calibri"/>
-              </a:rPr>
-              <a:t>Accurate 2D views for manufacture.</a:t>
-            </a:r>
-          </a:p>
-        </p:txBody>
-      </p:sp>
-      <p:sp>
-        <p:nvSpPr>
-          <p:cNvPr id="14" name="Rounded Rectangle 13"/>
-          <p:cNvSpPr/>
-          <p:nvPr/>
-        </p:nvSpPr>
-        <p:spPr>
-          <a:xfrm>
-            <a:off x="8127796" y="1600200"/>
-            <a:ext cx="3515258" cy="2148840"/>
-          </a:xfrm>
-          <a:prstGeom prst="roundRect">
-            <a:avLst>
-              <a:gd name="adj" fmla="val 6000"/>
-            </a:avLst>
-          </a:prstGeom>
-          <a:solidFill>
-            <a:srgbClr val="EAF3FF"/>
-          </a:solidFill>
-          <a:ln>
-            <a:noFill/>
-          </a:ln>
-          <a:effectLst/>
-        </p:spPr>
-        <p:style>
-          <a:lnRef idx="1">
-            <a:schemeClr val="accent1"/>
-          </a:lnRef>
-          <a:fillRef idx="3">
-            <a:schemeClr val="accent1"/>
-          </a:fillRef>
-          <a:effectRef idx="2">
-            <a:schemeClr val="accent1"/>
-          </a:effectRef>
-          <a:fontRef idx="minor">
-            <a:schemeClr val="lt1"/>
-          </a:fontRef>
-        </p:style>
-        <p:txBody>
-          <a:bodyPr rtlCol="0" anchor="ctr"/>
-          <a:lstStyle/>
-          <a:p/>
-        </p:txBody>
-      </p:sp>
-      <p:sp>
-        <p:nvSpPr>
-          <p:cNvPr id="15" name="Oval 14"/>
-          <p:cNvSpPr/>
-          <p:nvPr/>
-        </p:nvSpPr>
-        <p:spPr>
-          <a:xfrm>
-            <a:off x="8356396" y="1828800"/>
-            <a:ext cx="457200" cy="457200"/>
-          </a:xfrm>
-          <a:prstGeom prst="ellipse">
-            <a:avLst/>
-          </a:prstGeom>
-          <a:solidFill>
-            <a:srgbClr val="F2B705"/>
-          </a:solidFill>
-          <a:ln>
-            <a:noFill/>
-          </a:ln>
-          <a:effectLst/>
-        </p:spPr>
-        <p:style>
-          <a:lnRef idx="1">
-            <a:schemeClr val="accent1"/>
-          </a:lnRef>
-          <a:fillRef idx="3">
-            <a:schemeClr val="accent1"/>
-          </a:fillRef>
-          <a:effectRef idx="2">
-            <a:schemeClr val="accent1"/>
-          </a:effectRef>
-          <a:fontRef idx="minor">
-            <a:schemeClr val="lt1"/>
-          </a:fontRef>
-        </p:style>
-        <p:txBody>
-          <a:bodyPr rtlCol="0" anchor="ctr" lIns="0" rIns="0" tIns="0" bIns="0"/>
-          <a:lstStyle/>
-          <a:p>
-            <a:pPr algn="ctr"/>
-            <a:r>
-              <a:rPr sz="1500" b="1">
-                <a:solidFill>
-                  <a:srgbClr val="202122"/>
-                </a:solidFill>
-                <a:latin typeface="Calibri"/>
-              </a:rPr>
-              <a:t>3</a:t>
-            </a:r>
-          </a:p>
-        </p:txBody>
-      </p:sp>
-      <p:sp>
-        <p:nvSpPr>
-          <p:cNvPr id="16" name="TextBox 15"/>
-          <p:cNvSpPr txBox="1"/>
-          <p:nvPr/>
-        </p:nvSpPr>
-        <p:spPr>
-          <a:xfrm>
-            <a:off x="8950756" y="1801368"/>
-            <a:ext cx="2509418" cy="512064"/>
-          </a:xfrm>
-          <a:prstGeom prst="rect">
-            <a:avLst/>
-          </a:prstGeom>
-          <a:noFill/>
-        </p:spPr>
-        <p:txBody>
-          <a:bodyPr wrap="square" anchor="ctr" lIns="0" rIns="0" tIns="0" bIns="0"/>
-          <a:lstStyle/>
-          <a:p>
-            <a:pPr algn="l"/>
-            <a:r>
-              <a:rPr sz="1900" b="1" i="0">
-                <a:solidFill>
-                  <a:srgbClr val="03306E"/>
-                </a:solidFill>
-                <a:latin typeface="Calibri"/>
-              </a:rPr>
-              <a:t>Exploded views</a:t>
-            </a:r>
-          </a:p>
-        </p:txBody>
-      </p:sp>
-      <p:sp>
-        <p:nvSpPr>
-          <p:cNvPr id="17" name="TextBox 16"/>
-          <p:cNvSpPr txBox="1"/>
-          <p:nvPr/>
-        </p:nvSpPr>
-        <p:spPr>
-          <a:xfrm>
-            <a:off x="8356396" y="2468880"/>
-            <a:ext cx="3058058" cy="1143000"/>
-          </a:xfrm>
-          <a:prstGeom prst="rect">
-            <a:avLst/>
-          </a:prstGeom>
-          <a:noFill/>
-        </p:spPr>
-        <p:txBody>
-          <a:bodyPr wrap="square" anchor="t" lIns="0" rIns="0" tIns="0" bIns="0"/>
-          <a:lstStyle/>
-          <a:p>
-            <a:pPr algn="l"/>
-            <a:r>
-              <a:rPr sz="2000" b="0" i="0">
-                <a:solidFill>
-                  <a:srgbClr val="202122"/>
-                </a:solidFill>
-                <a:latin typeface="Calibri"/>
-              </a:rPr>
-              <a:t>Show how parts assemble.</a:t>
-            </a:r>
-          </a:p>
-        </p:txBody>
-      </p:sp>
-      <p:sp>
-        <p:nvSpPr>
-          <p:cNvPr id="18" name="Rounded Rectangle 17"/>
-          <p:cNvSpPr/>
-          <p:nvPr/>
-        </p:nvSpPr>
-        <p:spPr>
-          <a:xfrm>
-            <a:off x="548640" y="4023360"/>
-            <a:ext cx="3515258" cy="2148840"/>
-          </a:xfrm>
-          <a:prstGeom prst="roundRect">
-            <a:avLst>
-              <a:gd name="adj" fmla="val 6000"/>
-            </a:avLst>
-          </a:prstGeom>
-          <a:solidFill>
-            <a:srgbClr val="EAF3FF"/>
-          </a:solidFill>
-          <a:ln>
-            <a:noFill/>
-          </a:ln>
-          <a:effectLst/>
-        </p:spPr>
-        <p:style>
-          <a:lnRef idx="1">
-            <a:schemeClr val="accent1"/>
-          </a:lnRef>
-          <a:fillRef idx="3">
-            <a:schemeClr val="accent1"/>
-          </a:fillRef>
-          <a:effectRef idx="2">
-            <a:schemeClr val="accent1"/>
-          </a:effectRef>
-          <a:fontRef idx="minor">
-            <a:schemeClr val="lt1"/>
-          </a:fontRef>
-        </p:style>
-        <p:txBody>
-          <a:bodyPr rtlCol="0" anchor="ctr"/>
-          <a:lstStyle/>
-          <a:p/>
-        </p:txBody>
-      </p:sp>
-      <p:sp>
-        <p:nvSpPr>
-          <p:cNvPr id="19" name="Oval 18"/>
-          <p:cNvSpPr/>
-          <p:nvPr/>
-        </p:nvSpPr>
-        <p:spPr>
-          <a:xfrm>
-            <a:off x="777240" y="4251960"/>
-            <a:ext cx="457200" cy="457200"/>
-          </a:xfrm>
-          <a:prstGeom prst="ellipse">
-            <a:avLst/>
-          </a:prstGeom>
-          <a:solidFill>
-            <a:srgbClr val="F2B705"/>
-          </a:solidFill>
-          <a:ln>
-            <a:noFill/>
-          </a:ln>
-          <a:effectLst/>
-        </p:spPr>
-        <p:style>
-          <a:lnRef idx="1">
-            <a:schemeClr val="accent1"/>
-          </a:lnRef>
-          <a:fillRef idx="3">
-            <a:schemeClr val="accent1"/>
-          </a:fillRef>
-          <a:effectRef idx="2">
-            <a:schemeClr val="accent1"/>
-          </a:effectRef>
-          <a:fontRef idx="minor">
-            <a:schemeClr val="lt1"/>
-          </a:fontRef>
-        </p:style>
-        <p:txBody>
-          <a:bodyPr rtlCol="0" anchor="ctr" lIns="0" rIns="0" tIns="0" bIns="0"/>
-          <a:lstStyle/>
-          <a:p>
-            <a:pPr algn="ctr"/>
-            <a:r>
-              <a:rPr sz="1500" b="1">
-                <a:solidFill>
-                  <a:srgbClr val="202122"/>
-                </a:solidFill>
-                <a:latin typeface="Calibri"/>
-              </a:rPr>
-              <a:t>4</a:t>
-            </a:r>
-          </a:p>
-        </p:txBody>
-      </p:sp>
-      <p:sp>
-        <p:nvSpPr>
-          <p:cNvPr id="20" name="TextBox 19"/>
-          <p:cNvSpPr txBox="1"/>
-          <p:nvPr/>
-        </p:nvSpPr>
-        <p:spPr>
-          <a:xfrm>
-            <a:off x="1371600" y="4224528"/>
-            <a:ext cx="2509418" cy="512064"/>
-          </a:xfrm>
-          <a:prstGeom prst="rect">
-            <a:avLst/>
-          </a:prstGeom>
-          <a:noFill/>
-        </p:spPr>
-        <p:txBody>
-          <a:bodyPr wrap="square" anchor="ctr" lIns="0" rIns="0" tIns="0" bIns="0"/>
-          <a:lstStyle/>
-          <a:p>
-            <a:pPr algn="l"/>
-            <a:r>
-              <a:rPr sz="1900" b="1" i="0">
-                <a:solidFill>
-                  <a:srgbClr val="03306E"/>
-                </a:solidFill>
-                <a:latin typeface="Calibri"/>
-              </a:rPr>
-              <a:t>CAD models</a:t>
-            </a:r>
-          </a:p>
-        </p:txBody>
-      </p:sp>
-      <p:sp>
-        <p:nvSpPr>
-          <p:cNvPr id="21" name="TextBox 20"/>
-          <p:cNvSpPr txBox="1"/>
-          <p:nvPr/>
-        </p:nvSpPr>
-        <p:spPr>
-          <a:xfrm>
-            <a:off x="777240" y="4892040"/>
-            <a:ext cx="3058058" cy="1143000"/>
-          </a:xfrm>
-          <a:prstGeom prst="rect">
-            <a:avLst/>
-          </a:prstGeom>
-          <a:noFill/>
-        </p:spPr>
-        <p:txBody>
-          <a:bodyPr wrap="square" anchor="t" lIns="0" rIns="0" tIns="0" bIns="0"/>
-          <a:lstStyle/>
-          <a:p>
-            <a:pPr algn="l"/>
-            <a:r>
-              <a:rPr sz="2000" b="0" i="0">
-                <a:solidFill>
-                  <a:srgbClr val="202122"/>
-                </a:solidFill>
-                <a:latin typeface="Calibri"/>
-              </a:rPr>
-              <a:t>Accurate 3D models that can be simulated.</a:t>
-            </a:r>
-          </a:p>
-        </p:txBody>
-      </p:sp>
-      <p:sp>
-        <p:nvSpPr>
-          <p:cNvPr id="22" name="Rounded Rectangle 21"/>
-          <p:cNvSpPr/>
-          <p:nvPr/>
-        </p:nvSpPr>
-        <p:spPr>
-          <a:xfrm>
-            <a:off x="4338218" y="4023360"/>
-            <a:ext cx="3515258" cy="2148840"/>
-          </a:xfrm>
-          <a:prstGeom prst="roundRect">
-            <a:avLst>
-              <a:gd name="adj" fmla="val 6000"/>
-            </a:avLst>
-          </a:prstGeom>
-          <a:solidFill>
-            <a:srgbClr val="EAF3FF"/>
-          </a:solidFill>
-          <a:ln>
-            <a:noFill/>
-          </a:ln>
-          <a:effectLst/>
-        </p:spPr>
-        <p:style>
-          <a:lnRef idx="1">
-            <a:schemeClr val="accent1"/>
-          </a:lnRef>
-          <a:fillRef idx="3">
-            <a:schemeClr val="accent1"/>
-          </a:fillRef>
-          <a:effectRef idx="2">
-            <a:schemeClr val="accent1"/>
-          </a:effectRef>
-          <a:fontRef idx="minor">
-            <a:schemeClr val="lt1"/>
-          </a:fontRef>
-        </p:style>
-        <p:txBody>
-          <a:bodyPr rtlCol="0" anchor="ctr"/>
-          <a:lstStyle/>
-          <a:p/>
-        </p:txBody>
-      </p:sp>
-      <p:sp>
-        <p:nvSpPr>
-          <p:cNvPr id="23" name="Oval 22"/>
-          <p:cNvSpPr/>
-          <p:nvPr/>
-        </p:nvSpPr>
-        <p:spPr>
-          <a:xfrm>
-            <a:off x="4566818" y="4251960"/>
-            <a:ext cx="457200" cy="457200"/>
-          </a:xfrm>
-          <a:prstGeom prst="ellipse">
-            <a:avLst/>
-          </a:prstGeom>
-          <a:solidFill>
-            <a:srgbClr val="F2B705"/>
-          </a:solidFill>
-          <a:ln>
-            <a:noFill/>
-          </a:ln>
-          <a:effectLst/>
-        </p:spPr>
-        <p:style>
-          <a:lnRef idx="1">
-            <a:schemeClr val="accent1"/>
-          </a:lnRef>
-          <a:fillRef idx="3">
-            <a:schemeClr val="accent1"/>
-          </a:fillRef>
-          <a:effectRef idx="2">
-            <a:schemeClr val="accent1"/>
-          </a:effectRef>
-          <a:fontRef idx="minor">
-            <a:schemeClr val="lt1"/>
-          </a:fontRef>
-        </p:style>
-        <p:txBody>
-          <a:bodyPr rtlCol="0" anchor="ctr" lIns="0" rIns="0" tIns="0" bIns="0"/>
-          <a:lstStyle/>
-          <a:p>
-            <a:pPr algn="ctr"/>
-            <a:r>
-              <a:rPr sz="1500" b="1">
-                <a:solidFill>
-                  <a:srgbClr val="202122"/>
-                </a:solidFill>
-                <a:latin typeface="Calibri"/>
-              </a:rPr>
-              <a:t>5</a:t>
-            </a:r>
-          </a:p>
-        </p:txBody>
-      </p:sp>
-      <p:sp>
-        <p:nvSpPr>
-          <p:cNvPr id="24" name="TextBox 23"/>
-          <p:cNvSpPr txBox="1"/>
-          <p:nvPr/>
-        </p:nvSpPr>
-        <p:spPr>
-          <a:xfrm>
-            <a:off x="5161178" y="4224528"/>
-            <a:ext cx="2509418" cy="512064"/>
-          </a:xfrm>
-          <a:prstGeom prst="rect">
-            <a:avLst/>
-          </a:prstGeom>
-          <a:noFill/>
-        </p:spPr>
-        <p:txBody>
-          <a:bodyPr wrap="square" anchor="ctr" lIns="0" rIns="0" tIns="0" bIns="0"/>
-          <a:lstStyle/>
-          <a:p>
-            <a:pPr algn="l"/>
-            <a:r>
-              <a:rPr sz="1900" b="1" i="0">
-                <a:solidFill>
-                  <a:srgbClr val="03306E"/>
-                </a:solidFill>
-                <a:latin typeface="Calibri"/>
-              </a:rPr>
-              <a:t>Diagrams</a:t>
-            </a:r>
-          </a:p>
-        </p:txBody>
-      </p:sp>
-      <p:sp>
-        <p:nvSpPr>
-          <p:cNvPr id="25" name="TextBox 24"/>
-          <p:cNvSpPr txBox="1"/>
-          <p:nvPr/>
-        </p:nvSpPr>
-        <p:spPr>
-          <a:xfrm>
-            <a:off x="4566818" y="4892040"/>
-            <a:ext cx="3058058" cy="1143000"/>
-          </a:xfrm>
-          <a:prstGeom prst="rect">
-            <a:avLst/>
-          </a:prstGeom>
-          <a:noFill/>
-        </p:spPr>
-        <p:txBody>
-          <a:bodyPr wrap="square" anchor="t" lIns="0" rIns="0" tIns="0" bIns="0"/>
-          <a:lstStyle/>
-          <a:p>
-            <a:pPr algn="l"/>
-            <a:r>
-              <a:rPr sz="2000" b="0" i="0">
-                <a:solidFill>
-                  <a:srgbClr val="202122"/>
-                </a:solidFill>
-                <a:latin typeface="Calibri"/>
-              </a:rPr>
-              <a:t>Block diagrams, flowcharts, circuit diagrams and schematics.</a:t>
+              <a:rPr sz="1900" b="0" i="0">
+                <a:solidFill>
+                  <a:srgbClr val="FFFFFF"/>
+                </a:solidFill>
+                <a:latin typeface="Cambria"/>
+              </a:rPr>
+              <a:t>A customer sees an isometric rendering; the machinist works from an orthographic drawing; the assembly team uses an exploded view.</a:t>
             </a:r>
           </a:p>
         </p:txBody>
@@ -6269,7 +9595,7 @@
                 </a:solidFill>
                 <a:latin typeface="Cambria"/>
               </a:rPr>
-              <a:t>Common abbreviations</a:t>
+              <a:t>Drawing types</a:t>
             </a:r>
           </a:p>
         </p:txBody>
@@ -6336,6 +9662,1428 @@
                 <a:latin typeface="Calibri"/>
               </a:rPr>
               <a:t>4</a:t>
+            </a:r>
+          </a:p>
+        </p:txBody>
+      </p:sp>
+      <p:sp>
+        <p:nvSpPr>
+          <p:cNvPr id="6" name="Rounded Rectangle 5"/>
+          <p:cNvSpPr/>
+          <p:nvPr/>
+        </p:nvSpPr>
+        <p:spPr>
+          <a:xfrm>
+            <a:off x="548640" y="1600200"/>
+            <a:ext cx="3515258" cy="2148840"/>
+          </a:xfrm>
+          <a:prstGeom prst="roundRect">
+            <a:avLst>
+              <a:gd name="adj" fmla="val 6000"/>
+            </a:avLst>
+          </a:prstGeom>
+          <a:solidFill>
+            <a:srgbClr val="EAF3FF"/>
+          </a:solidFill>
+          <a:ln>
+            <a:noFill/>
+          </a:ln>
+          <a:effectLst/>
+        </p:spPr>
+        <p:style>
+          <a:lnRef idx="1">
+            <a:schemeClr val="accent1"/>
+          </a:lnRef>
+          <a:fillRef idx="3">
+            <a:schemeClr val="accent1"/>
+          </a:fillRef>
+          <a:effectRef idx="2">
+            <a:schemeClr val="accent1"/>
+          </a:effectRef>
+          <a:fontRef idx="minor">
+            <a:schemeClr val="lt1"/>
+          </a:fontRef>
+        </p:style>
+        <p:txBody>
+          <a:bodyPr rtlCol="0" anchor="ctr"/>
+          <a:lstStyle/>
+          <a:p/>
+        </p:txBody>
+      </p:sp>
+      <p:sp>
+        <p:nvSpPr>
+          <p:cNvPr id="7" name="Oval 6"/>
+          <p:cNvSpPr/>
+          <p:nvPr/>
+        </p:nvSpPr>
+        <p:spPr>
+          <a:xfrm>
+            <a:off x="777240" y="1828800"/>
+            <a:ext cx="457200" cy="457200"/>
+          </a:xfrm>
+          <a:prstGeom prst="ellipse">
+            <a:avLst/>
+          </a:prstGeom>
+          <a:solidFill>
+            <a:srgbClr val="F2B705"/>
+          </a:solidFill>
+          <a:ln>
+            <a:noFill/>
+          </a:ln>
+          <a:effectLst/>
+        </p:spPr>
+        <p:style>
+          <a:lnRef idx="1">
+            <a:schemeClr val="accent1"/>
+          </a:lnRef>
+          <a:fillRef idx="3">
+            <a:schemeClr val="accent1"/>
+          </a:fillRef>
+          <a:effectRef idx="2">
+            <a:schemeClr val="accent1"/>
+          </a:effectRef>
+          <a:fontRef idx="minor">
+            <a:schemeClr val="lt1"/>
+          </a:fontRef>
+        </p:style>
+        <p:txBody>
+          <a:bodyPr rtlCol="0" anchor="ctr" lIns="0" rIns="0" tIns="0" bIns="0"/>
+          <a:lstStyle/>
+          <a:p>
+            <a:pPr algn="ctr"/>
+            <a:r>
+              <a:rPr sz="1500" b="1">
+                <a:solidFill>
+                  <a:srgbClr val="202122"/>
+                </a:solidFill>
+                <a:latin typeface="Calibri"/>
+              </a:rPr>
+              <a:t>1</a:t>
+            </a:r>
+          </a:p>
+        </p:txBody>
+      </p:sp>
+      <p:sp>
+        <p:nvSpPr>
+          <p:cNvPr id="8" name="TextBox 7"/>
+          <p:cNvSpPr txBox="1"/>
+          <p:nvPr/>
+        </p:nvSpPr>
+        <p:spPr>
+          <a:xfrm>
+            <a:off x="1371600" y="1801368"/>
+            <a:ext cx="2509418" cy="512064"/>
+          </a:xfrm>
+          <a:prstGeom prst="rect">
+            <a:avLst/>
+          </a:prstGeom>
+          <a:noFill/>
+        </p:spPr>
+        <p:txBody>
+          <a:bodyPr wrap="square" anchor="ctr" lIns="0" rIns="0" tIns="0" bIns="0"/>
+          <a:lstStyle/>
+          <a:p>
+            <a:pPr algn="l"/>
+            <a:r>
+              <a:rPr sz="1600" b="1" i="0">
+                <a:solidFill>
+                  <a:srgbClr val="03306E"/>
+                </a:solidFill>
+                <a:latin typeface="Calibri"/>
+              </a:rPr>
+              <a:t>Sketches and isometric</a:t>
+            </a:r>
+          </a:p>
+        </p:txBody>
+      </p:sp>
+      <p:sp>
+        <p:nvSpPr>
+          <p:cNvPr id="9" name="TextBox 8"/>
+          <p:cNvSpPr txBox="1"/>
+          <p:nvPr/>
+        </p:nvSpPr>
+        <p:spPr>
+          <a:xfrm>
+            <a:off x="777240" y="2468880"/>
+            <a:ext cx="3058058" cy="1143000"/>
+          </a:xfrm>
+          <a:prstGeom prst="rect">
+            <a:avLst/>
+          </a:prstGeom>
+          <a:noFill/>
+        </p:spPr>
+        <p:txBody>
+          <a:bodyPr wrap="square" anchor="t" lIns="0" rIns="0" tIns="0" bIns="0"/>
+          <a:lstStyle/>
+          <a:p>
+            <a:pPr algn="l"/>
+            <a:r>
+              <a:rPr sz="2000" b="0" i="0">
+                <a:solidFill>
+                  <a:srgbClr val="202122"/>
+                </a:solidFill>
+                <a:latin typeface="Calibri"/>
+              </a:rPr>
+              <a:t>Quick ideas and 3D views for discussion.</a:t>
+            </a:r>
+          </a:p>
+        </p:txBody>
+      </p:sp>
+      <p:sp>
+        <p:nvSpPr>
+          <p:cNvPr id="10" name="Rounded Rectangle 9"/>
+          <p:cNvSpPr/>
+          <p:nvPr/>
+        </p:nvSpPr>
+        <p:spPr>
+          <a:xfrm>
+            <a:off x="4338218" y="1600200"/>
+            <a:ext cx="3515258" cy="2148840"/>
+          </a:xfrm>
+          <a:prstGeom prst="roundRect">
+            <a:avLst>
+              <a:gd name="adj" fmla="val 6000"/>
+            </a:avLst>
+          </a:prstGeom>
+          <a:solidFill>
+            <a:srgbClr val="EAF3FF"/>
+          </a:solidFill>
+          <a:ln>
+            <a:noFill/>
+          </a:ln>
+          <a:effectLst/>
+        </p:spPr>
+        <p:style>
+          <a:lnRef idx="1">
+            <a:schemeClr val="accent1"/>
+          </a:lnRef>
+          <a:fillRef idx="3">
+            <a:schemeClr val="accent1"/>
+          </a:fillRef>
+          <a:effectRef idx="2">
+            <a:schemeClr val="accent1"/>
+          </a:effectRef>
+          <a:fontRef idx="minor">
+            <a:schemeClr val="lt1"/>
+          </a:fontRef>
+        </p:style>
+        <p:txBody>
+          <a:bodyPr rtlCol="0" anchor="ctr"/>
+          <a:lstStyle/>
+          <a:p/>
+        </p:txBody>
+      </p:sp>
+      <p:sp>
+        <p:nvSpPr>
+          <p:cNvPr id="11" name="Oval 10"/>
+          <p:cNvSpPr/>
+          <p:nvPr/>
+        </p:nvSpPr>
+        <p:spPr>
+          <a:xfrm>
+            <a:off x="4566818" y="1828800"/>
+            <a:ext cx="457200" cy="457200"/>
+          </a:xfrm>
+          <a:prstGeom prst="ellipse">
+            <a:avLst/>
+          </a:prstGeom>
+          <a:solidFill>
+            <a:srgbClr val="F2B705"/>
+          </a:solidFill>
+          <a:ln>
+            <a:noFill/>
+          </a:ln>
+          <a:effectLst/>
+        </p:spPr>
+        <p:style>
+          <a:lnRef idx="1">
+            <a:schemeClr val="accent1"/>
+          </a:lnRef>
+          <a:fillRef idx="3">
+            <a:schemeClr val="accent1"/>
+          </a:fillRef>
+          <a:effectRef idx="2">
+            <a:schemeClr val="accent1"/>
+          </a:effectRef>
+          <a:fontRef idx="minor">
+            <a:schemeClr val="lt1"/>
+          </a:fontRef>
+        </p:style>
+        <p:txBody>
+          <a:bodyPr rtlCol="0" anchor="ctr" lIns="0" rIns="0" tIns="0" bIns="0"/>
+          <a:lstStyle/>
+          <a:p>
+            <a:pPr algn="ctr"/>
+            <a:r>
+              <a:rPr sz="1500" b="1">
+                <a:solidFill>
+                  <a:srgbClr val="202122"/>
+                </a:solidFill>
+                <a:latin typeface="Calibri"/>
+              </a:rPr>
+              <a:t>2</a:t>
+            </a:r>
+          </a:p>
+        </p:txBody>
+      </p:sp>
+      <p:sp>
+        <p:nvSpPr>
+          <p:cNvPr id="12" name="TextBox 11"/>
+          <p:cNvSpPr txBox="1"/>
+          <p:nvPr/>
+        </p:nvSpPr>
+        <p:spPr>
+          <a:xfrm>
+            <a:off x="5161178" y="1801368"/>
+            <a:ext cx="2509418" cy="512064"/>
+          </a:xfrm>
+          <a:prstGeom prst="rect">
+            <a:avLst/>
+          </a:prstGeom>
+          <a:noFill/>
+        </p:spPr>
+        <p:txBody>
+          <a:bodyPr wrap="square" anchor="ctr" lIns="0" rIns="0" tIns="0" bIns="0"/>
+          <a:lstStyle/>
+          <a:p>
+            <a:pPr algn="l"/>
+            <a:r>
+              <a:rPr sz="1600" b="1" i="0">
+                <a:solidFill>
+                  <a:srgbClr val="03306E"/>
+                </a:solidFill>
+                <a:latin typeface="Calibri"/>
+              </a:rPr>
+              <a:t>Orthographic projection</a:t>
+            </a:r>
+          </a:p>
+        </p:txBody>
+      </p:sp>
+      <p:sp>
+        <p:nvSpPr>
+          <p:cNvPr id="13" name="TextBox 12"/>
+          <p:cNvSpPr txBox="1"/>
+          <p:nvPr/>
+        </p:nvSpPr>
+        <p:spPr>
+          <a:xfrm>
+            <a:off x="4566818" y="2468880"/>
+            <a:ext cx="3058058" cy="1143000"/>
+          </a:xfrm>
+          <a:prstGeom prst="rect">
+            <a:avLst/>
+          </a:prstGeom>
+          <a:noFill/>
+        </p:spPr>
+        <p:txBody>
+          <a:bodyPr wrap="square" anchor="t" lIns="0" rIns="0" tIns="0" bIns="0"/>
+          <a:lstStyle/>
+          <a:p>
+            <a:pPr algn="l"/>
+            <a:r>
+              <a:rPr sz="2000" b="0" i="0">
+                <a:solidFill>
+                  <a:srgbClr val="202122"/>
+                </a:solidFill>
+                <a:latin typeface="Calibri"/>
+              </a:rPr>
+              <a:t>Accurate 2D views for manufacture.</a:t>
+            </a:r>
+          </a:p>
+        </p:txBody>
+      </p:sp>
+      <p:sp>
+        <p:nvSpPr>
+          <p:cNvPr id="14" name="Rounded Rectangle 13"/>
+          <p:cNvSpPr/>
+          <p:nvPr/>
+        </p:nvSpPr>
+        <p:spPr>
+          <a:xfrm>
+            <a:off x="8127796" y="1600200"/>
+            <a:ext cx="3515258" cy="2148840"/>
+          </a:xfrm>
+          <a:prstGeom prst="roundRect">
+            <a:avLst>
+              <a:gd name="adj" fmla="val 6000"/>
+            </a:avLst>
+          </a:prstGeom>
+          <a:solidFill>
+            <a:srgbClr val="EAF3FF"/>
+          </a:solidFill>
+          <a:ln>
+            <a:noFill/>
+          </a:ln>
+          <a:effectLst/>
+        </p:spPr>
+        <p:style>
+          <a:lnRef idx="1">
+            <a:schemeClr val="accent1"/>
+          </a:lnRef>
+          <a:fillRef idx="3">
+            <a:schemeClr val="accent1"/>
+          </a:fillRef>
+          <a:effectRef idx="2">
+            <a:schemeClr val="accent1"/>
+          </a:effectRef>
+          <a:fontRef idx="minor">
+            <a:schemeClr val="lt1"/>
+          </a:fontRef>
+        </p:style>
+        <p:txBody>
+          <a:bodyPr rtlCol="0" anchor="ctr"/>
+          <a:lstStyle/>
+          <a:p/>
+        </p:txBody>
+      </p:sp>
+      <p:sp>
+        <p:nvSpPr>
+          <p:cNvPr id="15" name="Oval 14"/>
+          <p:cNvSpPr/>
+          <p:nvPr/>
+        </p:nvSpPr>
+        <p:spPr>
+          <a:xfrm>
+            <a:off x="8356396" y="1828800"/>
+            <a:ext cx="457200" cy="457200"/>
+          </a:xfrm>
+          <a:prstGeom prst="ellipse">
+            <a:avLst/>
+          </a:prstGeom>
+          <a:solidFill>
+            <a:srgbClr val="F2B705"/>
+          </a:solidFill>
+          <a:ln>
+            <a:noFill/>
+          </a:ln>
+          <a:effectLst/>
+        </p:spPr>
+        <p:style>
+          <a:lnRef idx="1">
+            <a:schemeClr val="accent1"/>
+          </a:lnRef>
+          <a:fillRef idx="3">
+            <a:schemeClr val="accent1"/>
+          </a:fillRef>
+          <a:effectRef idx="2">
+            <a:schemeClr val="accent1"/>
+          </a:effectRef>
+          <a:fontRef idx="minor">
+            <a:schemeClr val="lt1"/>
+          </a:fontRef>
+        </p:style>
+        <p:txBody>
+          <a:bodyPr rtlCol="0" anchor="ctr" lIns="0" rIns="0" tIns="0" bIns="0"/>
+          <a:lstStyle/>
+          <a:p>
+            <a:pPr algn="ctr"/>
+            <a:r>
+              <a:rPr sz="1500" b="1">
+                <a:solidFill>
+                  <a:srgbClr val="202122"/>
+                </a:solidFill>
+                <a:latin typeface="Calibri"/>
+              </a:rPr>
+              <a:t>3</a:t>
+            </a:r>
+          </a:p>
+        </p:txBody>
+      </p:sp>
+      <p:sp>
+        <p:nvSpPr>
+          <p:cNvPr id="16" name="TextBox 15"/>
+          <p:cNvSpPr txBox="1"/>
+          <p:nvPr/>
+        </p:nvSpPr>
+        <p:spPr>
+          <a:xfrm>
+            <a:off x="8950756" y="1801368"/>
+            <a:ext cx="2509418" cy="512064"/>
+          </a:xfrm>
+          <a:prstGeom prst="rect">
+            <a:avLst/>
+          </a:prstGeom>
+          <a:noFill/>
+        </p:spPr>
+        <p:txBody>
+          <a:bodyPr wrap="square" anchor="ctr" lIns="0" rIns="0" tIns="0" bIns="0"/>
+          <a:lstStyle/>
+          <a:p>
+            <a:pPr algn="l"/>
+            <a:r>
+              <a:rPr sz="1900" b="1" i="0">
+                <a:solidFill>
+                  <a:srgbClr val="03306E"/>
+                </a:solidFill>
+                <a:latin typeface="Calibri"/>
+              </a:rPr>
+              <a:t>Exploded views</a:t>
+            </a:r>
+          </a:p>
+        </p:txBody>
+      </p:sp>
+      <p:sp>
+        <p:nvSpPr>
+          <p:cNvPr id="17" name="TextBox 16"/>
+          <p:cNvSpPr txBox="1"/>
+          <p:nvPr/>
+        </p:nvSpPr>
+        <p:spPr>
+          <a:xfrm>
+            <a:off x="8356396" y="2468880"/>
+            <a:ext cx="3058058" cy="1143000"/>
+          </a:xfrm>
+          <a:prstGeom prst="rect">
+            <a:avLst/>
+          </a:prstGeom>
+          <a:noFill/>
+        </p:spPr>
+        <p:txBody>
+          <a:bodyPr wrap="square" anchor="t" lIns="0" rIns="0" tIns="0" bIns="0"/>
+          <a:lstStyle/>
+          <a:p>
+            <a:pPr algn="l"/>
+            <a:r>
+              <a:rPr sz="2000" b="0" i="0">
+                <a:solidFill>
+                  <a:srgbClr val="202122"/>
+                </a:solidFill>
+                <a:latin typeface="Calibri"/>
+              </a:rPr>
+              <a:t>Show how parts assemble.</a:t>
+            </a:r>
+          </a:p>
+        </p:txBody>
+      </p:sp>
+      <p:sp>
+        <p:nvSpPr>
+          <p:cNvPr id="18" name="Rounded Rectangle 17"/>
+          <p:cNvSpPr/>
+          <p:nvPr/>
+        </p:nvSpPr>
+        <p:spPr>
+          <a:xfrm>
+            <a:off x="548640" y="4023360"/>
+            <a:ext cx="3515258" cy="2148840"/>
+          </a:xfrm>
+          <a:prstGeom prst="roundRect">
+            <a:avLst>
+              <a:gd name="adj" fmla="val 6000"/>
+            </a:avLst>
+          </a:prstGeom>
+          <a:solidFill>
+            <a:srgbClr val="EAF3FF"/>
+          </a:solidFill>
+          <a:ln>
+            <a:noFill/>
+          </a:ln>
+          <a:effectLst/>
+        </p:spPr>
+        <p:style>
+          <a:lnRef idx="1">
+            <a:schemeClr val="accent1"/>
+          </a:lnRef>
+          <a:fillRef idx="3">
+            <a:schemeClr val="accent1"/>
+          </a:fillRef>
+          <a:effectRef idx="2">
+            <a:schemeClr val="accent1"/>
+          </a:effectRef>
+          <a:fontRef idx="minor">
+            <a:schemeClr val="lt1"/>
+          </a:fontRef>
+        </p:style>
+        <p:txBody>
+          <a:bodyPr rtlCol="0" anchor="ctr"/>
+          <a:lstStyle/>
+          <a:p/>
+        </p:txBody>
+      </p:sp>
+      <p:sp>
+        <p:nvSpPr>
+          <p:cNvPr id="19" name="Oval 18"/>
+          <p:cNvSpPr/>
+          <p:nvPr/>
+        </p:nvSpPr>
+        <p:spPr>
+          <a:xfrm>
+            <a:off x="777240" y="4251960"/>
+            <a:ext cx="457200" cy="457200"/>
+          </a:xfrm>
+          <a:prstGeom prst="ellipse">
+            <a:avLst/>
+          </a:prstGeom>
+          <a:solidFill>
+            <a:srgbClr val="F2B705"/>
+          </a:solidFill>
+          <a:ln>
+            <a:noFill/>
+          </a:ln>
+          <a:effectLst/>
+        </p:spPr>
+        <p:style>
+          <a:lnRef idx="1">
+            <a:schemeClr val="accent1"/>
+          </a:lnRef>
+          <a:fillRef idx="3">
+            <a:schemeClr val="accent1"/>
+          </a:fillRef>
+          <a:effectRef idx="2">
+            <a:schemeClr val="accent1"/>
+          </a:effectRef>
+          <a:fontRef idx="minor">
+            <a:schemeClr val="lt1"/>
+          </a:fontRef>
+        </p:style>
+        <p:txBody>
+          <a:bodyPr rtlCol="0" anchor="ctr" lIns="0" rIns="0" tIns="0" bIns="0"/>
+          <a:lstStyle/>
+          <a:p>
+            <a:pPr algn="ctr"/>
+            <a:r>
+              <a:rPr sz="1500" b="1">
+                <a:solidFill>
+                  <a:srgbClr val="202122"/>
+                </a:solidFill>
+                <a:latin typeface="Calibri"/>
+              </a:rPr>
+              <a:t>4</a:t>
+            </a:r>
+          </a:p>
+        </p:txBody>
+      </p:sp>
+      <p:sp>
+        <p:nvSpPr>
+          <p:cNvPr id="20" name="TextBox 19"/>
+          <p:cNvSpPr txBox="1"/>
+          <p:nvPr/>
+        </p:nvSpPr>
+        <p:spPr>
+          <a:xfrm>
+            <a:off x="1371600" y="4224528"/>
+            <a:ext cx="2509418" cy="512064"/>
+          </a:xfrm>
+          <a:prstGeom prst="rect">
+            <a:avLst/>
+          </a:prstGeom>
+          <a:noFill/>
+        </p:spPr>
+        <p:txBody>
+          <a:bodyPr wrap="square" anchor="ctr" lIns="0" rIns="0" tIns="0" bIns="0"/>
+          <a:lstStyle/>
+          <a:p>
+            <a:pPr algn="l"/>
+            <a:r>
+              <a:rPr sz="1900" b="1" i="0">
+                <a:solidFill>
+                  <a:srgbClr val="03306E"/>
+                </a:solidFill>
+                <a:latin typeface="Calibri"/>
+              </a:rPr>
+              <a:t>CAD models</a:t>
+            </a:r>
+          </a:p>
+        </p:txBody>
+      </p:sp>
+      <p:sp>
+        <p:nvSpPr>
+          <p:cNvPr id="21" name="TextBox 20"/>
+          <p:cNvSpPr txBox="1"/>
+          <p:nvPr/>
+        </p:nvSpPr>
+        <p:spPr>
+          <a:xfrm>
+            <a:off x="777240" y="4892040"/>
+            <a:ext cx="3058058" cy="1143000"/>
+          </a:xfrm>
+          <a:prstGeom prst="rect">
+            <a:avLst/>
+          </a:prstGeom>
+          <a:noFill/>
+        </p:spPr>
+        <p:txBody>
+          <a:bodyPr wrap="square" anchor="t" lIns="0" rIns="0" tIns="0" bIns="0"/>
+          <a:lstStyle/>
+          <a:p>
+            <a:pPr algn="l"/>
+            <a:r>
+              <a:rPr sz="2000" b="0" i="0">
+                <a:solidFill>
+                  <a:srgbClr val="202122"/>
+                </a:solidFill>
+                <a:latin typeface="Calibri"/>
+              </a:rPr>
+              <a:t>Accurate 3D models that can be simulated.</a:t>
+            </a:r>
+          </a:p>
+        </p:txBody>
+      </p:sp>
+      <p:sp>
+        <p:nvSpPr>
+          <p:cNvPr id="22" name="Rounded Rectangle 21"/>
+          <p:cNvSpPr/>
+          <p:nvPr/>
+        </p:nvSpPr>
+        <p:spPr>
+          <a:xfrm>
+            <a:off x="4338218" y="4023360"/>
+            <a:ext cx="3515258" cy="2148840"/>
+          </a:xfrm>
+          <a:prstGeom prst="roundRect">
+            <a:avLst>
+              <a:gd name="adj" fmla="val 6000"/>
+            </a:avLst>
+          </a:prstGeom>
+          <a:solidFill>
+            <a:srgbClr val="EAF3FF"/>
+          </a:solidFill>
+          <a:ln>
+            <a:noFill/>
+          </a:ln>
+          <a:effectLst/>
+        </p:spPr>
+        <p:style>
+          <a:lnRef idx="1">
+            <a:schemeClr val="accent1"/>
+          </a:lnRef>
+          <a:fillRef idx="3">
+            <a:schemeClr val="accent1"/>
+          </a:fillRef>
+          <a:effectRef idx="2">
+            <a:schemeClr val="accent1"/>
+          </a:effectRef>
+          <a:fontRef idx="minor">
+            <a:schemeClr val="lt1"/>
+          </a:fontRef>
+        </p:style>
+        <p:txBody>
+          <a:bodyPr rtlCol="0" anchor="ctr"/>
+          <a:lstStyle/>
+          <a:p/>
+        </p:txBody>
+      </p:sp>
+      <p:sp>
+        <p:nvSpPr>
+          <p:cNvPr id="23" name="Oval 22"/>
+          <p:cNvSpPr/>
+          <p:nvPr/>
+        </p:nvSpPr>
+        <p:spPr>
+          <a:xfrm>
+            <a:off x="4566818" y="4251960"/>
+            <a:ext cx="457200" cy="457200"/>
+          </a:xfrm>
+          <a:prstGeom prst="ellipse">
+            <a:avLst/>
+          </a:prstGeom>
+          <a:solidFill>
+            <a:srgbClr val="F2B705"/>
+          </a:solidFill>
+          <a:ln>
+            <a:noFill/>
+          </a:ln>
+          <a:effectLst/>
+        </p:spPr>
+        <p:style>
+          <a:lnRef idx="1">
+            <a:schemeClr val="accent1"/>
+          </a:lnRef>
+          <a:fillRef idx="3">
+            <a:schemeClr val="accent1"/>
+          </a:fillRef>
+          <a:effectRef idx="2">
+            <a:schemeClr val="accent1"/>
+          </a:effectRef>
+          <a:fontRef idx="minor">
+            <a:schemeClr val="lt1"/>
+          </a:fontRef>
+        </p:style>
+        <p:txBody>
+          <a:bodyPr rtlCol="0" anchor="ctr" lIns="0" rIns="0" tIns="0" bIns="0"/>
+          <a:lstStyle/>
+          <a:p>
+            <a:pPr algn="ctr"/>
+            <a:r>
+              <a:rPr sz="1500" b="1">
+                <a:solidFill>
+                  <a:srgbClr val="202122"/>
+                </a:solidFill>
+                <a:latin typeface="Calibri"/>
+              </a:rPr>
+              <a:t>5</a:t>
+            </a:r>
+          </a:p>
+        </p:txBody>
+      </p:sp>
+      <p:sp>
+        <p:nvSpPr>
+          <p:cNvPr id="24" name="TextBox 23"/>
+          <p:cNvSpPr txBox="1"/>
+          <p:nvPr/>
+        </p:nvSpPr>
+        <p:spPr>
+          <a:xfrm>
+            <a:off x="5161178" y="4224528"/>
+            <a:ext cx="2509418" cy="512064"/>
+          </a:xfrm>
+          <a:prstGeom prst="rect">
+            <a:avLst/>
+          </a:prstGeom>
+          <a:noFill/>
+        </p:spPr>
+        <p:txBody>
+          <a:bodyPr wrap="square" anchor="ctr" lIns="0" rIns="0" tIns="0" bIns="0"/>
+          <a:lstStyle/>
+          <a:p>
+            <a:pPr algn="l"/>
+            <a:r>
+              <a:rPr sz="1900" b="1" i="0">
+                <a:solidFill>
+                  <a:srgbClr val="03306E"/>
+                </a:solidFill>
+                <a:latin typeface="Calibri"/>
+              </a:rPr>
+              <a:t>Diagrams</a:t>
+            </a:r>
+          </a:p>
+        </p:txBody>
+      </p:sp>
+      <p:sp>
+        <p:nvSpPr>
+          <p:cNvPr id="25" name="TextBox 24"/>
+          <p:cNvSpPr txBox="1"/>
+          <p:nvPr/>
+        </p:nvSpPr>
+        <p:spPr>
+          <a:xfrm>
+            <a:off x="4566818" y="4892040"/>
+            <a:ext cx="3058058" cy="1143000"/>
+          </a:xfrm>
+          <a:prstGeom prst="rect">
+            <a:avLst/>
+          </a:prstGeom>
+          <a:noFill/>
+        </p:spPr>
+        <p:txBody>
+          <a:bodyPr wrap="square" anchor="t" lIns="0" rIns="0" tIns="0" bIns="0"/>
+          <a:lstStyle/>
+          <a:p>
+            <a:pPr algn="l"/>
+            <a:r>
+              <a:rPr sz="2000" b="0" i="0">
+                <a:solidFill>
+                  <a:srgbClr val="202122"/>
+                </a:solidFill>
+                <a:latin typeface="Calibri"/>
+              </a:rPr>
+              <a:t>Block diagrams, flowcharts, circuit diagrams and schematics.</a:t>
+            </a:r>
+          </a:p>
+        </p:txBody>
+      </p:sp>
+    </p:spTree>
+  </p:cSld>
+  <p:clrMapOvr>
+    <a:masterClrMapping/>
+  </p:clrMapOvr>
+</p:sld>
+</file>
+
+<file path=ppt/slides/slide5.xml><?xml version="1.0" encoding="utf-8"?>
+<p:sld xmlns:a="http://schemas.openxmlformats.org/drawingml/2006/main" xmlns:p="http://schemas.openxmlformats.org/presentationml/2006/main" xmlns:r="http://schemas.openxmlformats.org/officeDocument/2006/relationships">
+  <p:cSld>
+    <p:bg>
+      <p:bgPr>
+        <a:solidFill>
+          <a:srgbClr val="FFFFFF"/>
+        </a:solidFill>
+        <a:effectLst/>
+      </p:bgPr>
+    </p:bg>
+    <p:spTree>
+      <p:nvGrpSpPr>
+        <p:cNvPr id="1" name=""/>
+        <p:cNvGrpSpPr/>
+        <p:nvPr/>
+      </p:nvGrpSpPr>
+      <p:grpSpPr/>
+      <p:sp>
+        <p:nvSpPr>
+          <p:cNvPr id="2" name="TextBox 1"/>
+          <p:cNvSpPr txBox="1"/>
+          <p:nvPr/>
+        </p:nvSpPr>
+        <p:spPr>
+          <a:xfrm>
+            <a:off x="548640" y="320040"/>
+            <a:ext cx="11094415" cy="274320"/>
+          </a:xfrm>
+          <a:prstGeom prst="rect">
+            <a:avLst/>
+          </a:prstGeom>
+          <a:noFill/>
+        </p:spPr>
+        <p:txBody>
+          <a:bodyPr wrap="square" anchor="t" lIns="0" rIns="0" tIns="0" bIns="0"/>
+          <a:lstStyle/>
+          <a:p>
+            <a:pPr algn="l"/>
+            <a:r>
+              <a:rPr sz="1100" b="1" i="0">
+                <a:solidFill>
+                  <a:srgbClr val="54595D"/>
+                </a:solidFill>
+                <a:latin typeface="Calibri"/>
+              </a:rPr>
+              <a:t>ENGINEERING CORE  ·  Core topic 3</a:t>
+            </a:r>
+          </a:p>
+        </p:txBody>
+      </p:sp>
+      <p:sp>
+        <p:nvSpPr>
+          <p:cNvPr id="3" name="TextBox 2"/>
+          <p:cNvSpPr txBox="1"/>
+          <p:nvPr/>
+        </p:nvSpPr>
+        <p:spPr>
+          <a:xfrm>
+            <a:off x="548640" y="566928"/>
+            <a:ext cx="11094415" cy="822960"/>
+          </a:xfrm>
+          <a:prstGeom prst="rect">
+            <a:avLst/>
+          </a:prstGeom>
+          <a:noFill/>
+        </p:spPr>
+        <p:txBody>
+          <a:bodyPr wrap="square" anchor="ctr" lIns="0" rIns="0" tIns="0" bIns="0"/>
+          <a:lstStyle/>
+          <a:p>
+            <a:pPr algn="l"/>
+            <a:r>
+              <a:rPr sz="3200" b="1" i="0">
+                <a:solidFill>
+                  <a:srgbClr val="03306E"/>
+                </a:solidFill>
+                <a:latin typeface="Cambria"/>
+              </a:rPr>
+              <a:t>Quick check: Drawing types</a:t>
+            </a:r>
+          </a:p>
+        </p:txBody>
+      </p:sp>
+      <p:sp>
+        <p:nvSpPr>
+          <p:cNvPr id="4" name="TextBox 3"/>
+          <p:cNvSpPr txBox="1"/>
+          <p:nvPr/>
+        </p:nvSpPr>
+        <p:spPr>
+          <a:xfrm>
+            <a:off x="548640" y="6446520"/>
+            <a:ext cx="8229600" cy="274320"/>
+          </a:xfrm>
+          <a:prstGeom prst="rect">
+            <a:avLst/>
+          </a:prstGeom>
+          <a:noFill/>
+        </p:spPr>
+        <p:txBody>
+          <a:bodyPr wrap="square" anchor="t" lIns="0" rIns="0" tIns="0" bIns="0"/>
+          <a:lstStyle/>
+          <a:p>
+            <a:pPr algn="l"/>
+            <a:r>
+              <a:rPr sz="1000" b="0" i="0">
+                <a:solidFill>
+                  <a:srgbClr val="54595D"/>
+                </a:solidFill>
+                <a:latin typeface="Calibri"/>
+              </a:rPr>
+              <a:t>Design and Development for Engineering and Manufacturing T Level  ·  Engineering Drawings, Dimensions and Tolerancing</a:t>
+            </a:r>
+          </a:p>
+        </p:txBody>
+      </p:sp>
+      <p:sp>
+        <p:nvSpPr>
+          <p:cNvPr id="5" name="TextBox 4"/>
+          <p:cNvSpPr txBox="1"/>
+          <p:nvPr/>
+        </p:nvSpPr>
+        <p:spPr>
+          <a:xfrm>
+            <a:off x="10728655" y="6446520"/>
+            <a:ext cx="914400" cy="274320"/>
+          </a:xfrm>
+          <a:prstGeom prst="rect">
+            <a:avLst/>
+          </a:prstGeom>
+          <a:noFill/>
+        </p:spPr>
+        <p:txBody>
+          <a:bodyPr wrap="square" anchor="t" lIns="0" rIns="0" tIns="0" bIns="0"/>
+          <a:lstStyle/>
+          <a:p>
+            <a:pPr algn="r"/>
+            <a:r>
+              <a:rPr sz="1000" b="0" i="0">
+                <a:solidFill>
+                  <a:srgbClr val="54595D"/>
+                </a:solidFill>
+                <a:latin typeface="Calibri"/>
+              </a:rPr>
+              <a:t>5</a:t>
+            </a:r>
+          </a:p>
+        </p:txBody>
+      </p:sp>
+      <p:sp>
+        <p:nvSpPr>
+          <p:cNvPr id="6" name="Oval 5"/>
+          <p:cNvSpPr/>
+          <p:nvPr/>
+        </p:nvSpPr>
+        <p:spPr>
+          <a:xfrm>
+            <a:off x="548640" y="1691640"/>
+            <a:ext cx="502920" cy="502920"/>
+          </a:xfrm>
+          <a:prstGeom prst="ellipse">
+            <a:avLst/>
+          </a:prstGeom>
+          <a:solidFill>
+            <a:srgbClr val="F2B705"/>
+          </a:solidFill>
+          <a:ln>
+            <a:noFill/>
+          </a:ln>
+          <a:effectLst/>
+        </p:spPr>
+        <p:style>
+          <a:lnRef idx="1">
+            <a:schemeClr val="accent1"/>
+          </a:lnRef>
+          <a:fillRef idx="3">
+            <a:schemeClr val="accent1"/>
+          </a:fillRef>
+          <a:effectRef idx="2">
+            <a:schemeClr val="accent1"/>
+          </a:effectRef>
+          <a:fontRef idx="minor">
+            <a:schemeClr val="lt1"/>
+          </a:fontRef>
+        </p:style>
+        <p:txBody>
+          <a:bodyPr rtlCol="0" anchor="ctr" lIns="0" rIns="0" tIns="0" bIns="0"/>
+          <a:lstStyle/>
+          <a:p>
+            <a:pPr algn="ctr"/>
+            <a:r>
+              <a:rPr sz="1600" b="1">
+                <a:solidFill>
+                  <a:srgbClr val="202122"/>
+                </a:solidFill>
+                <a:latin typeface="Calibri"/>
+              </a:rPr>
+              <a:t>1</a:t>
+            </a:r>
+          </a:p>
+        </p:txBody>
+      </p:sp>
+      <p:sp>
+        <p:nvSpPr>
+          <p:cNvPr id="7" name="TextBox 6"/>
+          <p:cNvSpPr txBox="1"/>
+          <p:nvPr/>
+        </p:nvSpPr>
+        <p:spPr>
+          <a:xfrm>
+            <a:off x="1371600" y="1645920"/>
+            <a:ext cx="10271455" cy="1188720"/>
+          </a:xfrm>
+          <a:prstGeom prst="rect">
+            <a:avLst/>
+          </a:prstGeom>
+          <a:noFill/>
+        </p:spPr>
+        <p:txBody>
+          <a:bodyPr wrap="square" anchor="t" lIns="0" rIns="0" tIns="0" bIns="0"/>
+          <a:lstStyle/>
+          <a:p>
+            <a:pPr algn="l"/>
+            <a:r>
+              <a:rPr sz="2400" b="0" i="0">
+                <a:solidFill>
+                  <a:srgbClr val="202122"/>
+                </a:solidFill>
+                <a:latin typeface="Calibri"/>
+              </a:rPr>
+              <a:t>Which drawing type is used for manufacture?</a:t>
+            </a:r>
+          </a:p>
+        </p:txBody>
+      </p:sp>
+      <p:sp>
+        <p:nvSpPr>
+          <p:cNvPr id="8" name="Oval 7"/>
+          <p:cNvSpPr/>
+          <p:nvPr/>
+        </p:nvSpPr>
+        <p:spPr>
+          <a:xfrm>
+            <a:off x="548640" y="3108960"/>
+            <a:ext cx="502920" cy="502920"/>
+          </a:xfrm>
+          <a:prstGeom prst="ellipse">
+            <a:avLst/>
+          </a:prstGeom>
+          <a:solidFill>
+            <a:srgbClr val="F2B705"/>
+          </a:solidFill>
+          <a:ln>
+            <a:noFill/>
+          </a:ln>
+          <a:effectLst/>
+        </p:spPr>
+        <p:style>
+          <a:lnRef idx="1">
+            <a:schemeClr val="accent1"/>
+          </a:lnRef>
+          <a:fillRef idx="3">
+            <a:schemeClr val="accent1"/>
+          </a:fillRef>
+          <a:effectRef idx="2">
+            <a:schemeClr val="accent1"/>
+          </a:effectRef>
+          <a:fontRef idx="minor">
+            <a:schemeClr val="lt1"/>
+          </a:fontRef>
+        </p:style>
+        <p:txBody>
+          <a:bodyPr rtlCol="0" anchor="ctr" lIns="0" rIns="0" tIns="0" bIns="0"/>
+          <a:lstStyle/>
+          <a:p>
+            <a:pPr algn="ctr"/>
+            <a:r>
+              <a:rPr sz="1600" b="1">
+                <a:solidFill>
+                  <a:srgbClr val="202122"/>
+                </a:solidFill>
+                <a:latin typeface="Calibri"/>
+              </a:rPr>
+              <a:t>2</a:t>
+            </a:r>
+          </a:p>
+        </p:txBody>
+      </p:sp>
+      <p:sp>
+        <p:nvSpPr>
+          <p:cNvPr id="9" name="TextBox 8"/>
+          <p:cNvSpPr txBox="1"/>
+          <p:nvPr/>
+        </p:nvSpPr>
+        <p:spPr>
+          <a:xfrm>
+            <a:off x="1371600" y="3063240"/>
+            <a:ext cx="10271455" cy="1188720"/>
+          </a:xfrm>
+          <a:prstGeom prst="rect">
+            <a:avLst/>
+          </a:prstGeom>
+          <a:noFill/>
+        </p:spPr>
+        <p:txBody>
+          <a:bodyPr wrap="square" anchor="t" lIns="0" rIns="0" tIns="0" bIns="0"/>
+          <a:lstStyle/>
+          <a:p>
+            <a:pPr algn="l"/>
+            <a:r>
+              <a:rPr sz="2400" b="0" i="0">
+                <a:solidFill>
+                  <a:srgbClr val="202122"/>
+                </a:solidFill>
+                <a:latin typeface="Calibri"/>
+              </a:rPr>
+              <a:t>What does an exploded view show?</a:t>
+            </a:r>
+          </a:p>
+        </p:txBody>
+      </p:sp>
+      <p:sp>
+        <p:nvSpPr>
+          <p:cNvPr id="10" name="Oval 9"/>
+          <p:cNvSpPr/>
+          <p:nvPr/>
+        </p:nvSpPr>
+        <p:spPr>
+          <a:xfrm>
+            <a:off x="548640" y="4526280"/>
+            <a:ext cx="502920" cy="502920"/>
+          </a:xfrm>
+          <a:prstGeom prst="ellipse">
+            <a:avLst/>
+          </a:prstGeom>
+          <a:solidFill>
+            <a:srgbClr val="F2B705"/>
+          </a:solidFill>
+          <a:ln>
+            <a:noFill/>
+          </a:ln>
+          <a:effectLst/>
+        </p:spPr>
+        <p:style>
+          <a:lnRef idx="1">
+            <a:schemeClr val="accent1"/>
+          </a:lnRef>
+          <a:fillRef idx="3">
+            <a:schemeClr val="accent1"/>
+          </a:fillRef>
+          <a:effectRef idx="2">
+            <a:schemeClr val="accent1"/>
+          </a:effectRef>
+          <a:fontRef idx="minor">
+            <a:schemeClr val="lt1"/>
+          </a:fontRef>
+        </p:style>
+        <p:txBody>
+          <a:bodyPr rtlCol="0" anchor="ctr" lIns="0" rIns="0" tIns="0" bIns="0"/>
+          <a:lstStyle/>
+          <a:p>
+            <a:pPr algn="ctr"/>
+            <a:r>
+              <a:rPr sz="1600" b="1">
+                <a:solidFill>
+                  <a:srgbClr val="202122"/>
+                </a:solidFill>
+                <a:latin typeface="Calibri"/>
+              </a:rPr>
+              <a:t>3</a:t>
+            </a:r>
+          </a:p>
+        </p:txBody>
+      </p:sp>
+      <p:sp>
+        <p:nvSpPr>
+          <p:cNvPr id="11" name="TextBox 10"/>
+          <p:cNvSpPr txBox="1"/>
+          <p:nvPr/>
+        </p:nvSpPr>
+        <p:spPr>
+          <a:xfrm>
+            <a:off x="1371600" y="4480560"/>
+            <a:ext cx="10271455" cy="1188720"/>
+          </a:xfrm>
+          <a:prstGeom prst="rect">
+            <a:avLst/>
+          </a:prstGeom>
+          <a:noFill/>
+        </p:spPr>
+        <p:txBody>
+          <a:bodyPr wrap="square" anchor="t" lIns="0" rIns="0" tIns="0" bIns="0"/>
+          <a:lstStyle/>
+          <a:p>
+            <a:pPr algn="l"/>
+            <a:r>
+              <a:rPr sz="2400" b="0" i="0">
+                <a:solidFill>
+                  <a:srgbClr val="202122"/>
+                </a:solidFill>
+                <a:latin typeface="Calibri"/>
+              </a:rPr>
+              <a:t>Which standard covers technical drawings?</a:t>
+            </a:r>
+          </a:p>
+        </p:txBody>
+      </p:sp>
+      <p:sp>
+        <p:nvSpPr>
+          <p:cNvPr id="12" name="TextBox 11"/>
+          <p:cNvSpPr txBox="1"/>
+          <p:nvPr/>
+        </p:nvSpPr>
+        <p:spPr>
+          <a:xfrm>
+            <a:off x="548640" y="5852160"/>
+            <a:ext cx="11094415" cy="365760"/>
+          </a:xfrm>
+          <a:prstGeom prst="rect">
+            <a:avLst/>
+          </a:prstGeom>
+          <a:noFill/>
+        </p:spPr>
+        <p:txBody>
+          <a:bodyPr wrap="square" anchor="t" lIns="0" rIns="0" tIns="0" bIns="0"/>
+          <a:lstStyle/>
+          <a:p>
+            <a:pPr algn="l"/>
+            <a:r>
+              <a:rPr sz="1300" b="0" i="1">
+                <a:solidFill>
+                  <a:srgbClr val="54595D"/>
+                </a:solidFill>
+                <a:latin typeface="Calibri"/>
+              </a:rPr>
+              <a:t>Answer on mini whiteboards or in your book. Answers are in the speaker notes.</a:t>
+            </a:r>
+          </a:p>
+        </p:txBody>
+      </p:sp>
+    </p:spTree>
+  </p:cSld>
+  <p:clrMapOvr>
+    <a:masterClrMapping/>
+  </p:clrMapOvr>
+</p:sld>
+</file>
+
+<file path=ppt/slides/slide6.xml><?xml version="1.0" encoding="utf-8"?>
+<p:sld xmlns:a="http://schemas.openxmlformats.org/drawingml/2006/main" xmlns:p="http://schemas.openxmlformats.org/presentationml/2006/main" xmlns:r="http://schemas.openxmlformats.org/officeDocument/2006/relationships">
+  <p:cSld>
+    <p:bg>
+      <p:bgPr>
+        <a:solidFill>
+          <a:srgbClr val="FFFFFF"/>
+        </a:solidFill>
+        <a:effectLst/>
+      </p:bgPr>
+    </p:bg>
+    <p:spTree>
+      <p:nvGrpSpPr>
+        <p:cNvPr id="1" name=""/>
+        <p:cNvGrpSpPr/>
+        <p:nvPr/>
+      </p:nvGrpSpPr>
+      <p:grpSpPr/>
+      <p:sp>
+        <p:nvSpPr>
+          <p:cNvPr id="2" name="TextBox 1"/>
+          <p:cNvSpPr txBox="1"/>
+          <p:nvPr/>
+        </p:nvSpPr>
+        <p:spPr>
+          <a:xfrm>
+            <a:off x="548640" y="320040"/>
+            <a:ext cx="11094415" cy="274320"/>
+          </a:xfrm>
+          <a:prstGeom prst="rect">
+            <a:avLst/>
+          </a:prstGeom>
+          <a:noFill/>
+        </p:spPr>
+        <p:txBody>
+          <a:bodyPr wrap="square" anchor="t" lIns="0" rIns="0" tIns="0" bIns="0"/>
+          <a:lstStyle/>
+          <a:p>
+            <a:pPr algn="l"/>
+            <a:r>
+              <a:rPr sz="1100" b="1" i="0">
+                <a:solidFill>
+                  <a:srgbClr val="54595D"/>
+                </a:solidFill>
+                <a:latin typeface="Calibri"/>
+              </a:rPr>
+              <a:t>ENGINEERING CORE  ·  Core topic 3</a:t>
+            </a:r>
+          </a:p>
+        </p:txBody>
+      </p:sp>
+      <p:sp>
+        <p:nvSpPr>
+          <p:cNvPr id="3" name="TextBox 2"/>
+          <p:cNvSpPr txBox="1"/>
+          <p:nvPr/>
+        </p:nvSpPr>
+        <p:spPr>
+          <a:xfrm>
+            <a:off x="548640" y="566928"/>
+            <a:ext cx="11094415" cy="822960"/>
+          </a:xfrm>
+          <a:prstGeom prst="rect">
+            <a:avLst/>
+          </a:prstGeom>
+          <a:noFill/>
+        </p:spPr>
+        <p:txBody>
+          <a:bodyPr wrap="square" anchor="ctr" lIns="0" rIns="0" tIns="0" bIns="0"/>
+          <a:lstStyle/>
+          <a:p>
+            <a:pPr algn="l"/>
+            <a:r>
+              <a:rPr sz="3200" b="1" i="0">
+                <a:solidFill>
+                  <a:srgbClr val="03306E"/>
+                </a:solidFill>
+                <a:latin typeface="Cambria"/>
+              </a:rPr>
+              <a:t>Common abbreviations</a:t>
+            </a:r>
+          </a:p>
+        </p:txBody>
+      </p:sp>
+      <p:sp>
+        <p:nvSpPr>
+          <p:cNvPr id="4" name="TextBox 3"/>
+          <p:cNvSpPr txBox="1"/>
+          <p:nvPr/>
+        </p:nvSpPr>
+        <p:spPr>
+          <a:xfrm>
+            <a:off x="548640" y="6446520"/>
+            <a:ext cx="8229600" cy="274320"/>
+          </a:xfrm>
+          <a:prstGeom prst="rect">
+            <a:avLst/>
+          </a:prstGeom>
+          <a:noFill/>
+        </p:spPr>
+        <p:txBody>
+          <a:bodyPr wrap="square" anchor="t" lIns="0" rIns="0" tIns="0" bIns="0"/>
+          <a:lstStyle/>
+          <a:p>
+            <a:pPr algn="l"/>
+            <a:r>
+              <a:rPr sz="1000" b="0" i="0">
+                <a:solidFill>
+                  <a:srgbClr val="54595D"/>
+                </a:solidFill>
+                <a:latin typeface="Calibri"/>
+              </a:rPr>
+              <a:t>Design and Development for Engineering and Manufacturing T Level  ·  Engineering Drawings, Dimensions and Tolerancing</a:t>
+            </a:r>
+          </a:p>
+        </p:txBody>
+      </p:sp>
+      <p:sp>
+        <p:nvSpPr>
+          <p:cNvPr id="5" name="TextBox 4"/>
+          <p:cNvSpPr txBox="1"/>
+          <p:nvPr/>
+        </p:nvSpPr>
+        <p:spPr>
+          <a:xfrm>
+            <a:off x="10728655" y="6446520"/>
+            <a:ext cx="914400" cy="274320"/>
+          </a:xfrm>
+          <a:prstGeom prst="rect">
+            <a:avLst/>
+          </a:prstGeom>
+          <a:noFill/>
+        </p:spPr>
+        <p:txBody>
+          <a:bodyPr wrap="square" anchor="t" lIns="0" rIns="0" tIns="0" bIns="0"/>
+          <a:lstStyle/>
+          <a:p>
+            <a:pPr algn="r"/>
+            <a:r>
+              <a:rPr sz="1000" b="0" i="0">
+                <a:solidFill>
+                  <a:srgbClr val="54595D"/>
+                </a:solidFill>
+                <a:latin typeface="Calibri"/>
+              </a:rPr>
+              <a:t>6</a:t>
             </a:r>
           </a:p>
         </p:txBody>
@@ -7006,1443 +11754,6 @@
 </p:sld>
 </file>
 
-<file path=ppt/slides/slide5.xml><?xml version="1.0" encoding="utf-8"?>
-<p:sld xmlns:a="http://schemas.openxmlformats.org/drawingml/2006/main" xmlns:p="http://schemas.openxmlformats.org/presentationml/2006/main" xmlns:r="http://schemas.openxmlformats.org/officeDocument/2006/relationships">
-  <p:cSld>
-    <p:bg>
-      <p:bgPr>
-        <a:solidFill>
-          <a:srgbClr val="FFFFFF"/>
-        </a:solidFill>
-        <a:effectLst/>
-      </p:bgPr>
-    </p:bg>
-    <p:spTree>
-      <p:nvGrpSpPr>
-        <p:cNvPr id="1" name=""/>
-        <p:cNvGrpSpPr/>
-        <p:nvPr/>
-      </p:nvGrpSpPr>
-      <p:grpSpPr/>
-      <p:sp>
-        <p:nvSpPr>
-          <p:cNvPr id="2" name="TextBox 1"/>
-          <p:cNvSpPr txBox="1"/>
-          <p:nvPr/>
-        </p:nvSpPr>
-        <p:spPr>
-          <a:xfrm>
-            <a:off x="548640" y="320040"/>
-            <a:ext cx="11094415" cy="274320"/>
-          </a:xfrm>
-          <a:prstGeom prst="rect">
-            <a:avLst/>
-          </a:prstGeom>
-          <a:noFill/>
-        </p:spPr>
-        <p:txBody>
-          <a:bodyPr wrap="square" anchor="t" lIns="0" rIns="0" tIns="0" bIns="0"/>
-          <a:lstStyle/>
-          <a:p>
-            <a:pPr algn="l"/>
-            <a:r>
-              <a:rPr sz="1100" b="1" i="0">
-                <a:solidFill>
-                  <a:srgbClr val="54595D"/>
-                </a:solidFill>
-                <a:latin typeface="Calibri"/>
-              </a:rPr>
-              <a:t>ENGINEERING CORE  ·  Core topic 3</a:t>
-            </a:r>
-          </a:p>
-        </p:txBody>
-      </p:sp>
-      <p:sp>
-        <p:nvSpPr>
-          <p:cNvPr id="3" name="TextBox 2"/>
-          <p:cNvSpPr txBox="1"/>
-          <p:nvPr/>
-        </p:nvSpPr>
-        <p:spPr>
-          <a:xfrm>
-            <a:off x="548640" y="566928"/>
-            <a:ext cx="11094415" cy="822960"/>
-          </a:xfrm>
-          <a:prstGeom prst="rect">
-            <a:avLst/>
-          </a:prstGeom>
-          <a:noFill/>
-        </p:spPr>
-        <p:txBody>
-          <a:bodyPr wrap="square" anchor="ctr" lIns="0" rIns="0" tIns="0" bIns="0"/>
-          <a:lstStyle/>
-          <a:p>
-            <a:pPr algn="l"/>
-            <a:r>
-              <a:rPr sz="3200" b="1" i="0">
-                <a:solidFill>
-                  <a:srgbClr val="03306E"/>
-                </a:solidFill>
-                <a:latin typeface="Cambria"/>
-              </a:rPr>
-              <a:t>Tolerances, limits and fits</a:t>
-            </a:r>
-          </a:p>
-        </p:txBody>
-      </p:sp>
-      <p:sp>
-        <p:nvSpPr>
-          <p:cNvPr id="4" name="TextBox 3"/>
-          <p:cNvSpPr txBox="1"/>
-          <p:nvPr/>
-        </p:nvSpPr>
-        <p:spPr>
-          <a:xfrm>
-            <a:off x="548640" y="6446520"/>
-            <a:ext cx="8229600" cy="274320"/>
-          </a:xfrm>
-          <a:prstGeom prst="rect">
-            <a:avLst/>
-          </a:prstGeom>
-          <a:noFill/>
-        </p:spPr>
-        <p:txBody>
-          <a:bodyPr wrap="square" anchor="t" lIns="0" rIns="0" tIns="0" bIns="0"/>
-          <a:lstStyle/>
-          <a:p>
-            <a:pPr algn="l"/>
-            <a:r>
-              <a:rPr sz="1000" b="0" i="0">
-                <a:solidFill>
-                  <a:srgbClr val="54595D"/>
-                </a:solidFill>
-                <a:latin typeface="Calibri"/>
-              </a:rPr>
-              <a:t>Design and Development for Engineering and Manufacturing T Level  ·  Engineering Drawings, Dimensions and Tolerancing</a:t>
-            </a:r>
-          </a:p>
-        </p:txBody>
-      </p:sp>
-      <p:sp>
-        <p:nvSpPr>
-          <p:cNvPr id="5" name="TextBox 4"/>
-          <p:cNvSpPr txBox="1"/>
-          <p:nvPr/>
-        </p:nvSpPr>
-        <p:spPr>
-          <a:xfrm>
-            <a:off x="10728655" y="6446520"/>
-            <a:ext cx="914400" cy="274320"/>
-          </a:xfrm>
-          <a:prstGeom prst="rect">
-            <a:avLst/>
-          </a:prstGeom>
-          <a:noFill/>
-        </p:spPr>
-        <p:txBody>
-          <a:bodyPr wrap="square" anchor="t" lIns="0" rIns="0" tIns="0" bIns="0"/>
-          <a:lstStyle/>
-          <a:p>
-            <a:pPr algn="r"/>
-            <a:r>
-              <a:rPr sz="1000" b="0" i="0">
-                <a:solidFill>
-                  <a:srgbClr val="54595D"/>
-                </a:solidFill>
-                <a:latin typeface="Calibri"/>
-              </a:rPr>
-              <a:t>5</a:t>
-            </a:r>
-          </a:p>
-        </p:txBody>
-      </p:sp>
-      <p:sp>
-        <p:nvSpPr>
-          <p:cNvPr id="6" name="TextBox 5"/>
-          <p:cNvSpPr txBox="1"/>
-          <p:nvPr/>
-        </p:nvSpPr>
-        <p:spPr>
-          <a:xfrm>
-            <a:off x="548640" y="1600200"/>
-            <a:ext cx="6675120" cy="4572000"/>
-          </a:xfrm>
-          <a:prstGeom prst="rect">
-            <a:avLst/>
-          </a:prstGeom>
-          <a:noFill/>
-        </p:spPr>
-        <p:txBody>
-          <a:bodyPr wrap="square" lIns="0" rIns="0" tIns="0" bIns="0">
-            <a:spAutoFit/>
-          </a:bodyPr>
-          <a:lstStyle/>
-          <a:p>
-            <a:pPr marL="274320" indent="-274320">
-              <a:spcAft>
-                <a:spcPts val="1080"/>
-              </a:spcAft>
-              <a:buClr>
-                <a:srgbClr val="0645AD"/>
-              </a:buClr>
-              <a:buFont typeface="Arial"/>
-              <a:buChar char="•"/>
-            </a:pPr>
-            <a:r>
-              <a:rPr sz="2400" b="1">
-                <a:solidFill>
-                  <a:srgbClr val="202122"/>
-                </a:solidFill>
-                <a:latin typeface="Calibri"/>
-              </a:rPr>
-              <a:t>Tolerance:</a:t>
-            </a:r>
-            <a:r>
-              <a:rPr sz="2400" b="0">
-                <a:solidFill>
-                  <a:srgbClr val="202122"/>
-                </a:solidFill>
-                <a:latin typeface="Calibri"/>
-              </a:rPr>
-              <a:t> the total allowed variation in a dimension.</a:t>
-            </a:r>
-          </a:p>
-          <a:p>
-            <a:pPr marL="274320" indent="-274320">
-              <a:spcAft>
-                <a:spcPts val="1080"/>
-              </a:spcAft>
-              <a:buClr>
-                <a:srgbClr val="0645AD"/>
-              </a:buClr>
-              <a:buFont typeface="Arial"/>
-              <a:buChar char="•"/>
-            </a:pPr>
-            <a:r>
-              <a:rPr sz="2400" b="1">
-                <a:solidFill>
-                  <a:srgbClr val="202122"/>
-                </a:solidFill>
-                <a:latin typeface="Calibri"/>
-              </a:rPr>
-              <a:t>Limits:</a:t>
-            </a:r>
-            <a:r>
-              <a:rPr sz="2400" b="0">
-                <a:solidFill>
-                  <a:srgbClr val="202122"/>
-                </a:solidFill>
-                <a:latin typeface="Calibri"/>
-              </a:rPr>
-              <a:t> the largest and smallest acceptable sizes.</a:t>
-            </a:r>
-          </a:p>
-          <a:p>
-            <a:pPr marL="274320" indent="-274320">
-              <a:spcAft>
-                <a:spcPts val="1080"/>
-              </a:spcAft>
-              <a:buClr>
-                <a:srgbClr val="0645AD"/>
-              </a:buClr>
-              <a:buFont typeface="Arial"/>
-              <a:buChar char="•"/>
-            </a:pPr>
-            <a:r>
-              <a:rPr sz="2400" b="1">
-                <a:solidFill>
-                  <a:srgbClr val="202122"/>
-                </a:solidFill>
-                <a:latin typeface="Calibri"/>
-              </a:rPr>
-              <a:t>Example:</a:t>
-            </a:r>
-            <a:r>
-              <a:rPr sz="2400" b="0">
-                <a:solidFill>
-                  <a:srgbClr val="202122"/>
-                </a:solidFill>
-                <a:latin typeface="Calibri"/>
-              </a:rPr>
-              <a:t> 20 mm plus or minus 0.1 mm gives limits of 19.9 mm and 20.1 mm, a tolerance of 0.2 mm.</a:t>
-            </a:r>
-          </a:p>
-          <a:p>
-            <a:pPr marL="274320" indent="-274320">
-              <a:spcAft>
-                <a:spcPts val="1080"/>
-              </a:spcAft>
-              <a:buClr>
-                <a:srgbClr val="0645AD"/>
-              </a:buClr>
-              <a:buFont typeface="Arial"/>
-              <a:buChar char="•"/>
-            </a:pPr>
-            <a:r>
-              <a:rPr sz="2400" b="1">
-                <a:solidFill>
-                  <a:srgbClr val="202122"/>
-                </a:solidFill>
-                <a:latin typeface="Calibri"/>
-              </a:rPr>
-              <a:t>Fits:</a:t>
-            </a:r>
-            <a:r>
-              <a:rPr sz="2400" b="0">
-                <a:solidFill>
-                  <a:srgbClr val="202122"/>
-                </a:solidFill>
-                <a:latin typeface="Calibri"/>
-              </a:rPr>
-              <a:t> clearance (always a gap), interference (always tight), transition (either).</a:t>
-            </a:r>
-          </a:p>
-        </p:txBody>
-      </p:sp>
-      <p:sp>
-        <p:nvSpPr>
-          <p:cNvPr id="7" name="Rounded Rectangle 6"/>
-          <p:cNvSpPr/>
-          <p:nvPr/>
-        </p:nvSpPr>
-        <p:spPr>
-          <a:xfrm>
-            <a:off x="7772400" y="1600200"/>
-            <a:ext cx="3867912" cy="4434840"/>
-          </a:xfrm>
-          <a:prstGeom prst="roundRect">
-            <a:avLst>
-              <a:gd name="adj" fmla="val 8000"/>
-            </a:avLst>
-          </a:prstGeom>
-          <a:solidFill>
-            <a:srgbClr val="03306E"/>
-          </a:solidFill>
-          <a:ln>
-            <a:noFill/>
-          </a:ln>
-          <a:effectLst/>
-        </p:spPr>
-        <p:style>
-          <a:lnRef idx="1">
-            <a:schemeClr val="accent1"/>
-          </a:lnRef>
-          <a:fillRef idx="3">
-            <a:schemeClr val="accent1"/>
-          </a:fillRef>
-          <a:effectRef idx="2">
-            <a:schemeClr val="accent1"/>
-          </a:effectRef>
-          <a:fontRef idx="minor">
-            <a:schemeClr val="lt1"/>
-          </a:fontRef>
-        </p:style>
-        <p:txBody>
-          <a:bodyPr rtlCol="0" anchor="ctr"/>
-          <a:lstStyle/>
-          <a:p/>
-        </p:txBody>
-      </p:sp>
-      <p:sp>
-        <p:nvSpPr>
-          <p:cNvPr id="8" name="Oval 7"/>
-          <p:cNvSpPr/>
-          <p:nvPr/>
-        </p:nvSpPr>
-        <p:spPr>
-          <a:xfrm>
-            <a:off x="8046720" y="1874519"/>
-            <a:ext cx="548640" cy="548640"/>
-          </a:xfrm>
-          <a:prstGeom prst="ellipse">
-            <a:avLst/>
-          </a:prstGeom>
-          <a:solidFill>
-            <a:srgbClr val="F2B705"/>
-          </a:solidFill>
-          <a:ln>
-            <a:noFill/>
-          </a:ln>
-          <a:effectLst/>
-        </p:spPr>
-        <p:style>
-          <a:lnRef idx="1">
-            <a:schemeClr val="accent1"/>
-          </a:lnRef>
-          <a:fillRef idx="3">
-            <a:schemeClr val="accent1"/>
-          </a:fillRef>
-          <a:effectRef idx="2">
-            <a:schemeClr val="accent1"/>
-          </a:effectRef>
-          <a:fontRef idx="minor">
-            <a:schemeClr val="lt1"/>
-          </a:fontRef>
-        </p:style>
-        <p:txBody>
-          <a:bodyPr rtlCol="0" anchor="ctr" lIns="0" rIns="0" tIns="0" bIns="0"/>
-          <a:lstStyle/>
-          <a:p>
-            <a:pPr algn="ctr"/>
-            <a:r>
-              <a:rPr sz="2000" b="1">
-                <a:solidFill>
-                  <a:srgbClr val="202122"/>
-                </a:solidFill>
-                <a:latin typeface="Calibri"/>
-              </a:rPr>
-              <a:t>!</a:t>
-            </a:r>
-          </a:p>
-        </p:txBody>
-      </p:sp>
-      <p:sp>
-        <p:nvSpPr>
-          <p:cNvPr id="9" name="TextBox 8"/>
-          <p:cNvSpPr txBox="1"/>
-          <p:nvPr/>
-        </p:nvSpPr>
-        <p:spPr>
-          <a:xfrm>
-            <a:off x="8046720" y="2606040"/>
-            <a:ext cx="3291840" cy="365760"/>
-          </a:xfrm>
-          <a:prstGeom prst="rect">
-            <a:avLst/>
-          </a:prstGeom>
-          <a:noFill/>
-        </p:spPr>
-        <p:txBody>
-          <a:bodyPr wrap="square" anchor="t" lIns="0" rIns="0" tIns="0" bIns="0"/>
-          <a:lstStyle/>
-          <a:p>
-            <a:pPr algn="l"/>
-            <a:r>
-              <a:rPr sz="1300" b="1" i="0">
-                <a:solidFill>
-                  <a:srgbClr val="A9C8F0"/>
-                </a:solidFill>
-                <a:latin typeface="Calibri"/>
-              </a:rPr>
-              <a:t>KEY IDEA</a:t>
-            </a:r>
-          </a:p>
-        </p:txBody>
-      </p:sp>
-      <p:sp>
-        <p:nvSpPr>
-          <p:cNvPr id="10" name="TextBox 9"/>
-          <p:cNvSpPr txBox="1"/>
-          <p:nvPr/>
-        </p:nvSpPr>
-        <p:spPr>
-          <a:xfrm>
-            <a:off x="8046720" y="3017520"/>
-            <a:ext cx="3291840" cy="2926080"/>
-          </a:xfrm>
-          <a:prstGeom prst="rect">
-            <a:avLst/>
-          </a:prstGeom>
-          <a:noFill/>
-        </p:spPr>
-        <p:txBody>
-          <a:bodyPr wrap="square" anchor="t" lIns="0" rIns="0" tIns="0" bIns="0"/>
-          <a:lstStyle/>
-          <a:p>
-            <a:pPr algn="l"/>
-            <a:r>
-              <a:rPr sz="2200" b="0" i="0">
-                <a:solidFill>
-                  <a:srgbClr val="FFFFFF"/>
-                </a:solidFill>
-                <a:latin typeface="Cambria"/>
-              </a:rPr>
-              <a:t>Tighter tolerances cost more to make. Only specify what the function really needs.</a:t>
-            </a:r>
-          </a:p>
-        </p:txBody>
-      </p:sp>
-    </p:spTree>
-  </p:cSld>
-  <p:clrMapOvr>
-    <a:masterClrMapping/>
-  </p:clrMapOvr>
-</p:sld>
-</file>
-
-<file path=ppt/slides/slide6.xml><?xml version="1.0" encoding="utf-8"?>
-<p:sld xmlns:a="http://schemas.openxmlformats.org/drawingml/2006/main" xmlns:p="http://schemas.openxmlformats.org/presentationml/2006/main" xmlns:r="http://schemas.openxmlformats.org/officeDocument/2006/relationships">
-  <p:cSld>
-    <p:bg>
-      <p:bgPr>
-        <a:solidFill>
-          <a:srgbClr val="FFFFFF"/>
-        </a:solidFill>
-        <a:effectLst/>
-      </p:bgPr>
-    </p:bg>
-    <p:spTree>
-      <p:nvGrpSpPr>
-        <p:cNvPr id="1" name=""/>
-        <p:cNvGrpSpPr/>
-        <p:nvPr/>
-      </p:nvGrpSpPr>
-      <p:grpSpPr/>
-      <p:sp>
-        <p:nvSpPr>
-          <p:cNvPr id="2" name="TextBox 1"/>
-          <p:cNvSpPr txBox="1"/>
-          <p:nvPr/>
-        </p:nvSpPr>
-        <p:spPr>
-          <a:xfrm>
-            <a:off x="548640" y="320040"/>
-            <a:ext cx="11094415" cy="274320"/>
-          </a:xfrm>
-          <a:prstGeom prst="rect">
-            <a:avLst/>
-          </a:prstGeom>
-          <a:noFill/>
-        </p:spPr>
-        <p:txBody>
-          <a:bodyPr wrap="square" anchor="t" lIns="0" rIns="0" tIns="0" bIns="0"/>
-          <a:lstStyle/>
-          <a:p>
-            <a:pPr algn="l"/>
-            <a:r>
-              <a:rPr sz="1100" b="1" i="0">
-                <a:solidFill>
-                  <a:srgbClr val="54595D"/>
-                </a:solidFill>
-                <a:latin typeface="Calibri"/>
-              </a:rPr>
-              <a:t>ENGINEERING CORE  ·  Core topic 3</a:t>
-            </a:r>
-          </a:p>
-        </p:txBody>
-      </p:sp>
-      <p:sp>
-        <p:nvSpPr>
-          <p:cNvPr id="3" name="TextBox 2"/>
-          <p:cNvSpPr txBox="1"/>
-          <p:nvPr/>
-        </p:nvSpPr>
-        <p:spPr>
-          <a:xfrm>
-            <a:off x="548640" y="566928"/>
-            <a:ext cx="11094415" cy="822960"/>
-          </a:xfrm>
-          <a:prstGeom prst="rect">
-            <a:avLst/>
-          </a:prstGeom>
-          <a:noFill/>
-        </p:spPr>
-        <p:txBody>
-          <a:bodyPr wrap="square" anchor="ctr" lIns="0" rIns="0" tIns="0" bIns="0"/>
-          <a:lstStyle/>
-          <a:p>
-            <a:pPr algn="l"/>
-            <a:r>
-              <a:rPr sz="3200" b="1" i="0">
-                <a:solidFill>
-                  <a:srgbClr val="03306E"/>
-                </a:solidFill>
-                <a:latin typeface="Cambria"/>
-              </a:rPr>
-              <a:t>Geometric tolerancing (GD&amp;T)</a:t>
-            </a:r>
-          </a:p>
-        </p:txBody>
-      </p:sp>
-      <p:sp>
-        <p:nvSpPr>
-          <p:cNvPr id="4" name="TextBox 3"/>
-          <p:cNvSpPr txBox="1"/>
-          <p:nvPr/>
-        </p:nvSpPr>
-        <p:spPr>
-          <a:xfrm>
-            <a:off x="548640" y="6446520"/>
-            <a:ext cx="8229600" cy="274320"/>
-          </a:xfrm>
-          <a:prstGeom prst="rect">
-            <a:avLst/>
-          </a:prstGeom>
-          <a:noFill/>
-        </p:spPr>
-        <p:txBody>
-          <a:bodyPr wrap="square" anchor="t" lIns="0" rIns="0" tIns="0" bIns="0"/>
-          <a:lstStyle/>
-          <a:p>
-            <a:pPr algn="l"/>
-            <a:r>
-              <a:rPr sz="1000" b="0" i="0">
-                <a:solidFill>
-                  <a:srgbClr val="54595D"/>
-                </a:solidFill>
-                <a:latin typeface="Calibri"/>
-              </a:rPr>
-              <a:t>Design and Development for Engineering and Manufacturing T Level  ·  Engineering Drawings, Dimensions and Tolerancing</a:t>
-            </a:r>
-          </a:p>
-        </p:txBody>
-      </p:sp>
-      <p:sp>
-        <p:nvSpPr>
-          <p:cNvPr id="5" name="TextBox 4"/>
-          <p:cNvSpPr txBox="1"/>
-          <p:nvPr/>
-        </p:nvSpPr>
-        <p:spPr>
-          <a:xfrm>
-            <a:off x="10728655" y="6446520"/>
-            <a:ext cx="914400" cy="274320"/>
-          </a:xfrm>
-          <a:prstGeom prst="rect">
-            <a:avLst/>
-          </a:prstGeom>
-          <a:noFill/>
-        </p:spPr>
-        <p:txBody>
-          <a:bodyPr wrap="square" anchor="t" lIns="0" rIns="0" tIns="0" bIns="0"/>
-          <a:lstStyle/>
-          <a:p>
-            <a:pPr algn="r"/>
-            <a:r>
-              <a:rPr sz="1000" b="0" i="0">
-                <a:solidFill>
-                  <a:srgbClr val="54595D"/>
-                </a:solidFill>
-                <a:latin typeface="Calibri"/>
-              </a:rPr>
-              <a:t>6</a:t>
-            </a:r>
-          </a:p>
-        </p:txBody>
-      </p:sp>
-      <p:sp>
-        <p:nvSpPr>
-          <p:cNvPr id="6" name="Rounded Rectangle 5"/>
-          <p:cNvSpPr/>
-          <p:nvPr/>
-        </p:nvSpPr>
-        <p:spPr>
-          <a:xfrm>
-            <a:off x="548640" y="1600200"/>
-            <a:ext cx="3515258" cy="2148840"/>
-          </a:xfrm>
-          <a:prstGeom prst="roundRect">
-            <a:avLst>
-              <a:gd name="adj" fmla="val 6000"/>
-            </a:avLst>
-          </a:prstGeom>
-          <a:solidFill>
-            <a:srgbClr val="EAF3FF"/>
-          </a:solidFill>
-          <a:ln>
-            <a:noFill/>
-          </a:ln>
-          <a:effectLst/>
-        </p:spPr>
-        <p:style>
-          <a:lnRef idx="1">
-            <a:schemeClr val="accent1"/>
-          </a:lnRef>
-          <a:fillRef idx="3">
-            <a:schemeClr val="accent1"/>
-          </a:fillRef>
-          <a:effectRef idx="2">
-            <a:schemeClr val="accent1"/>
-          </a:effectRef>
-          <a:fontRef idx="minor">
-            <a:schemeClr val="lt1"/>
-          </a:fontRef>
-        </p:style>
-        <p:txBody>
-          <a:bodyPr rtlCol="0" anchor="ctr"/>
-          <a:lstStyle/>
-          <a:p/>
-        </p:txBody>
-      </p:sp>
-      <p:sp>
-        <p:nvSpPr>
-          <p:cNvPr id="7" name="Oval 6"/>
-          <p:cNvSpPr/>
-          <p:nvPr/>
-        </p:nvSpPr>
-        <p:spPr>
-          <a:xfrm>
-            <a:off x="777240" y="1828800"/>
-            <a:ext cx="457200" cy="457200"/>
-          </a:xfrm>
-          <a:prstGeom prst="ellipse">
-            <a:avLst/>
-          </a:prstGeom>
-          <a:solidFill>
-            <a:srgbClr val="F2B705"/>
-          </a:solidFill>
-          <a:ln>
-            <a:noFill/>
-          </a:ln>
-          <a:effectLst/>
-        </p:spPr>
-        <p:style>
-          <a:lnRef idx="1">
-            <a:schemeClr val="accent1"/>
-          </a:lnRef>
-          <a:fillRef idx="3">
-            <a:schemeClr val="accent1"/>
-          </a:fillRef>
-          <a:effectRef idx="2">
-            <a:schemeClr val="accent1"/>
-          </a:effectRef>
-          <a:fontRef idx="minor">
-            <a:schemeClr val="lt1"/>
-          </a:fontRef>
-        </p:style>
-        <p:txBody>
-          <a:bodyPr rtlCol="0" anchor="ctr" lIns="0" rIns="0" tIns="0" bIns="0"/>
-          <a:lstStyle/>
-          <a:p>
-            <a:pPr algn="ctr"/>
-            <a:r>
-              <a:rPr sz="1500" b="1">
-                <a:solidFill>
-                  <a:srgbClr val="202122"/>
-                </a:solidFill>
-                <a:latin typeface="Calibri"/>
-              </a:rPr>
-              <a:t>1</a:t>
-            </a:r>
-          </a:p>
-        </p:txBody>
-      </p:sp>
-      <p:sp>
-        <p:nvSpPr>
-          <p:cNvPr id="8" name="TextBox 7"/>
-          <p:cNvSpPr txBox="1"/>
-          <p:nvPr/>
-        </p:nvSpPr>
-        <p:spPr>
-          <a:xfrm>
-            <a:off x="1371600" y="1801368"/>
-            <a:ext cx="2509418" cy="512064"/>
-          </a:xfrm>
-          <a:prstGeom prst="rect">
-            <a:avLst/>
-          </a:prstGeom>
-          <a:noFill/>
-        </p:spPr>
-        <p:txBody>
-          <a:bodyPr wrap="square" anchor="ctr" lIns="0" rIns="0" tIns="0" bIns="0"/>
-          <a:lstStyle/>
-          <a:p>
-            <a:pPr algn="l"/>
-            <a:r>
-              <a:rPr sz="1900" b="1" i="0">
-                <a:solidFill>
-                  <a:srgbClr val="03306E"/>
-                </a:solidFill>
-                <a:latin typeface="Calibri"/>
-              </a:rPr>
-              <a:t>Datum</a:t>
-            </a:r>
-          </a:p>
-        </p:txBody>
-      </p:sp>
-      <p:sp>
-        <p:nvSpPr>
-          <p:cNvPr id="9" name="TextBox 8"/>
-          <p:cNvSpPr txBox="1"/>
-          <p:nvPr/>
-        </p:nvSpPr>
-        <p:spPr>
-          <a:xfrm>
-            <a:off x="777240" y="2468880"/>
-            <a:ext cx="3058058" cy="1143000"/>
-          </a:xfrm>
-          <a:prstGeom prst="rect">
-            <a:avLst/>
-          </a:prstGeom>
-          <a:noFill/>
-        </p:spPr>
-        <p:txBody>
-          <a:bodyPr wrap="square" anchor="t" lIns="0" rIns="0" tIns="0" bIns="0"/>
-          <a:lstStyle/>
-          <a:p>
-            <a:pPr algn="l"/>
-            <a:r>
-              <a:rPr sz="2000" b="0" i="0">
-                <a:solidFill>
-                  <a:srgbClr val="202122"/>
-                </a:solidFill>
-                <a:latin typeface="Calibri"/>
-              </a:rPr>
-              <a:t>A reference surface or feature to measure from.</a:t>
-            </a:r>
-          </a:p>
-        </p:txBody>
-      </p:sp>
-      <p:sp>
-        <p:nvSpPr>
-          <p:cNvPr id="10" name="Rounded Rectangle 9"/>
-          <p:cNvSpPr/>
-          <p:nvPr/>
-        </p:nvSpPr>
-        <p:spPr>
-          <a:xfrm>
-            <a:off x="4338218" y="1600200"/>
-            <a:ext cx="3515258" cy="2148840"/>
-          </a:xfrm>
-          <a:prstGeom prst="roundRect">
-            <a:avLst>
-              <a:gd name="adj" fmla="val 6000"/>
-            </a:avLst>
-          </a:prstGeom>
-          <a:solidFill>
-            <a:srgbClr val="EAF3FF"/>
-          </a:solidFill>
-          <a:ln>
-            <a:noFill/>
-          </a:ln>
-          <a:effectLst/>
-        </p:spPr>
-        <p:style>
-          <a:lnRef idx="1">
-            <a:schemeClr val="accent1"/>
-          </a:lnRef>
-          <a:fillRef idx="3">
-            <a:schemeClr val="accent1"/>
-          </a:fillRef>
-          <a:effectRef idx="2">
-            <a:schemeClr val="accent1"/>
-          </a:effectRef>
-          <a:fontRef idx="minor">
-            <a:schemeClr val="lt1"/>
-          </a:fontRef>
-        </p:style>
-        <p:txBody>
-          <a:bodyPr rtlCol="0" anchor="ctr"/>
-          <a:lstStyle/>
-          <a:p/>
-        </p:txBody>
-      </p:sp>
-      <p:sp>
-        <p:nvSpPr>
-          <p:cNvPr id="11" name="Oval 10"/>
-          <p:cNvSpPr/>
-          <p:nvPr/>
-        </p:nvSpPr>
-        <p:spPr>
-          <a:xfrm>
-            <a:off x="4566818" y="1828800"/>
-            <a:ext cx="457200" cy="457200"/>
-          </a:xfrm>
-          <a:prstGeom prst="ellipse">
-            <a:avLst/>
-          </a:prstGeom>
-          <a:solidFill>
-            <a:srgbClr val="F2B705"/>
-          </a:solidFill>
-          <a:ln>
-            <a:noFill/>
-          </a:ln>
-          <a:effectLst/>
-        </p:spPr>
-        <p:style>
-          <a:lnRef idx="1">
-            <a:schemeClr val="accent1"/>
-          </a:lnRef>
-          <a:fillRef idx="3">
-            <a:schemeClr val="accent1"/>
-          </a:fillRef>
-          <a:effectRef idx="2">
-            <a:schemeClr val="accent1"/>
-          </a:effectRef>
-          <a:fontRef idx="minor">
-            <a:schemeClr val="lt1"/>
-          </a:fontRef>
-        </p:style>
-        <p:txBody>
-          <a:bodyPr rtlCol="0" anchor="ctr" lIns="0" rIns="0" tIns="0" bIns="0"/>
-          <a:lstStyle/>
-          <a:p>
-            <a:pPr algn="ctr"/>
-            <a:r>
-              <a:rPr sz="1500" b="1">
-                <a:solidFill>
-                  <a:srgbClr val="202122"/>
-                </a:solidFill>
-                <a:latin typeface="Calibri"/>
-              </a:rPr>
-              <a:t>2</a:t>
-            </a:r>
-          </a:p>
-        </p:txBody>
-      </p:sp>
-      <p:sp>
-        <p:nvSpPr>
-          <p:cNvPr id="12" name="TextBox 11"/>
-          <p:cNvSpPr txBox="1"/>
-          <p:nvPr/>
-        </p:nvSpPr>
-        <p:spPr>
-          <a:xfrm>
-            <a:off x="5161178" y="1801368"/>
-            <a:ext cx="2509418" cy="512064"/>
-          </a:xfrm>
-          <a:prstGeom prst="rect">
-            <a:avLst/>
-          </a:prstGeom>
-          <a:noFill/>
-        </p:spPr>
-        <p:txBody>
-          <a:bodyPr wrap="square" anchor="ctr" lIns="0" rIns="0" tIns="0" bIns="0"/>
-          <a:lstStyle/>
-          <a:p>
-            <a:pPr algn="l"/>
-            <a:r>
-              <a:rPr sz="1900" b="1" i="0">
-                <a:solidFill>
-                  <a:srgbClr val="03306E"/>
-                </a:solidFill>
-                <a:latin typeface="Calibri"/>
-              </a:rPr>
-              <a:t>Parallelism</a:t>
-            </a:r>
-          </a:p>
-        </p:txBody>
-      </p:sp>
-      <p:sp>
-        <p:nvSpPr>
-          <p:cNvPr id="13" name="TextBox 12"/>
-          <p:cNvSpPr txBox="1"/>
-          <p:nvPr/>
-        </p:nvSpPr>
-        <p:spPr>
-          <a:xfrm>
-            <a:off x="4566818" y="2468880"/>
-            <a:ext cx="3058058" cy="1143000"/>
-          </a:xfrm>
-          <a:prstGeom prst="rect">
-            <a:avLst/>
-          </a:prstGeom>
-          <a:noFill/>
-        </p:spPr>
-        <p:txBody>
-          <a:bodyPr wrap="square" anchor="t" lIns="0" rIns="0" tIns="0" bIns="0"/>
-          <a:lstStyle/>
-          <a:p>
-            <a:pPr algn="l"/>
-            <a:r>
-              <a:rPr sz="2000" b="0" i="0">
-                <a:solidFill>
-                  <a:srgbClr val="202122"/>
-                </a:solidFill>
-                <a:latin typeface="Calibri"/>
-              </a:rPr>
-              <a:t>A surface stays parallel to a datum.</a:t>
-            </a:r>
-          </a:p>
-        </p:txBody>
-      </p:sp>
-      <p:sp>
-        <p:nvSpPr>
-          <p:cNvPr id="14" name="Rounded Rectangle 13"/>
-          <p:cNvSpPr/>
-          <p:nvPr/>
-        </p:nvSpPr>
-        <p:spPr>
-          <a:xfrm>
-            <a:off x="8127796" y="1600200"/>
-            <a:ext cx="3515258" cy="2148840"/>
-          </a:xfrm>
-          <a:prstGeom prst="roundRect">
-            <a:avLst>
-              <a:gd name="adj" fmla="val 6000"/>
-            </a:avLst>
-          </a:prstGeom>
-          <a:solidFill>
-            <a:srgbClr val="EAF3FF"/>
-          </a:solidFill>
-          <a:ln>
-            <a:noFill/>
-          </a:ln>
-          <a:effectLst/>
-        </p:spPr>
-        <p:style>
-          <a:lnRef idx="1">
-            <a:schemeClr val="accent1"/>
-          </a:lnRef>
-          <a:fillRef idx="3">
-            <a:schemeClr val="accent1"/>
-          </a:fillRef>
-          <a:effectRef idx="2">
-            <a:schemeClr val="accent1"/>
-          </a:effectRef>
-          <a:fontRef idx="minor">
-            <a:schemeClr val="lt1"/>
-          </a:fontRef>
-        </p:style>
-        <p:txBody>
-          <a:bodyPr rtlCol="0" anchor="ctr"/>
-          <a:lstStyle/>
-          <a:p/>
-        </p:txBody>
-      </p:sp>
-      <p:sp>
-        <p:nvSpPr>
-          <p:cNvPr id="15" name="Oval 14"/>
-          <p:cNvSpPr/>
-          <p:nvPr/>
-        </p:nvSpPr>
-        <p:spPr>
-          <a:xfrm>
-            <a:off x="8356396" y="1828800"/>
-            <a:ext cx="457200" cy="457200"/>
-          </a:xfrm>
-          <a:prstGeom prst="ellipse">
-            <a:avLst/>
-          </a:prstGeom>
-          <a:solidFill>
-            <a:srgbClr val="F2B705"/>
-          </a:solidFill>
-          <a:ln>
-            <a:noFill/>
-          </a:ln>
-          <a:effectLst/>
-        </p:spPr>
-        <p:style>
-          <a:lnRef idx="1">
-            <a:schemeClr val="accent1"/>
-          </a:lnRef>
-          <a:fillRef idx="3">
-            <a:schemeClr val="accent1"/>
-          </a:fillRef>
-          <a:effectRef idx="2">
-            <a:schemeClr val="accent1"/>
-          </a:effectRef>
-          <a:fontRef idx="minor">
-            <a:schemeClr val="lt1"/>
-          </a:fontRef>
-        </p:style>
-        <p:txBody>
-          <a:bodyPr rtlCol="0" anchor="ctr" lIns="0" rIns="0" tIns="0" bIns="0"/>
-          <a:lstStyle/>
-          <a:p>
-            <a:pPr algn="ctr"/>
-            <a:r>
-              <a:rPr sz="1500" b="1">
-                <a:solidFill>
-                  <a:srgbClr val="202122"/>
-                </a:solidFill>
-                <a:latin typeface="Calibri"/>
-              </a:rPr>
-              <a:t>3</a:t>
-            </a:r>
-          </a:p>
-        </p:txBody>
-      </p:sp>
-      <p:sp>
-        <p:nvSpPr>
-          <p:cNvPr id="16" name="TextBox 15"/>
-          <p:cNvSpPr txBox="1"/>
-          <p:nvPr/>
-        </p:nvSpPr>
-        <p:spPr>
-          <a:xfrm>
-            <a:off x="8950756" y="1801368"/>
-            <a:ext cx="2509418" cy="512064"/>
-          </a:xfrm>
-          <a:prstGeom prst="rect">
-            <a:avLst/>
-          </a:prstGeom>
-          <a:noFill/>
-        </p:spPr>
-        <p:txBody>
-          <a:bodyPr wrap="square" anchor="ctr" lIns="0" rIns="0" tIns="0" bIns="0"/>
-          <a:lstStyle/>
-          <a:p>
-            <a:pPr algn="l"/>
-            <a:r>
-              <a:rPr sz="1900" b="1" i="0">
-                <a:solidFill>
-                  <a:srgbClr val="03306E"/>
-                </a:solidFill>
-                <a:latin typeface="Calibri"/>
-              </a:rPr>
-              <a:t>Perpendicularity</a:t>
-            </a:r>
-          </a:p>
-        </p:txBody>
-      </p:sp>
-      <p:sp>
-        <p:nvSpPr>
-          <p:cNvPr id="17" name="TextBox 16"/>
-          <p:cNvSpPr txBox="1"/>
-          <p:nvPr/>
-        </p:nvSpPr>
-        <p:spPr>
-          <a:xfrm>
-            <a:off x="8356396" y="2468880"/>
-            <a:ext cx="3058058" cy="1143000"/>
-          </a:xfrm>
-          <a:prstGeom prst="rect">
-            <a:avLst/>
-          </a:prstGeom>
-          <a:noFill/>
-        </p:spPr>
-        <p:txBody>
-          <a:bodyPr wrap="square" anchor="t" lIns="0" rIns="0" tIns="0" bIns="0"/>
-          <a:lstStyle/>
-          <a:p>
-            <a:pPr algn="l"/>
-            <a:r>
-              <a:rPr sz="2000" b="0" i="0">
-                <a:solidFill>
-                  <a:srgbClr val="202122"/>
-                </a:solidFill>
-                <a:latin typeface="Calibri"/>
-              </a:rPr>
-              <a:t>A surface stays at 90 degrees to a datum.</a:t>
-            </a:r>
-          </a:p>
-        </p:txBody>
-      </p:sp>
-      <p:sp>
-        <p:nvSpPr>
-          <p:cNvPr id="18" name="Rounded Rectangle 17"/>
-          <p:cNvSpPr/>
-          <p:nvPr/>
-        </p:nvSpPr>
-        <p:spPr>
-          <a:xfrm>
-            <a:off x="548640" y="4023360"/>
-            <a:ext cx="3515258" cy="2148840"/>
-          </a:xfrm>
-          <a:prstGeom prst="roundRect">
-            <a:avLst>
-              <a:gd name="adj" fmla="val 6000"/>
-            </a:avLst>
-          </a:prstGeom>
-          <a:solidFill>
-            <a:srgbClr val="EAF3FF"/>
-          </a:solidFill>
-          <a:ln>
-            <a:noFill/>
-          </a:ln>
-          <a:effectLst/>
-        </p:spPr>
-        <p:style>
-          <a:lnRef idx="1">
-            <a:schemeClr val="accent1"/>
-          </a:lnRef>
-          <a:fillRef idx="3">
-            <a:schemeClr val="accent1"/>
-          </a:fillRef>
-          <a:effectRef idx="2">
-            <a:schemeClr val="accent1"/>
-          </a:effectRef>
-          <a:fontRef idx="minor">
-            <a:schemeClr val="lt1"/>
-          </a:fontRef>
-        </p:style>
-        <p:txBody>
-          <a:bodyPr rtlCol="0" anchor="ctr"/>
-          <a:lstStyle/>
-          <a:p/>
-        </p:txBody>
-      </p:sp>
-      <p:sp>
-        <p:nvSpPr>
-          <p:cNvPr id="19" name="Oval 18"/>
-          <p:cNvSpPr/>
-          <p:nvPr/>
-        </p:nvSpPr>
-        <p:spPr>
-          <a:xfrm>
-            <a:off x="777240" y="4251960"/>
-            <a:ext cx="457200" cy="457200"/>
-          </a:xfrm>
-          <a:prstGeom prst="ellipse">
-            <a:avLst/>
-          </a:prstGeom>
-          <a:solidFill>
-            <a:srgbClr val="F2B705"/>
-          </a:solidFill>
-          <a:ln>
-            <a:noFill/>
-          </a:ln>
-          <a:effectLst/>
-        </p:spPr>
-        <p:style>
-          <a:lnRef idx="1">
-            <a:schemeClr val="accent1"/>
-          </a:lnRef>
-          <a:fillRef idx="3">
-            <a:schemeClr val="accent1"/>
-          </a:fillRef>
-          <a:effectRef idx="2">
-            <a:schemeClr val="accent1"/>
-          </a:effectRef>
-          <a:fontRef idx="minor">
-            <a:schemeClr val="lt1"/>
-          </a:fontRef>
-        </p:style>
-        <p:txBody>
-          <a:bodyPr rtlCol="0" anchor="ctr" lIns="0" rIns="0" tIns="0" bIns="0"/>
-          <a:lstStyle/>
-          <a:p>
-            <a:pPr algn="ctr"/>
-            <a:r>
-              <a:rPr sz="1500" b="1">
-                <a:solidFill>
-                  <a:srgbClr val="202122"/>
-                </a:solidFill>
-                <a:latin typeface="Calibri"/>
-              </a:rPr>
-              <a:t>4</a:t>
-            </a:r>
-          </a:p>
-        </p:txBody>
-      </p:sp>
-      <p:sp>
-        <p:nvSpPr>
-          <p:cNvPr id="20" name="TextBox 19"/>
-          <p:cNvSpPr txBox="1"/>
-          <p:nvPr/>
-        </p:nvSpPr>
-        <p:spPr>
-          <a:xfrm>
-            <a:off x="1371600" y="4224528"/>
-            <a:ext cx="2509418" cy="512064"/>
-          </a:xfrm>
-          <a:prstGeom prst="rect">
-            <a:avLst/>
-          </a:prstGeom>
-          <a:noFill/>
-        </p:spPr>
-        <p:txBody>
-          <a:bodyPr wrap="square" anchor="ctr" lIns="0" rIns="0" tIns="0" bIns="0"/>
-          <a:lstStyle/>
-          <a:p>
-            <a:pPr algn="l"/>
-            <a:r>
-              <a:rPr sz="1900" b="1" i="0">
-                <a:solidFill>
-                  <a:srgbClr val="03306E"/>
-                </a:solidFill>
-                <a:latin typeface="Calibri"/>
-              </a:rPr>
-              <a:t>Concentricity</a:t>
-            </a:r>
-          </a:p>
-        </p:txBody>
-      </p:sp>
-      <p:sp>
-        <p:nvSpPr>
-          <p:cNvPr id="21" name="TextBox 20"/>
-          <p:cNvSpPr txBox="1"/>
-          <p:nvPr/>
-        </p:nvSpPr>
-        <p:spPr>
-          <a:xfrm>
-            <a:off x="777240" y="4892040"/>
-            <a:ext cx="3058058" cy="1143000"/>
-          </a:xfrm>
-          <a:prstGeom prst="rect">
-            <a:avLst/>
-          </a:prstGeom>
-          <a:noFill/>
-        </p:spPr>
-        <p:txBody>
-          <a:bodyPr wrap="square" anchor="t" lIns="0" rIns="0" tIns="0" bIns="0"/>
-          <a:lstStyle/>
-          <a:p>
-            <a:pPr algn="l"/>
-            <a:r>
-              <a:rPr sz="2000" b="0" i="0">
-                <a:solidFill>
-                  <a:srgbClr val="202122"/>
-                </a:solidFill>
-                <a:latin typeface="Calibri"/>
-              </a:rPr>
-              <a:t>Circular features share a centre.</a:t>
-            </a:r>
-          </a:p>
-        </p:txBody>
-      </p:sp>
-      <p:sp>
-        <p:nvSpPr>
-          <p:cNvPr id="22" name="Rounded Rectangle 21"/>
-          <p:cNvSpPr/>
-          <p:nvPr/>
-        </p:nvSpPr>
-        <p:spPr>
-          <a:xfrm>
-            <a:off x="4338218" y="4023360"/>
-            <a:ext cx="3515258" cy="2148840"/>
-          </a:xfrm>
-          <a:prstGeom prst="roundRect">
-            <a:avLst>
-              <a:gd name="adj" fmla="val 6000"/>
-            </a:avLst>
-          </a:prstGeom>
-          <a:solidFill>
-            <a:srgbClr val="EAF3FF"/>
-          </a:solidFill>
-          <a:ln>
-            <a:noFill/>
-          </a:ln>
-          <a:effectLst/>
-        </p:spPr>
-        <p:style>
-          <a:lnRef idx="1">
-            <a:schemeClr val="accent1"/>
-          </a:lnRef>
-          <a:fillRef idx="3">
-            <a:schemeClr val="accent1"/>
-          </a:fillRef>
-          <a:effectRef idx="2">
-            <a:schemeClr val="accent1"/>
-          </a:effectRef>
-          <a:fontRef idx="minor">
-            <a:schemeClr val="lt1"/>
-          </a:fontRef>
-        </p:style>
-        <p:txBody>
-          <a:bodyPr rtlCol="0" anchor="ctr"/>
-          <a:lstStyle/>
-          <a:p/>
-        </p:txBody>
-      </p:sp>
-      <p:sp>
-        <p:nvSpPr>
-          <p:cNvPr id="23" name="Oval 22"/>
-          <p:cNvSpPr/>
-          <p:nvPr/>
-        </p:nvSpPr>
-        <p:spPr>
-          <a:xfrm>
-            <a:off x="4566818" y="4251960"/>
-            <a:ext cx="457200" cy="457200"/>
-          </a:xfrm>
-          <a:prstGeom prst="ellipse">
-            <a:avLst/>
-          </a:prstGeom>
-          <a:solidFill>
-            <a:srgbClr val="F2B705"/>
-          </a:solidFill>
-          <a:ln>
-            <a:noFill/>
-          </a:ln>
-          <a:effectLst/>
-        </p:spPr>
-        <p:style>
-          <a:lnRef idx="1">
-            <a:schemeClr val="accent1"/>
-          </a:lnRef>
-          <a:fillRef idx="3">
-            <a:schemeClr val="accent1"/>
-          </a:fillRef>
-          <a:effectRef idx="2">
-            <a:schemeClr val="accent1"/>
-          </a:effectRef>
-          <a:fontRef idx="minor">
-            <a:schemeClr val="lt1"/>
-          </a:fontRef>
-        </p:style>
-        <p:txBody>
-          <a:bodyPr rtlCol="0" anchor="ctr" lIns="0" rIns="0" tIns="0" bIns="0"/>
-          <a:lstStyle/>
-          <a:p>
-            <a:pPr algn="ctr"/>
-            <a:r>
-              <a:rPr sz="1500" b="1">
-                <a:solidFill>
-                  <a:srgbClr val="202122"/>
-                </a:solidFill>
-                <a:latin typeface="Calibri"/>
-              </a:rPr>
-              <a:t>5</a:t>
-            </a:r>
-          </a:p>
-        </p:txBody>
-      </p:sp>
-      <p:sp>
-        <p:nvSpPr>
-          <p:cNvPr id="24" name="TextBox 23"/>
-          <p:cNvSpPr txBox="1"/>
-          <p:nvPr/>
-        </p:nvSpPr>
-        <p:spPr>
-          <a:xfrm>
-            <a:off x="5161178" y="4224528"/>
-            <a:ext cx="2509418" cy="512064"/>
-          </a:xfrm>
-          <a:prstGeom prst="rect">
-            <a:avLst/>
-          </a:prstGeom>
-          <a:noFill/>
-        </p:spPr>
-        <p:txBody>
-          <a:bodyPr wrap="square" anchor="ctr" lIns="0" rIns="0" tIns="0" bIns="0"/>
-          <a:lstStyle/>
-          <a:p>
-            <a:pPr algn="l"/>
-            <a:r>
-              <a:rPr sz="1900" b="1" i="0">
-                <a:solidFill>
-                  <a:srgbClr val="03306E"/>
-                </a:solidFill>
-                <a:latin typeface="Calibri"/>
-              </a:rPr>
-              <a:t>Straightness</a:t>
-            </a:r>
-          </a:p>
-        </p:txBody>
-      </p:sp>
-      <p:sp>
-        <p:nvSpPr>
-          <p:cNvPr id="25" name="TextBox 24"/>
-          <p:cNvSpPr txBox="1"/>
-          <p:nvPr/>
-        </p:nvSpPr>
-        <p:spPr>
-          <a:xfrm>
-            <a:off x="4566818" y="4892040"/>
-            <a:ext cx="3058058" cy="1143000"/>
-          </a:xfrm>
-          <a:prstGeom prst="rect">
-            <a:avLst/>
-          </a:prstGeom>
-          <a:noFill/>
-        </p:spPr>
-        <p:txBody>
-          <a:bodyPr wrap="square" anchor="t" lIns="0" rIns="0" tIns="0" bIns="0"/>
-          <a:lstStyle/>
-          <a:p>
-            <a:pPr algn="l"/>
-            <a:r>
-              <a:rPr sz="2000" b="0" i="0">
-                <a:solidFill>
-                  <a:srgbClr val="202122"/>
-                </a:solidFill>
-                <a:latin typeface="Calibri"/>
-              </a:rPr>
-              <a:t>A line or edge stays straight.</a:t>
-            </a:r>
-          </a:p>
-        </p:txBody>
-      </p:sp>
-    </p:spTree>
-  </p:cSld>
-  <p:clrMapOvr>
-    <a:masterClrMapping/>
-  </p:clrMapOvr>
-</p:sld>
-</file>
-
 <file path=ppt/slides/slide7.xml><?xml version="1.0" encoding="utf-8"?>
 <p:sld xmlns:a="http://schemas.openxmlformats.org/drawingml/2006/main" xmlns:p="http://schemas.openxmlformats.org/presentationml/2006/main" xmlns:r="http://schemas.openxmlformats.org/officeDocument/2006/relationships">
   <p:cSld>
@@ -8522,7 +11833,7 @@
                 </a:solidFill>
                 <a:latin typeface="Cambria"/>
               </a:rPr>
-              <a:t>Check your understanding</a:t>
+              <a:t>Tolerances, limits and fits</a:t>
             </a:r>
           </a:p>
         </p:txBody>
@@ -8595,14 +11906,145 @@
       </p:sp>
       <p:sp>
         <p:nvSpPr>
-          <p:cNvPr id="6" name="Oval 5"/>
+          <p:cNvPr id="6" name="TextBox 5"/>
+          <p:cNvSpPr txBox="1"/>
+          <p:nvPr/>
+        </p:nvSpPr>
+        <p:spPr>
+          <a:xfrm>
+            <a:off x="548640" y="1554480"/>
+            <a:ext cx="6720840" cy="4617720"/>
+          </a:xfrm>
+          <a:prstGeom prst="rect">
+            <a:avLst/>
+          </a:prstGeom>
+          <a:noFill/>
+        </p:spPr>
+        <p:txBody>
+          <a:bodyPr wrap="square" lIns="0" rIns="0" tIns="0" bIns="0">
+            <a:spAutoFit/>
+          </a:bodyPr>
+          <a:lstStyle/>
+          <a:p>
+            <a:pPr>
+              <a:spcAft>
+                <a:spcPts val="1200"/>
+              </a:spcAft>
+            </a:pPr>
+            <a:r>
+              <a:rPr sz="2000" b="0">
+                <a:solidFill>
+                  <a:srgbClr val="202122"/>
+                </a:solidFill>
+                <a:latin typeface="Calibri"/>
+              </a:rPr>
+              <a:t>No part can be made to an exact size, so drawings state how much variation is acceptable.</a:t>
+            </a:r>
+          </a:p>
+          <a:p>
+            <a:pPr>
+              <a:spcAft>
+                <a:spcPts val="1200"/>
+              </a:spcAft>
+            </a:pPr>
+            <a:r>
+              <a:rPr sz="2000" b="0">
+                <a:solidFill>
+                  <a:srgbClr val="202122"/>
+                </a:solidFill>
+                <a:latin typeface="Calibri"/>
+              </a:rPr>
+              <a:t>The tolerance is the total allowed variation. The limits are the largest and smallest acceptable sizes. A dimension of 20 mm plus or minus 0.1 mm has limits of 19.9 mm and 20.1 mm and a tolerance of 0.2 mm.</a:t>
+            </a:r>
+          </a:p>
+          <a:p>
+            <a:pPr>
+              <a:spcAft>
+                <a:spcPts val="1200"/>
+              </a:spcAft>
+            </a:pPr>
+            <a:r>
+              <a:rPr sz="2000" b="0">
+                <a:solidFill>
+                  <a:srgbClr val="202122"/>
+                </a:solidFill>
+                <a:latin typeface="Calibri"/>
+              </a:rPr>
+              <a:t>Fits describe how two parts go together. A clearance fit always leaves a gap, so parts move freely. An interference fit is always tight, so parts must be pressed together. A transition fit could be either.</a:t>
+            </a:r>
+          </a:p>
+          <a:p>
+            <a:pPr>
+              <a:spcAft>
+                <a:spcPts val="1200"/>
+              </a:spcAft>
+            </a:pPr>
+            <a:r>
+              <a:rPr sz="2000" b="0">
+                <a:solidFill>
+                  <a:srgbClr val="202122"/>
+                </a:solidFill>
+                <a:latin typeface="Calibri"/>
+              </a:rPr>
+              <a:t>Tighter tolerances cost more, so specify only what the function needs.</a:t>
+            </a:r>
+          </a:p>
+        </p:txBody>
+      </p:sp>
+      <p:sp>
+        <p:nvSpPr>
+          <p:cNvPr id="7" name="Rounded Rectangle 6"/>
           <p:cNvSpPr/>
           <p:nvPr/>
         </p:nvSpPr>
         <p:spPr>
           <a:xfrm>
-            <a:off x="548640" y="1618488"/>
-            <a:ext cx="411480" cy="411480"/>
+            <a:off x="7772400" y="1554480"/>
+            <a:ext cx="3867912" cy="4526280"/>
+          </a:xfrm>
+          <a:prstGeom prst="roundRect">
+            <a:avLst>
+              <a:gd name="adj" fmla="val 8000"/>
+            </a:avLst>
+          </a:prstGeom>
+          <a:solidFill>
+            <a:srgbClr val="03306E"/>
+          </a:solidFill>
+          <a:ln>
+            <a:noFill/>
+          </a:ln>
+          <a:effectLst/>
+        </p:spPr>
+        <p:style>
+          <a:lnRef idx="1">
+            <a:schemeClr val="accent1"/>
+          </a:lnRef>
+          <a:fillRef idx="3">
+            <a:schemeClr val="accent1"/>
+          </a:fillRef>
+          <a:effectRef idx="2">
+            <a:schemeClr val="accent1"/>
+          </a:effectRef>
+          <a:fontRef idx="minor">
+            <a:schemeClr val="lt1"/>
+          </a:fontRef>
+        </p:style>
+        <p:txBody>
+          <a:bodyPr rtlCol="0" anchor="ctr"/>
+          <a:lstStyle/>
+          <a:p/>
+        </p:txBody>
+      </p:sp>
+      <p:sp>
+        <p:nvSpPr>
+          <p:cNvPr id="8" name="Oval 7"/>
+          <p:cNvSpPr/>
+          <p:nvPr/>
+        </p:nvSpPr>
+        <p:spPr>
+          <a:xfrm>
+            <a:off x="8046720" y="1828800"/>
+            <a:ext cx="548640" cy="548640"/>
           </a:xfrm>
           <a:prstGeom prst="ellipse">
             <a:avLst/>
@@ -8635,99 +12077,13 @@
           <a:p>
             <a:pPr algn="ctr"/>
             <a:r>
-              <a:rPr sz="1400" b="1">
+              <a:rPr sz="1300" b="1">
                 <a:solidFill>
                   <a:srgbClr val="202122"/>
                 </a:solidFill>
                 <a:latin typeface="Calibri"/>
               </a:rPr>
-              <a:t>1</a:t>
-            </a:r>
-          </a:p>
-        </p:txBody>
-      </p:sp>
-      <p:sp>
-        <p:nvSpPr>
-          <p:cNvPr id="7" name="TextBox 6"/>
-          <p:cNvSpPr txBox="1"/>
-          <p:nvPr/>
-        </p:nvSpPr>
-        <p:spPr>
-          <a:xfrm>
-            <a:off x="1234440" y="1600200"/>
-            <a:ext cx="10408615" cy="1030986"/>
-          </a:xfrm>
-          <a:prstGeom prst="rect">
-            <a:avLst/>
-          </a:prstGeom>
-          <a:noFill/>
-        </p:spPr>
-        <p:txBody>
-          <a:bodyPr wrap="square" anchor="t" lIns="0" rIns="0" tIns="0" bIns="0"/>
-          <a:lstStyle/>
-          <a:p>
-            <a:pPr algn="l"/>
-            <a:r>
-              <a:rPr sz="2200" b="0" i="0">
-                <a:solidFill>
-                  <a:srgbClr val="202122"/>
-                </a:solidFill>
-                <a:latin typeface="Calibri"/>
-              </a:rPr>
-              <a:t>What does PCD stand for?</a:t>
-            </a:r>
-          </a:p>
-        </p:txBody>
-      </p:sp>
-      <p:sp>
-        <p:nvSpPr>
-          <p:cNvPr id="8" name="Oval 7"/>
-          <p:cNvSpPr/>
-          <p:nvPr/>
-        </p:nvSpPr>
-        <p:spPr>
-          <a:xfrm>
-            <a:off x="548640" y="2814066"/>
-            <a:ext cx="411480" cy="411480"/>
-          </a:xfrm>
-          <a:prstGeom prst="ellipse">
-            <a:avLst/>
-          </a:prstGeom>
-          <a:solidFill>
-            <a:srgbClr val="F2B705"/>
-          </a:solidFill>
-          <a:ln>
-            <a:noFill/>
-          </a:ln>
-          <a:effectLst/>
-        </p:spPr>
-        <p:style>
-          <a:lnRef idx="1">
-            <a:schemeClr val="accent1"/>
-          </a:lnRef>
-          <a:fillRef idx="3">
-            <a:schemeClr val="accent1"/>
-          </a:fillRef>
-          <a:effectRef idx="2">
-            <a:schemeClr val="accent1"/>
-          </a:effectRef>
-          <a:fontRef idx="minor">
-            <a:schemeClr val="lt1"/>
-          </a:fontRef>
-        </p:style>
-        <p:txBody>
-          <a:bodyPr rtlCol="0" anchor="ctr" lIns="0" rIns="0" tIns="0" bIns="0"/>
-          <a:lstStyle/>
-          <a:p>
-            <a:pPr algn="ctr"/>
-            <a:r>
-              <a:rPr sz="1400" b="1">
-                <a:solidFill>
-                  <a:srgbClr val="202122"/>
-                </a:solidFill>
-                <a:latin typeface="Calibri"/>
-              </a:rPr>
-              <a:t>2</a:t>
+              <a:t>e.g.</a:t>
             </a:r>
           </a:p>
         </p:txBody>
@@ -8740,8 +12096,8 @@
         </p:nvSpPr>
         <p:spPr>
           <a:xfrm>
-            <a:off x="1234440" y="2795778"/>
-            <a:ext cx="10408615" cy="1030986"/>
+            <a:off x="8046720" y="2560320"/>
+            <a:ext cx="3291840" cy="365760"/>
           </a:xfrm>
           <a:prstGeom prst="rect">
             <a:avLst/>
@@ -8754,80 +12110,27 @@
           <a:p>
             <a:pPr algn="l"/>
             <a:r>
-              <a:rPr sz="2200" b="0" i="0">
-                <a:solidFill>
-                  <a:srgbClr val="202122"/>
-                </a:solidFill>
-                <a:latin typeface="Calibri"/>
-              </a:rPr>
-              <a:t>A hole is 12 mm plus or minus 0.05 mm. What are its limits?</a:t>
-            </a:r>
-          </a:p>
-        </p:txBody>
-      </p:sp>
-      <p:sp>
-        <p:nvSpPr>
-          <p:cNvPr id="10" name="Oval 9"/>
-          <p:cNvSpPr/>
-          <p:nvPr/>
-        </p:nvSpPr>
-        <p:spPr>
-          <a:xfrm>
-            <a:off x="548640" y="4009644"/>
-            <a:ext cx="411480" cy="411480"/>
-          </a:xfrm>
-          <a:prstGeom prst="ellipse">
-            <a:avLst/>
-          </a:prstGeom>
-          <a:solidFill>
-            <a:srgbClr val="F2B705"/>
-          </a:solidFill>
-          <a:ln>
-            <a:noFill/>
-          </a:ln>
-          <a:effectLst/>
-        </p:spPr>
-        <p:style>
-          <a:lnRef idx="1">
-            <a:schemeClr val="accent1"/>
-          </a:lnRef>
-          <a:fillRef idx="3">
-            <a:schemeClr val="accent1"/>
-          </a:fillRef>
-          <a:effectRef idx="2">
-            <a:schemeClr val="accent1"/>
-          </a:effectRef>
-          <a:fontRef idx="minor">
-            <a:schemeClr val="lt1"/>
-          </a:fontRef>
-        </p:style>
-        <p:txBody>
-          <a:bodyPr rtlCol="0" anchor="ctr" lIns="0" rIns="0" tIns="0" bIns="0"/>
-          <a:lstStyle/>
-          <a:p>
-            <a:pPr algn="ctr"/>
-            <a:r>
-              <a:rPr sz="1400" b="1">
-                <a:solidFill>
-                  <a:srgbClr val="202122"/>
-                </a:solidFill>
-                <a:latin typeface="Calibri"/>
-              </a:rPr>
-              <a:t>3</a:t>
-            </a:r>
-          </a:p>
-        </p:txBody>
-      </p:sp>
-      <p:sp>
-        <p:nvSpPr>
-          <p:cNvPr id="11" name="TextBox 10"/>
+              <a:rPr sz="1300" b="1" i="0">
+                <a:solidFill>
+                  <a:srgbClr val="A9C8F0"/>
+                </a:solidFill>
+                <a:latin typeface="Calibri"/>
+              </a:rPr>
+              <a:t>EXAMPLE</a:t>
+            </a:r>
+          </a:p>
+        </p:txBody>
+      </p:sp>
+      <p:sp>
+        <p:nvSpPr>
+          <p:cNvPr id="10" name="TextBox 9"/>
           <p:cNvSpPr txBox="1"/>
           <p:nvPr/>
         </p:nvSpPr>
         <p:spPr>
           <a:xfrm>
-            <a:off x="1234440" y="3991356"/>
-            <a:ext cx="10408615" cy="1030986"/>
+            <a:off x="8046720" y="2971800"/>
+            <a:ext cx="3291840" cy="2971800"/>
           </a:xfrm>
           <a:prstGeom prst="rect">
             <a:avLst/>
@@ -8840,99 +12143,13 @@
           <a:p>
             <a:pPr algn="l"/>
             <a:r>
-              <a:rPr sz="2200" b="0" i="0">
-                <a:solidFill>
-                  <a:srgbClr val="202122"/>
-                </a:solidFill>
-                <a:latin typeface="Calibri"/>
-              </a:rPr>
-              <a:t>Which fit always has a gap?</a:t>
-            </a:r>
-          </a:p>
-        </p:txBody>
-      </p:sp>
-      <p:sp>
-        <p:nvSpPr>
-          <p:cNvPr id="12" name="Oval 11"/>
-          <p:cNvSpPr/>
-          <p:nvPr/>
-        </p:nvSpPr>
-        <p:spPr>
-          <a:xfrm>
-            <a:off x="548640" y="5205221"/>
-            <a:ext cx="411480" cy="411480"/>
-          </a:xfrm>
-          <a:prstGeom prst="ellipse">
-            <a:avLst/>
-          </a:prstGeom>
-          <a:solidFill>
-            <a:srgbClr val="F2B705"/>
-          </a:solidFill>
-          <a:ln>
-            <a:noFill/>
-          </a:ln>
-          <a:effectLst/>
-        </p:spPr>
-        <p:style>
-          <a:lnRef idx="1">
-            <a:schemeClr val="accent1"/>
-          </a:lnRef>
-          <a:fillRef idx="3">
-            <a:schemeClr val="accent1"/>
-          </a:fillRef>
-          <a:effectRef idx="2">
-            <a:schemeClr val="accent1"/>
-          </a:effectRef>
-          <a:fontRef idx="minor">
-            <a:schemeClr val="lt1"/>
-          </a:fontRef>
-        </p:style>
-        <p:txBody>
-          <a:bodyPr rtlCol="0" anchor="ctr" lIns="0" rIns="0" tIns="0" bIns="0"/>
-          <a:lstStyle/>
-          <a:p>
-            <a:pPr algn="ctr"/>
-            <a:r>
-              <a:rPr sz="1400" b="1">
-                <a:solidFill>
-                  <a:srgbClr val="202122"/>
-                </a:solidFill>
-                <a:latin typeface="Calibri"/>
-              </a:rPr>
-              <a:t>4</a:t>
-            </a:r>
-          </a:p>
-        </p:txBody>
-      </p:sp>
-      <p:sp>
-        <p:nvSpPr>
-          <p:cNvPr id="13" name="TextBox 12"/>
-          <p:cNvSpPr txBox="1"/>
-          <p:nvPr/>
-        </p:nvSpPr>
-        <p:spPr>
-          <a:xfrm>
-            <a:off x="1234440" y="5186933"/>
-            <a:ext cx="10408615" cy="1030986"/>
-          </a:xfrm>
-          <a:prstGeom prst="rect">
-            <a:avLst/>
-          </a:prstGeom>
-          <a:noFill/>
-        </p:spPr>
-        <p:txBody>
-          <a:bodyPr wrap="square" anchor="t" lIns="0" rIns="0" tIns="0" bIns="0"/>
-          <a:lstStyle/>
-          <a:p>
-            <a:pPr algn="l"/>
-            <a:r>
-              <a:rPr sz="2200" b="0" i="0">
-                <a:solidFill>
-                  <a:srgbClr val="202122"/>
-                </a:solidFill>
-                <a:latin typeface="Calibri"/>
-              </a:rPr>
-              <a:t>Which drawing type is best for showing assembly?</a:t>
+              <a:rPr sz="1900" b="0" i="0">
+                <a:solidFill>
+                  <a:srgbClr val="FFFFFF"/>
+                </a:solidFill>
+                <a:latin typeface="Cambria"/>
+              </a:rPr>
+              <a:t>A shaft is 25.00 to 25.02 mm and its hole 25.05 to 25.08 mm. The smallest gap is 0.03 mm, so it's a clearance fit and the shaft always turns freely.</a:t>
             </a:r>
           </a:p>
         </p:txBody>
@@ -9024,7 +12241,7 @@
                 </a:solidFill>
                 <a:latin typeface="Cambria"/>
               </a:rPr>
-              <a:t>Answers</a:t>
+              <a:t>Tolerances, limits and fits</a:t>
             </a:r>
           </a:p>
         </p:txBody>
@@ -9097,14 +12314,201 @@
       </p:sp>
       <p:sp>
         <p:nvSpPr>
-          <p:cNvPr id="6" name="Oval 5"/>
+          <p:cNvPr id="6" name="TextBox 5"/>
+          <p:cNvSpPr txBox="1"/>
+          <p:nvPr/>
+        </p:nvSpPr>
+        <p:spPr>
+          <a:xfrm>
+            <a:off x="548640" y="1600200"/>
+            <a:ext cx="6675120" cy="4572000"/>
+          </a:xfrm>
+          <a:prstGeom prst="rect">
+            <a:avLst/>
+          </a:prstGeom>
+          <a:noFill/>
+        </p:spPr>
+        <p:txBody>
+          <a:bodyPr wrap="square" lIns="0" rIns="0" tIns="0" bIns="0">
+            <a:spAutoFit/>
+          </a:bodyPr>
+          <a:lstStyle/>
+          <a:p>
+            <a:pPr marL="274320" indent="-274320">
+              <a:spcAft>
+                <a:spcPts val="1080"/>
+              </a:spcAft>
+              <a:buClr>
+                <a:srgbClr val="0645AD"/>
+              </a:buClr>
+              <a:buFont typeface="Arial"/>
+              <a:buChar char="•"/>
+            </a:pPr>
+            <a:r>
+              <a:rPr sz="2400" b="1">
+                <a:solidFill>
+                  <a:srgbClr val="202122"/>
+                </a:solidFill>
+                <a:latin typeface="Calibri"/>
+              </a:rPr>
+              <a:t>Tolerance:</a:t>
+            </a:r>
+            <a:r>
+              <a:rPr sz="2400" b="0">
+                <a:solidFill>
+                  <a:srgbClr val="202122"/>
+                </a:solidFill>
+                <a:latin typeface="Calibri"/>
+              </a:rPr>
+              <a:t> the total allowed variation in a dimension.</a:t>
+            </a:r>
+          </a:p>
+          <a:p>
+            <a:pPr marL="274320" indent="-274320">
+              <a:spcAft>
+                <a:spcPts val="1080"/>
+              </a:spcAft>
+              <a:buClr>
+                <a:srgbClr val="0645AD"/>
+              </a:buClr>
+              <a:buFont typeface="Arial"/>
+              <a:buChar char="•"/>
+            </a:pPr>
+            <a:r>
+              <a:rPr sz="2400" b="1">
+                <a:solidFill>
+                  <a:srgbClr val="202122"/>
+                </a:solidFill>
+                <a:latin typeface="Calibri"/>
+              </a:rPr>
+              <a:t>Limits:</a:t>
+            </a:r>
+            <a:r>
+              <a:rPr sz="2400" b="0">
+                <a:solidFill>
+                  <a:srgbClr val="202122"/>
+                </a:solidFill>
+                <a:latin typeface="Calibri"/>
+              </a:rPr>
+              <a:t> the largest and smallest acceptable sizes.</a:t>
+            </a:r>
+          </a:p>
+          <a:p>
+            <a:pPr marL="274320" indent="-274320">
+              <a:spcAft>
+                <a:spcPts val="1080"/>
+              </a:spcAft>
+              <a:buClr>
+                <a:srgbClr val="0645AD"/>
+              </a:buClr>
+              <a:buFont typeface="Arial"/>
+              <a:buChar char="•"/>
+            </a:pPr>
+            <a:r>
+              <a:rPr sz="2400" b="1">
+                <a:solidFill>
+                  <a:srgbClr val="202122"/>
+                </a:solidFill>
+                <a:latin typeface="Calibri"/>
+              </a:rPr>
+              <a:t>Example:</a:t>
+            </a:r>
+            <a:r>
+              <a:rPr sz="2400" b="0">
+                <a:solidFill>
+                  <a:srgbClr val="202122"/>
+                </a:solidFill>
+                <a:latin typeface="Calibri"/>
+              </a:rPr>
+              <a:t> 20 mm plus or minus 0.1 mm gives limits of 19.9 mm and 20.1 mm, a tolerance of 0.2 mm.</a:t>
+            </a:r>
+          </a:p>
+          <a:p>
+            <a:pPr marL="274320" indent="-274320">
+              <a:spcAft>
+                <a:spcPts val="1080"/>
+              </a:spcAft>
+              <a:buClr>
+                <a:srgbClr val="0645AD"/>
+              </a:buClr>
+              <a:buFont typeface="Arial"/>
+              <a:buChar char="•"/>
+            </a:pPr>
+            <a:r>
+              <a:rPr sz="2400" b="1">
+                <a:solidFill>
+                  <a:srgbClr val="202122"/>
+                </a:solidFill>
+                <a:latin typeface="Calibri"/>
+              </a:rPr>
+              <a:t>Fits:</a:t>
+            </a:r>
+            <a:r>
+              <a:rPr sz="2400" b="0">
+                <a:solidFill>
+                  <a:srgbClr val="202122"/>
+                </a:solidFill>
+                <a:latin typeface="Calibri"/>
+              </a:rPr>
+              <a:t> clearance (always a gap), interference (always tight), transition (either).</a:t>
+            </a:r>
+          </a:p>
+        </p:txBody>
+      </p:sp>
+      <p:sp>
+        <p:nvSpPr>
+          <p:cNvPr id="7" name="Rounded Rectangle 6"/>
           <p:cNvSpPr/>
           <p:nvPr/>
         </p:nvSpPr>
         <p:spPr>
           <a:xfrm>
-            <a:off x="548640" y="1618488"/>
-            <a:ext cx="411480" cy="411480"/>
+            <a:off x="7772400" y="1600200"/>
+            <a:ext cx="3867912" cy="4434840"/>
+          </a:xfrm>
+          <a:prstGeom prst="roundRect">
+            <a:avLst>
+              <a:gd name="adj" fmla="val 8000"/>
+            </a:avLst>
+          </a:prstGeom>
+          <a:solidFill>
+            <a:srgbClr val="03306E"/>
+          </a:solidFill>
+          <a:ln>
+            <a:noFill/>
+          </a:ln>
+          <a:effectLst/>
+        </p:spPr>
+        <p:style>
+          <a:lnRef idx="1">
+            <a:schemeClr val="accent1"/>
+          </a:lnRef>
+          <a:fillRef idx="3">
+            <a:schemeClr val="accent1"/>
+          </a:fillRef>
+          <a:effectRef idx="2">
+            <a:schemeClr val="accent1"/>
+          </a:effectRef>
+          <a:fontRef idx="minor">
+            <a:schemeClr val="lt1"/>
+          </a:fontRef>
+        </p:style>
+        <p:txBody>
+          <a:bodyPr rtlCol="0" anchor="ctr"/>
+          <a:lstStyle/>
+          <a:p/>
+        </p:txBody>
+      </p:sp>
+      <p:sp>
+        <p:nvSpPr>
+          <p:cNvPr id="8" name="Oval 7"/>
+          <p:cNvSpPr/>
+          <p:nvPr/>
+        </p:nvSpPr>
+        <p:spPr>
+          <a:xfrm>
+            <a:off x="8046720" y="1874519"/>
+            <a:ext cx="548640" cy="548640"/>
           </a:xfrm>
           <a:prstGeom prst="ellipse">
             <a:avLst/>
@@ -9137,110 +12541,13 @@
           <a:p>
             <a:pPr algn="ctr"/>
             <a:r>
-              <a:rPr sz="1400" b="1">
+              <a:rPr sz="2000" b="1">
                 <a:solidFill>
                   <a:srgbClr val="202122"/>
                 </a:solidFill>
                 <a:latin typeface="Calibri"/>
               </a:rPr>
-              <a:t>1</a:t>
-            </a:r>
-          </a:p>
-        </p:txBody>
-      </p:sp>
-      <p:sp>
-        <p:nvSpPr>
-          <p:cNvPr id="7" name="TextBox 6"/>
-          <p:cNvSpPr txBox="1"/>
-          <p:nvPr/>
-        </p:nvSpPr>
-        <p:spPr>
-          <a:xfrm>
-            <a:off x="1234440" y="1600200"/>
-            <a:ext cx="10408615" cy="1030986"/>
-          </a:xfrm>
-          <a:prstGeom prst="rect">
-            <a:avLst/>
-          </a:prstGeom>
-          <a:noFill/>
-        </p:spPr>
-        <p:txBody>
-          <a:bodyPr wrap="square" anchor="t" lIns="0" rIns="0" tIns="0" bIns="0"/>
-          <a:lstStyle/>
-          <a:p>
-            <a:pPr algn="l"/>
-            <a:r>
-              <a:rPr sz="1800" b="0" i="0">
-                <a:solidFill>
-                  <a:srgbClr val="54595D"/>
-                </a:solidFill>
-                <a:latin typeface="Calibri"/>
-              </a:rPr>
-              <a:t>What does PCD stand for?</a:t>
-            </a:r>
-          </a:p>
-          <a:p>
-            <a:r>
-              <a:rPr sz="1800" b="1">
-                <a:solidFill>
-                  <a:srgbClr val="03306E"/>
-                </a:solidFill>
-                <a:latin typeface="Calibri"/>
-              </a:rPr>
-              <a:t>Pitch circle diameter.</a:t>
-            </a:r>
-          </a:p>
-        </p:txBody>
-      </p:sp>
-      <p:sp>
-        <p:nvSpPr>
-          <p:cNvPr id="8" name="Oval 7"/>
-          <p:cNvSpPr/>
-          <p:nvPr/>
-        </p:nvSpPr>
-        <p:spPr>
-          <a:xfrm>
-            <a:off x="548640" y="2814066"/>
-            <a:ext cx="411480" cy="411480"/>
-          </a:xfrm>
-          <a:prstGeom prst="ellipse">
-            <a:avLst/>
-          </a:prstGeom>
-          <a:solidFill>
-            <a:srgbClr val="F2B705"/>
-          </a:solidFill>
-          <a:ln>
-            <a:noFill/>
-          </a:ln>
-          <a:effectLst/>
-        </p:spPr>
-        <p:style>
-          <a:lnRef idx="1">
-            <a:schemeClr val="accent1"/>
-          </a:lnRef>
-          <a:fillRef idx="3">
-            <a:schemeClr val="accent1"/>
-          </a:fillRef>
-          <a:effectRef idx="2">
-            <a:schemeClr val="accent1"/>
-          </a:effectRef>
-          <a:fontRef idx="minor">
-            <a:schemeClr val="lt1"/>
-          </a:fontRef>
-        </p:style>
-        <p:txBody>
-          <a:bodyPr rtlCol="0" anchor="ctr" lIns="0" rIns="0" tIns="0" bIns="0"/>
-          <a:lstStyle/>
-          <a:p>
-            <a:pPr algn="ctr"/>
-            <a:r>
-              <a:rPr sz="1400" b="1">
-                <a:solidFill>
-                  <a:srgbClr val="202122"/>
-                </a:solidFill>
-                <a:latin typeface="Calibri"/>
-              </a:rPr>
-              <a:t>2</a:t>
+              <a:t>!</a:t>
             </a:r>
           </a:p>
         </p:txBody>
@@ -9253,8 +12560,8 @@
         </p:nvSpPr>
         <p:spPr>
           <a:xfrm>
-            <a:off x="1234440" y="2795778"/>
-            <a:ext cx="10408615" cy="1030986"/>
+            <a:off x="8046720" y="2606040"/>
+            <a:ext cx="3291840" cy="365760"/>
           </a:xfrm>
           <a:prstGeom prst="rect">
             <a:avLst/>
@@ -9267,91 +12574,27 @@
           <a:p>
             <a:pPr algn="l"/>
             <a:r>
-              <a:rPr sz="1800" b="0" i="0">
-                <a:solidFill>
-                  <a:srgbClr val="54595D"/>
-                </a:solidFill>
-                <a:latin typeface="Calibri"/>
-              </a:rPr>
-              <a:t>A hole is 12 mm plus or minus 0.05 mm. What are its limits?</a:t>
-            </a:r>
-          </a:p>
-          <a:p>
-            <a:r>
-              <a:rPr sz="1800" b="1">
-                <a:solidFill>
-                  <a:srgbClr val="03306E"/>
-                </a:solidFill>
-                <a:latin typeface="Calibri"/>
-              </a:rPr>
-              <a:t>11.95 mm and 12.05 mm.</a:t>
-            </a:r>
-          </a:p>
-        </p:txBody>
-      </p:sp>
-      <p:sp>
-        <p:nvSpPr>
-          <p:cNvPr id="10" name="Oval 9"/>
-          <p:cNvSpPr/>
-          <p:nvPr/>
-        </p:nvSpPr>
-        <p:spPr>
-          <a:xfrm>
-            <a:off x="548640" y="4009644"/>
-            <a:ext cx="411480" cy="411480"/>
-          </a:xfrm>
-          <a:prstGeom prst="ellipse">
-            <a:avLst/>
-          </a:prstGeom>
-          <a:solidFill>
-            <a:srgbClr val="F2B705"/>
-          </a:solidFill>
-          <a:ln>
-            <a:noFill/>
-          </a:ln>
-          <a:effectLst/>
-        </p:spPr>
-        <p:style>
-          <a:lnRef idx="1">
-            <a:schemeClr val="accent1"/>
-          </a:lnRef>
-          <a:fillRef idx="3">
-            <a:schemeClr val="accent1"/>
-          </a:fillRef>
-          <a:effectRef idx="2">
-            <a:schemeClr val="accent1"/>
-          </a:effectRef>
-          <a:fontRef idx="minor">
-            <a:schemeClr val="lt1"/>
-          </a:fontRef>
-        </p:style>
-        <p:txBody>
-          <a:bodyPr rtlCol="0" anchor="ctr" lIns="0" rIns="0" tIns="0" bIns="0"/>
-          <a:lstStyle/>
-          <a:p>
-            <a:pPr algn="ctr"/>
-            <a:r>
-              <a:rPr sz="1400" b="1">
-                <a:solidFill>
-                  <a:srgbClr val="202122"/>
-                </a:solidFill>
-                <a:latin typeface="Calibri"/>
-              </a:rPr>
-              <a:t>3</a:t>
-            </a:r>
-          </a:p>
-        </p:txBody>
-      </p:sp>
-      <p:sp>
-        <p:nvSpPr>
-          <p:cNvPr id="11" name="TextBox 10"/>
+              <a:rPr sz="1300" b="1" i="0">
+                <a:solidFill>
+                  <a:srgbClr val="A9C8F0"/>
+                </a:solidFill>
+                <a:latin typeface="Calibri"/>
+              </a:rPr>
+              <a:t>KEY IDEA</a:t>
+            </a:r>
+          </a:p>
+        </p:txBody>
+      </p:sp>
+      <p:sp>
+        <p:nvSpPr>
+          <p:cNvPr id="10" name="TextBox 9"/>
           <p:cNvSpPr txBox="1"/>
           <p:nvPr/>
         </p:nvSpPr>
         <p:spPr>
           <a:xfrm>
-            <a:off x="1234440" y="3991356"/>
-            <a:ext cx="10408615" cy="1030986"/>
+            <a:off x="8046720" y="3017520"/>
+            <a:ext cx="3291840" cy="2926080"/>
           </a:xfrm>
           <a:prstGeom prst="rect">
             <a:avLst/>
@@ -9364,121 +12607,13 @@
           <a:p>
             <a:pPr algn="l"/>
             <a:r>
-              <a:rPr sz="1800" b="0" i="0">
-                <a:solidFill>
-                  <a:srgbClr val="54595D"/>
-                </a:solidFill>
-                <a:latin typeface="Calibri"/>
-              </a:rPr>
-              <a:t>Which fit always has a gap?</a:t>
-            </a:r>
-          </a:p>
-          <a:p>
-            <a:r>
-              <a:rPr sz="1800" b="1">
-                <a:solidFill>
-                  <a:srgbClr val="03306E"/>
-                </a:solidFill>
-                <a:latin typeface="Calibri"/>
-              </a:rPr>
-              <a:t>A clearance fit.</a:t>
-            </a:r>
-          </a:p>
-        </p:txBody>
-      </p:sp>
-      <p:sp>
-        <p:nvSpPr>
-          <p:cNvPr id="12" name="Oval 11"/>
-          <p:cNvSpPr/>
-          <p:nvPr/>
-        </p:nvSpPr>
-        <p:spPr>
-          <a:xfrm>
-            <a:off x="548640" y="5205221"/>
-            <a:ext cx="411480" cy="411480"/>
-          </a:xfrm>
-          <a:prstGeom prst="ellipse">
-            <a:avLst/>
-          </a:prstGeom>
-          <a:solidFill>
-            <a:srgbClr val="F2B705"/>
-          </a:solidFill>
-          <a:ln>
-            <a:noFill/>
-          </a:ln>
-          <a:effectLst/>
-        </p:spPr>
-        <p:style>
-          <a:lnRef idx="1">
-            <a:schemeClr val="accent1"/>
-          </a:lnRef>
-          <a:fillRef idx="3">
-            <a:schemeClr val="accent1"/>
-          </a:fillRef>
-          <a:effectRef idx="2">
-            <a:schemeClr val="accent1"/>
-          </a:effectRef>
-          <a:fontRef idx="minor">
-            <a:schemeClr val="lt1"/>
-          </a:fontRef>
-        </p:style>
-        <p:txBody>
-          <a:bodyPr rtlCol="0" anchor="ctr" lIns="0" rIns="0" tIns="0" bIns="0"/>
-          <a:lstStyle/>
-          <a:p>
-            <a:pPr algn="ctr"/>
-            <a:r>
-              <a:rPr sz="1400" b="1">
-                <a:solidFill>
-                  <a:srgbClr val="202122"/>
-                </a:solidFill>
-                <a:latin typeface="Calibri"/>
-              </a:rPr>
-              <a:t>4</a:t>
-            </a:r>
-          </a:p>
-        </p:txBody>
-      </p:sp>
-      <p:sp>
-        <p:nvSpPr>
-          <p:cNvPr id="13" name="TextBox 12"/>
-          <p:cNvSpPr txBox="1"/>
-          <p:nvPr/>
-        </p:nvSpPr>
-        <p:spPr>
-          <a:xfrm>
-            <a:off x="1234440" y="5186933"/>
-            <a:ext cx="10408615" cy="1030986"/>
-          </a:xfrm>
-          <a:prstGeom prst="rect">
-            <a:avLst/>
-          </a:prstGeom>
-          <a:noFill/>
-        </p:spPr>
-        <p:txBody>
-          <a:bodyPr wrap="square" anchor="t" lIns="0" rIns="0" tIns="0" bIns="0"/>
-          <a:lstStyle/>
-          <a:p>
-            <a:pPr algn="l"/>
-            <a:r>
-              <a:rPr sz="1800" b="0" i="0">
-                <a:solidFill>
-                  <a:srgbClr val="54595D"/>
-                </a:solidFill>
-                <a:latin typeface="Calibri"/>
-              </a:rPr>
-              <a:t>Which drawing type is best for showing assembly?</a:t>
-            </a:r>
-          </a:p>
-          <a:p>
-            <a:r>
-              <a:rPr sz="1800" b="1">
-                <a:solidFill>
-                  <a:srgbClr val="03306E"/>
-                </a:solidFill>
-                <a:latin typeface="Calibri"/>
-              </a:rPr>
-              <a:t>An exploded view.</a:t>
+              <a:rPr sz="2200" b="0" i="0">
+                <a:solidFill>
+                  <a:srgbClr val="FFFFFF"/>
+                </a:solidFill>
+                <a:latin typeface="Cambria"/>
+              </a:rPr>
+              <a:t>Tighter tolerances cost more to make. Only specify what the function really needs.</a:t>
             </a:r>
           </a:p>
         </p:txBody>
@@ -9570,7 +12705,7 @@
                 </a:solidFill>
                 <a:latin typeface="Cambria"/>
               </a:rPr>
-              <a:t>Activity: Read the drawing</a:t>
+              <a:t>Quick check: Tolerances, limits and fits</a:t>
             </a:r>
           </a:p>
         </p:txBody>
@@ -9643,19 +12778,17 @@
       </p:sp>
       <p:sp>
         <p:nvSpPr>
-          <p:cNvPr id="6" name="Rounded Rectangle 5"/>
+          <p:cNvPr id="6" name="Oval 5"/>
           <p:cNvSpPr/>
           <p:nvPr/>
         </p:nvSpPr>
         <p:spPr>
           <a:xfrm>
-            <a:off x="548640" y="1508760"/>
-            <a:ext cx="2011680" cy="457200"/>
-          </a:xfrm>
-          <a:prstGeom prst="roundRect">
-            <a:avLst>
-              <a:gd name="adj" fmla="val 50000"/>
-            </a:avLst>
+            <a:off x="548640" y="1691640"/>
+            <a:ext cx="502920" cy="502920"/>
+          </a:xfrm>
+          <a:prstGeom prst="ellipse">
+            <a:avLst/>
           </a:prstGeom>
           <a:solidFill>
             <a:srgbClr val="F2B705"/>
@@ -9680,9 +12813,20 @@
           </a:fontRef>
         </p:style>
         <p:txBody>
-          <a:bodyPr rtlCol="0" anchor="ctr"/>
-          <a:lstStyle/>
-          <a:p/>
+          <a:bodyPr rtlCol="0" anchor="ctr" lIns="0" rIns="0" tIns="0" bIns="0"/>
+          <a:lstStyle/>
+          <a:p>
+            <a:pPr algn="ctr"/>
+            <a:r>
+              <a:rPr sz="1600" b="1">
+                <a:solidFill>
+                  <a:srgbClr val="202122"/>
+                </a:solidFill>
+                <a:latin typeface="Calibri"/>
+              </a:rPr>
+              <a:t>1</a:t>
+            </a:r>
+          </a:p>
         </p:txBody>
       </p:sp>
       <p:sp>
@@ -9693,8 +12837,8 @@
         </p:nvSpPr>
         <p:spPr>
           <a:xfrm>
-            <a:off x="548640" y="1508760"/>
-            <a:ext cx="2011680" cy="457200"/>
+            <a:off x="1371600" y="1645920"/>
+            <a:ext cx="10271455" cy="1188720"/>
           </a:xfrm>
           <a:prstGeom prst="rect">
             <a:avLst/>
@@ -9702,71 +12846,38 @@
           <a:noFill/>
         </p:spPr>
         <p:txBody>
-          <a:bodyPr wrap="square" anchor="ctr" lIns="0" rIns="0" tIns="0" bIns="0"/>
-          <a:lstStyle/>
-          <a:p>
-            <a:pPr algn="ctr"/>
-            <a:r>
-              <a:rPr sz="1400" b="1" i="0">
+          <a:bodyPr wrap="square" anchor="t" lIns="0" rIns="0" tIns="0" bIns="0"/>
+          <a:lstStyle/>
+          <a:p>
+            <a:pPr algn="l"/>
+            <a:r>
+              <a:rPr sz="2400" b="0" i="0">
                 <a:solidFill>
                   <a:srgbClr val="202122"/>
                 </a:solidFill>
                 <a:latin typeface="Calibri"/>
               </a:rPr>
-              <a:t>25 minutes</a:t>
-            </a:r>
-          </a:p>
-        </p:txBody>
-      </p:sp>
-      <p:sp>
-        <p:nvSpPr>
-          <p:cNvPr id="8" name="TextBox 7"/>
-          <p:cNvSpPr txBox="1"/>
-          <p:nvPr/>
-        </p:nvSpPr>
-        <p:spPr>
-          <a:xfrm>
-            <a:off x="2743200" y="1508760"/>
-            <a:ext cx="4754880" cy="457200"/>
-          </a:xfrm>
-          <a:prstGeom prst="rect">
-            <a:avLst/>
-          </a:prstGeom>
-          <a:noFill/>
-        </p:spPr>
-        <p:txBody>
-          <a:bodyPr wrap="square" anchor="ctr" lIns="0" rIns="0" tIns="0" bIns="0"/>
-          <a:lstStyle/>
-          <a:p>
-            <a:pPr algn="l"/>
-            <a:r>
-              <a:rPr sz="1400" b="0" i="1">
-                <a:solidFill>
-                  <a:srgbClr val="54595D"/>
-                </a:solidFill>
-                <a:latin typeface="Calibri"/>
-              </a:rPr>
-              <a:t>Pairs</a:t>
-            </a:r>
-          </a:p>
-        </p:txBody>
-      </p:sp>
-      <p:sp>
-        <p:nvSpPr>
-          <p:cNvPr id="9" name="Oval 8"/>
+              <a:t>A dimension is 50 mm plus or minus 0.2 mm. What are the limits?</a:t>
+            </a:r>
+          </a:p>
+        </p:txBody>
+      </p:sp>
+      <p:sp>
+        <p:nvSpPr>
+          <p:cNvPr id="8" name="Oval 7"/>
           <p:cNvSpPr/>
           <p:nvPr/>
         </p:nvSpPr>
         <p:spPr>
           <a:xfrm>
-            <a:off x="548640" y="2482596"/>
-            <a:ext cx="384048" cy="384048"/>
+            <a:off x="548640" y="3108960"/>
+            <a:ext cx="502920" cy="502920"/>
           </a:xfrm>
           <a:prstGeom prst="ellipse">
             <a:avLst/>
           </a:prstGeom>
           <a:solidFill>
-            <a:srgbClr val="0645AD"/>
+            <a:srgbClr val="F2B705"/>
           </a:solidFill>
           <a:ln>
             <a:noFill/>
@@ -9793,27 +12904,27 @@
           <a:p>
             <a:pPr algn="ctr"/>
             <a:r>
-              <a:rPr sz="1300" b="1">
-                <a:solidFill>
-                  <a:srgbClr val="FFFFFF"/>
-                </a:solidFill>
-                <a:latin typeface="Calibri"/>
-              </a:rPr>
-              <a:t>1</a:t>
-            </a:r>
-          </a:p>
-        </p:txBody>
-      </p:sp>
-      <p:sp>
-        <p:nvSpPr>
-          <p:cNvPr id="10" name="TextBox 9"/>
+              <a:rPr sz="1600" b="1">
+                <a:solidFill>
+                  <a:srgbClr val="202122"/>
+                </a:solidFill>
+                <a:latin typeface="Calibri"/>
+              </a:rPr>
+              <a:t>2</a:t>
+            </a:r>
+          </a:p>
+        </p:txBody>
+      </p:sp>
+      <p:sp>
+        <p:nvSpPr>
+          <p:cNvPr id="9" name="TextBox 8"/>
           <p:cNvSpPr txBox="1"/>
           <p:nvPr/>
         </p:nvSpPr>
         <p:spPr>
           <a:xfrm>
-            <a:off x="1143000" y="2240280"/>
-            <a:ext cx="5943600" cy="868680"/>
+            <a:off x="1371600" y="3063240"/>
+            <a:ext cx="10271455" cy="1188720"/>
           </a:xfrm>
           <a:prstGeom prst="rect">
             <a:avLst/>
@@ -9821,38 +12932,38 @@
           <a:noFill/>
         </p:spPr>
         <p:txBody>
-          <a:bodyPr wrap="square" anchor="ctr" lIns="0" rIns="0" tIns="0" bIns="0"/>
+          <a:bodyPr wrap="square" anchor="t" lIns="0" rIns="0" tIns="0" bIns="0"/>
           <a:lstStyle/>
           <a:p>
             <a:pPr algn="l"/>
             <a:r>
-              <a:rPr sz="1700" b="0" i="0">
+              <a:rPr sz="2400" b="0" i="0">
                 <a:solidFill>
                   <a:srgbClr val="202122"/>
                 </a:solidFill>
                 <a:latin typeface="Calibri"/>
               </a:rPr>
-              <a:t>Study the orthographic drawing from your teacher.</a:t>
-            </a:r>
-          </a:p>
-        </p:txBody>
-      </p:sp>
-      <p:sp>
-        <p:nvSpPr>
-          <p:cNvPr id="11" name="Oval 10"/>
+              <a:t>Which fit always needs pressing together?</a:t>
+            </a:r>
+          </a:p>
+        </p:txBody>
+      </p:sp>
+      <p:sp>
+        <p:nvSpPr>
+          <p:cNvPr id="10" name="Oval 9"/>
           <p:cNvSpPr/>
           <p:nvPr/>
         </p:nvSpPr>
         <p:spPr>
           <a:xfrm>
-            <a:off x="548640" y="3461004"/>
-            <a:ext cx="384048" cy="384048"/>
+            <a:off x="548640" y="4526280"/>
+            <a:ext cx="502920" cy="502920"/>
           </a:xfrm>
           <a:prstGeom prst="ellipse">
             <a:avLst/>
           </a:prstGeom>
           <a:solidFill>
-            <a:srgbClr val="0645AD"/>
+            <a:srgbClr val="F2B705"/>
           </a:solidFill>
           <a:ln>
             <a:noFill/>
@@ -9879,13 +12990,46 @@
           <a:p>
             <a:pPr algn="ctr"/>
             <a:r>
-              <a:rPr sz="1300" b="1">
-                <a:solidFill>
-                  <a:srgbClr val="FFFFFF"/>
-                </a:solidFill>
-                <a:latin typeface="Calibri"/>
-              </a:rPr>
-              <a:t>2</a:t>
+              <a:rPr sz="1600" b="1">
+                <a:solidFill>
+                  <a:srgbClr val="202122"/>
+                </a:solidFill>
+                <a:latin typeface="Calibri"/>
+              </a:rPr>
+              <a:t>3</a:t>
+            </a:r>
+          </a:p>
+        </p:txBody>
+      </p:sp>
+      <p:sp>
+        <p:nvSpPr>
+          <p:cNvPr id="11" name="TextBox 10"/>
+          <p:cNvSpPr txBox="1"/>
+          <p:nvPr/>
+        </p:nvSpPr>
+        <p:spPr>
+          <a:xfrm>
+            <a:off x="1371600" y="4480560"/>
+            <a:ext cx="10271455" cy="1188720"/>
+          </a:xfrm>
+          <a:prstGeom prst="rect">
+            <a:avLst/>
+          </a:prstGeom>
+          <a:noFill/>
+        </p:spPr>
+        <p:txBody>
+          <a:bodyPr wrap="square" anchor="t" lIns="0" rIns="0" tIns="0" bIns="0"/>
+          <a:lstStyle/>
+          <a:p>
+            <a:pPr algn="l"/>
+            <a:r>
+              <a:rPr sz="2400" b="0" i="0">
+                <a:solidFill>
+                  <a:srgbClr val="202122"/>
+                </a:solidFill>
+                <a:latin typeface="Calibri"/>
+              </a:rPr>
+              <a:t>Why not make every tolerance tight?</a:t>
             </a:r>
           </a:p>
         </p:txBody>
@@ -9898,8 +13042,8 @@
         </p:nvSpPr>
         <p:spPr>
           <a:xfrm>
-            <a:off x="1143000" y="3218688"/>
-            <a:ext cx="5943600" cy="868680"/>
+            <a:off x="548640" y="5852160"/>
+            <a:ext cx="11094415" cy="365760"/>
           </a:xfrm>
           <a:prstGeom prst="rect">
             <a:avLst/>
@@ -9907,353 +13051,18 @@
           <a:noFill/>
         </p:spPr>
         <p:txBody>
-          <a:bodyPr wrap="square" anchor="ctr" lIns="0" rIns="0" tIns="0" bIns="0"/>
+          <a:bodyPr wrap="square" anchor="t" lIns="0" rIns="0" tIns="0" bIns="0"/>
           <a:lstStyle/>
           <a:p>
             <a:pPr algn="l"/>
             <a:r>
-              <a:rPr sz="1700" b="0" i="0">
-                <a:solidFill>
-                  <a:srgbClr val="202122"/>
-                </a:solidFill>
-                <a:latin typeface="Calibri"/>
-              </a:rPr>
-              <a:t>List every abbreviation and symbol and what it means.</a:t>
-            </a:r>
-          </a:p>
-        </p:txBody>
-      </p:sp>
-      <p:sp>
-        <p:nvSpPr>
-          <p:cNvPr id="13" name="Oval 12"/>
-          <p:cNvSpPr/>
-          <p:nvPr/>
-        </p:nvSpPr>
-        <p:spPr>
-          <a:xfrm>
-            <a:off x="548640" y="4439412"/>
-            <a:ext cx="384048" cy="384048"/>
-          </a:xfrm>
-          <a:prstGeom prst="ellipse">
-            <a:avLst/>
-          </a:prstGeom>
-          <a:solidFill>
-            <a:srgbClr val="0645AD"/>
-          </a:solidFill>
-          <a:ln>
-            <a:noFill/>
-          </a:ln>
-          <a:effectLst/>
-        </p:spPr>
-        <p:style>
-          <a:lnRef idx="1">
-            <a:schemeClr val="accent1"/>
-          </a:lnRef>
-          <a:fillRef idx="3">
-            <a:schemeClr val="accent1"/>
-          </a:fillRef>
-          <a:effectRef idx="2">
-            <a:schemeClr val="accent1"/>
-          </a:effectRef>
-          <a:fontRef idx="minor">
-            <a:schemeClr val="lt1"/>
-          </a:fontRef>
-        </p:style>
-        <p:txBody>
-          <a:bodyPr rtlCol="0" anchor="ctr" lIns="0" rIns="0" tIns="0" bIns="0"/>
-          <a:lstStyle/>
-          <a:p>
-            <a:pPr algn="ctr"/>
-            <a:r>
-              <a:rPr sz="1300" b="1">
-                <a:solidFill>
-                  <a:srgbClr val="FFFFFF"/>
-                </a:solidFill>
-                <a:latin typeface="Calibri"/>
-              </a:rPr>
-              <a:t>3</a:t>
-            </a:r>
-          </a:p>
-        </p:txBody>
-      </p:sp>
-      <p:sp>
-        <p:nvSpPr>
-          <p:cNvPr id="14" name="TextBox 13"/>
-          <p:cNvSpPr txBox="1"/>
-          <p:nvPr/>
-        </p:nvSpPr>
-        <p:spPr>
-          <a:xfrm>
-            <a:off x="1143000" y="4197096"/>
-            <a:ext cx="5943600" cy="868680"/>
-          </a:xfrm>
-          <a:prstGeom prst="rect">
-            <a:avLst/>
-          </a:prstGeom>
-          <a:noFill/>
-        </p:spPr>
-        <p:txBody>
-          <a:bodyPr wrap="square" anchor="ctr" lIns="0" rIns="0" tIns="0" bIns="0"/>
-          <a:lstStyle/>
-          <a:p>
-            <a:pPr algn="l"/>
-            <a:r>
-              <a:rPr sz="1700" b="0" i="0">
-                <a:solidFill>
-                  <a:srgbClr val="202122"/>
-                </a:solidFill>
-                <a:latin typeface="Calibri"/>
-              </a:rPr>
-              <a:t>Calculate the limits for three toleranced dimensions.</a:t>
-            </a:r>
-          </a:p>
-        </p:txBody>
-      </p:sp>
-      <p:sp>
-        <p:nvSpPr>
-          <p:cNvPr id="15" name="Oval 14"/>
-          <p:cNvSpPr/>
-          <p:nvPr/>
-        </p:nvSpPr>
-        <p:spPr>
-          <a:xfrm>
-            <a:off x="548640" y="5417820"/>
-            <a:ext cx="384048" cy="384048"/>
-          </a:xfrm>
-          <a:prstGeom prst="ellipse">
-            <a:avLst/>
-          </a:prstGeom>
-          <a:solidFill>
-            <a:srgbClr val="0645AD"/>
-          </a:solidFill>
-          <a:ln>
-            <a:noFill/>
-          </a:ln>
-          <a:effectLst/>
-        </p:spPr>
-        <p:style>
-          <a:lnRef idx="1">
-            <a:schemeClr val="accent1"/>
-          </a:lnRef>
-          <a:fillRef idx="3">
-            <a:schemeClr val="accent1"/>
-          </a:fillRef>
-          <a:effectRef idx="2">
-            <a:schemeClr val="accent1"/>
-          </a:effectRef>
-          <a:fontRef idx="minor">
-            <a:schemeClr val="lt1"/>
-          </a:fontRef>
-        </p:style>
-        <p:txBody>
-          <a:bodyPr rtlCol="0" anchor="ctr" lIns="0" rIns="0" tIns="0" bIns="0"/>
-          <a:lstStyle/>
-          <a:p>
-            <a:pPr algn="ctr"/>
-            <a:r>
-              <a:rPr sz="1300" b="1">
-                <a:solidFill>
-                  <a:srgbClr val="FFFFFF"/>
-                </a:solidFill>
-                <a:latin typeface="Calibri"/>
-              </a:rPr>
-              <a:t>4</a:t>
-            </a:r>
-          </a:p>
-        </p:txBody>
-      </p:sp>
-      <p:sp>
-        <p:nvSpPr>
-          <p:cNvPr id="16" name="TextBox 15"/>
-          <p:cNvSpPr txBox="1"/>
-          <p:nvPr/>
-        </p:nvSpPr>
-        <p:spPr>
-          <a:xfrm>
-            <a:off x="1143000" y="5175504"/>
-            <a:ext cx="5943600" cy="868680"/>
-          </a:xfrm>
-          <a:prstGeom prst="rect">
-            <a:avLst/>
-          </a:prstGeom>
-          <a:noFill/>
-        </p:spPr>
-        <p:txBody>
-          <a:bodyPr wrap="square" anchor="ctr" lIns="0" rIns="0" tIns="0" bIns="0"/>
-          <a:lstStyle/>
-          <a:p>
-            <a:pPr algn="l"/>
-            <a:r>
-              <a:rPr sz="1700" b="0" i="0">
-                <a:solidFill>
-                  <a:srgbClr val="202122"/>
-                </a:solidFill>
-                <a:latin typeface="Calibri"/>
-              </a:rPr>
-              <a:t>Identify the fit between the shaft and the hole.</a:t>
-            </a:r>
-          </a:p>
-        </p:txBody>
-      </p:sp>
-      <p:sp>
-        <p:nvSpPr>
-          <p:cNvPr id="17" name="Rounded Rectangle 16"/>
-          <p:cNvSpPr/>
-          <p:nvPr/>
-        </p:nvSpPr>
-        <p:spPr>
-          <a:xfrm>
-            <a:off x="7772400" y="1508760"/>
-            <a:ext cx="3867912" cy="4572000"/>
-          </a:xfrm>
-          <a:prstGeom prst="roundRect">
-            <a:avLst>
-              <a:gd name="adj" fmla="val 8000"/>
-            </a:avLst>
-          </a:prstGeom>
-          <a:solidFill>
-            <a:srgbClr val="EAF3FF"/>
-          </a:solidFill>
-          <a:ln>
-            <a:noFill/>
-          </a:ln>
-          <a:effectLst/>
-        </p:spPr>
-        <p:style>
-          <a:lnRef idx="1">
-            <a:schemeClr val="accent1"/>
-          </a:lnRef>
-          <a:fillRef idx="3">
-            <a:schemeClr val="accent1"/>
-          </a:fillRef>
-          <a:effectRef idx="2">
-            <a:schemeClr val="accent1"/>
-          </a:effectRef>
-          <a:fontRef idx="minor">
-            <a:schemeClr val="lt1"/>
-          </a:fontRef>
-        </p:style>
-        <p:txBody>
-          <a:bodyPr rtlCol="0" anchor="ctr"/>
-          <a:lstStyle/>
-          <a:p/>
-        </p:txBody>
-      </p:sp>
-      <p:sp>
-        <p:nvSpPr>
-          <p:cNvPr id="18" name="TextBox 17"/>
-          <p:cNvSpPr txBox="1"/>
-          <p:nvPr/>
-        </p:nvSpPr>
-        <p:spPr>
-          <a:xfrm>
-            <a:off x="8046720" y="1737360"/>
-            <a:ext cx="3291840" cy="365760"/>
-          </a:xfrm>
-          <a:prstGeom prst="rect">
-            <a:avLst/>
-          </a:prstGeom>
-          <a:noFill/>
-        </p:spPr>
-        <p:txBody>
-          <a:bodyPr wrap="square" anchor="t" lIns="0" rIns="0" tIns="0" bIns="0"/>
-          <a:lstStyle/>
-          <a:p>
-            <a:pPr algn="l"/>
-            <a:r>
-              <a:rPr sz="1300" b="1" i="0">
-                <a:solidFill>
-                  <a:srgbClr val="0645AD"/>
-                </a:solidFill>
-                <a:latin typeface="Calibri"/>
-              </a:rPr>
-              <a:t>SUCCESS CRITERIA</a:t>
-            </a:r>
-          </a:p>
-        </p:txBody>
-      </p:sp>
-      <p:sp>
-        <p:nvSpPr>
-          <p:cNvPr id="19" name="TextBox 18"/>
-          <p:cNvSpPr txBox="1"/>
-          <p:nvPr/>
-        </p:nvSpPr>
-        <p:spPr>
-          <a:xfrm>
-            <a:off x="8046720" y="2240280"/>
-            <a:ext cx="3337560" cy="3657600"/>
-          </a:xfrm>
-          <a:prstGeom prst="rect">
-            <a:avLst/>
-          </a:prstGeom>
-          <a:noFill/>
-        </p:spPr>
-        <p:txBody>
-          <a:bodyPr wrap="square" lIns="0" rIns="0" tIns="0" bIns="0">
-            <a:spAutoFit/>
-          </a:bodyPr>
-          <a:lstStyle/>
-          <a:p>
-            <a:pPr marL="274320" indent="-274320">
-              <a:spcAft>
-                <a:spcPts val="810"/>
-              </a:spcAft>
-              <a:buClr>
-                <a:srgbClr val="0645AD"/>
-              </a:buClr>
-              <a:buFont typeface="Arial"/>
-              <a:buChar char="•"/>
-            </a:pPr>
-            <a:r>
-              <a:rPr sz="1800" b="0">
-                <a:solidFill>
-                  <a:srgbClr val="202122"/>
-                </a:solidFill>
-                <a:latin typeface="Calibri"/>
-              </a:rPr>
-              <a:t>All symbols correctly explained</a:t>
-            </a:r>
-          </a:p>
-          <a:p>
-            <a:pPr marL="274320" indent="-274320">
-              <a:spcAft>
-                <a:spcPts val="810"/>
-              </a:spcAft>
-              <a:buClr>
-                <a:srgbClr val="0645AD"/>
-              </a:buClr>
-              <a:buFont typeface="Arial"/>
-              <a:buChar char="•"/>
-            </a:pPr>
-            <a:r>
-              <a:rPr sz="1800" b="0">
-                <a:solidFill>
-                  <a:srgbClr val="202122"/>
-                </a:solidFill>
-                <a:latin typeface="Calibri"/>
-              </a:rPr>
-              <a:t>Limits calculated accurately</a:t>
-            </a:r>
-          </a:p>
-          <a:p>
-            <a:pPr marL="274320" indent="-274320">
-              <a:spcAft>
-                <a:spcPts val="810"/>
-              </a:spcAft>
-              <a:buClr>
-                <a:srgbClr val="0645AD"/>
-              </a:buClr>
-              <a:buFont typeface="Arial"/>
-              <a:buChar char="•"/>
-            </a:pPr>
-            <a:r>
-              <a:rPr sz="1800" b="0">
-                <a:solidFill>
-                  <a:srgbClr val="202122"/>
-                </a:solidFill>
-                <a:latin typeface="Calibri"/>
-              </a:rPr>
-              <a:t>Fit type justified</a:t>
+              <a:rPr sz="1300" b="0" i="1">
+                <a:solidFill>
+                  <a:srgbClr val="54595D"/>
+                </a:solidFill>
+                <a:latin typeface="Calibri"/>
+              </a:rPr>
+              <a:t>Answer on mini whiteboards or in your book. Answers are in the speaker notes.</a:t>
             </a:r>
           </a:p>
         </p:txBody>
